--- a/capstone/Capstone_Market_Research.pptx
+++ b/capstone/Capstone_Market_Research.pptx
@@ -148,14 +148,14 @@
           </c:tx>
           <c:spPr>
             <a:solidFill>
-              <a:srgbClr val="C3C2DE"/>
+              <a:srgbClr val="C8C8C4"/>
             </a:solidFill>
           </c:spPr>
           <c:dPt>
             <c:idx val="2"/>
             <c:spPr>
               <a:solidFill>
-                <a:srgbClr val="E8604C"/>
+                <a:srgbClr val="F2A900"/>
               </a:solidFill>
             </c:spPr>
           </c:dPt>
@@ -204,7 +204,7 @@
               <a:pPr>
                 <a:defRPr sz="1600" b="1">
                   <a:solidFill>
-                    <a:srgbClr val="1E1B3A"/>
+                    <a:srgbClr val="202124"/>
                   </a:solidFill>
                 </a:defRPr>
               </a:pPr>
@@ -291,7 +291,7 @@
       <a:pPr>
         <a:defRPr sz="1600">
           <a:solidFill>
-            <a:srgbClr val="1E1B3A"/>
+            <a:srgbClr val="202124"/>
           </a:solidFill>
           <a:latin typeface="Calibri"/>
         </a:defRPr>
@@ -331,14 +331,14 @@
           </c:tx>
           <c:spPr>
             <a:solidFill>
-              <a:srgbClr val="C3C2DE"/>
+              <a:srgbClr val="C8C8C4"/>
             </a:solidFill>
           </c:spPr>
           <c:dPt>
             <c:idx val="0"/>
             <c:spPr>
               <a:solidFill>
-                <a:srgbClr val="E8604C"/>
+                <a:srgbClr val="F2A900"/>
               </a:solidFill>
             </c:spPr>
           </c:dPt>
@@ -399,7 +399,7 @@
               <a:pPr>
                 <a:defRPr sz="1600" b="1">
                   <a:solidFill>
-                    <a:srgbClr val="1E1B3A"/>
+                    <a:srgbClr val="202124"/>
                   </a:solidFill>
                 </a:defRPr>
               </a:pPr>
@@ -486,7 +486,7 @@
       <a:pPr>
         <a:defRPr sz="1600">
           <a:solidFill>
-            <a:srgbClr val="1E1B3A"/>
+            <a:srgbClr val="202124"/>
           </a:solidFill>
           <a:latin typeface="Calibri"/>
         </a:defRPr>
@@ -526,14 +526,14 @@
           </c:tx>
           <c:spPr>
             <a:solidFill>
-              <a:srgbClr val="C3C2DE"/>
+              <a:srgbClr val="C8C8C4"/>
             </a:solidFill>
           </c:spPr>
           <c:dPt>
             <c:idx val="0"/>
             <c:spPr>
               <a:solidFill>
-                <a:srgbClr val="E8604C"/>
+                <a:srgbClr val="F2A900"/>
               </a:solidFill>
             </c:spPr>
           </c:dPt>
@@ -582,7 +582,7 @@
               <a:pPr>
                 <a:defRPr sz="1600" b="1">
                   <a:solidFill>
-                    <a:srgbClr val="1E1B3A"/>
+                    <a:srgbClr val="202124"/>
                   </a:solidFill>
                 </a:defRPr>
               </a:pPr>
@@ -669,7 +669,7 @@
       <a:pPr>
         <a:defRPr sz="1600">
           <a:solidFill>
-            <a:srgbClr val="1E1B3A"/>
+            <a:srgbClr val="202124"/>
           </a:solidFill>
           <a:latin typeface="Calibri"/>
         </a:defRPr>
@@ -709,14 +709,14 @@
           </c:tx>
           <c:spPr>
             <a:solidFill>
-              <a:srgbClr val="C3C2DE"/>
+              <a:srgbClr val="C8C8C4"/>
             </a:solidFill>
           </c:spPr>
           <c:dPt>
             <c:idx val="0"/>
             <c:spPr>
               <a:solidFill>
-                <a:srgbClr val="E8604C"/>
+                <a:srgbClr val="F2A900"/>
               </a:solidFill>
             </c:spPr>
           </c:dPt>
@@ -724,7 +724,7 @@
             <c:idx val="1"/>
             <c:spPr>
               <a:solidFill>
-                <a:srgbClr val="E8604C"/>
+                <a:srgbClr val="F2A900"/>
               </a:solidFill>
             </c:spPr>
           </c:dPt>
@@ -797,7 +797,7 @@
               <a:pPr>
                 <a:defRPr sz="1600" b="1">
                   <a:solidFill>
-                    <a:srgbClr val="1E1B3A"/>
+                    <a:srgbClr val="202124"/>
                   </a:solidFill>
                 </a:defRPr>
               </a:pPr>
@@ -884,7 +884,7 @@
       <a:pPr>
         <a:defRPr sz="1600">
           <a:solidFill>
-            <a:srgbClr val="1E1B3A"/>
+            <a:srgbClr val="202124"/>
           </a:solidFill>
           <a:latin typeface="Calibri"/>
         </a:defRPr>
@@ -5218,7 +5218,7 @@
     <p:bg>
       <p:bgPr>
         <a:solidFill>
-          <a:srgbClr val="312E81"/>
+          <a:srgbClr val="202124"/>
         </a:solidFill>
         <a:effectLst/>
       </p:bgPr>
@@ -5245,7 +5245,7 @@
             <a:avLst/>
           </a:prstGeom>
           <a:solidFill>
-            <a:srgbClr val="3D3A96"/>
+            <a:srgbClr val="303134"/>
           </a:solidFill>
           <a:ln>
             <a:noFill/>
@@ -5288,7 +5288,7 @@
             <a:avLst/>
           </a:prstGeom>
           <a:solidFill>
-            <a:srgbClr val="E8604C"/>
+            <a:srgbClr val="F2A900"/>
           </a:solidFill>
           <a:ln>
             <a:noFill/>
@@ -5377,7 +5377,7 @@
             <a:r>
               <a:rPr sz="2200" b="0">
                 <a:solidFill>
-                  <a:srgbClr val="D9D8F2"/>
+                  <a:srgbClr val="D6D6D6"/>
                 </a:solidFill>
                 <a:latin typeface="Calibri"/>
               </a:rPr>
@@ -5393,7 +5393,7 @@
             <a:r>
               <a:rPr sz="1600" b="0">
                 <a:solidFill>
-                  <a:srgbClr val="D9D8F2"/>
+                  <a:srgbClr val="D6D6D6"/>
                 </a:solidFill>
                 <a:latin typeface="Calibri"/>
               </a:rPr>
@@ -5418,7 +5418,7 @@
           </a:prstGeom>
           <a:ln w="50800">
             <a:solidFill>
-              <a:srgbClr val="E8604C"/>
+              <a:srgbClr val="F2A900"/>
             </a:solidFill>
           </a:ln>
         </p:spPr>
@@ -5442,9 +5442,18 @@
   <p:clrMapOvr>
     <a:masterClrMapping/>
   </p:clrMapOvr>
-  <p:transition spd="med" advTm="10000">
-    <p:fade/>
-  </p:transition>
+  <mc:AlternateContent xmlns:mc="http://schemas.openxmlformats.org/markup-compatibility/2006">
+    <mc:Choice xmlns:p14="http://schemas.microsoft.com/office/powerpoint/2010/main" Requires="p14">
+      <p:transition spd="slow" p14:dur="1500" advTm="10000">
+        <p:push dir="u"/>
+      </p:transition>
+    </mc:Choice>
+    <mc:Fallback>
+      <p:transition spd="slow" advTm="10000">
+        <p:push dir="u"/>
+      </p:transition>
+    </mc:Fallback>
+  </mc:AlternateContent>
   <p:timing>
     <p:tnLst>
       <p:par>
@@ -5632,7 +5641,7 @@
     <p:bg>
       <p:bgPr>
         <a:solidFill>
-          <a:srgbClr val="F4F4FA"/>
+          <a:srgbClr val="F5F5F3"/>
         </a:solidFill>
         <a:effectLst/>
       </p:bgPr>
@@ -5659,7 +5668,7 @@
             <a:avLst/>
           </a:prstGeom>
           <a:solidFill>
-            <a:srgbClr val="312E81"/>
+            <a:srgbClr val="202124"/>
           </a:solidFill>
           <a:ln>
             <a:noFill/>
@@ -5768,7 +5777,7 @@
                   <a:tcPr anchor="ctr">
                     <a:lnL w="12700" cap="flat" cmpd="sng" algn="ctr">
                       <a:solidFill>
-                        <a:srgbClr val="D5D5E5"/>
+                        <a:srgbClr val="D9D9D5"/>
                       </a:solidFill>
                       <a:prstDash val="solid"/>
                       <a:round/>
@@ -5777,7 +5786,7 @@
                     </a:lnL>
                     <a:lnR w="12700" cap="flat" cmpd="sng" algn="ctr">
                       <a:solidFill>
-                        <a:srgbClr val="D5D5E5"/>
+                        <a:srgbClr val="D9D9D5"/>
                       </a:solidFill>
                       <a:prstDash val="solid"/>
                       <a:round/>
@@ -5786,7 +5795,7 @@
                     </a:lnR>
                     <a:lnT w="12700" cap="flat" cmpd="sng" algn="ctr">
                       <a:solidFill>
-                        <a:srgbClr val="D5D5E5"/>
+                        <a:srgbClr val="D9D9D5"/>
                       </a:solidFill>
                       <a:prstDash val="solid"/>
                       <a:round/>
@@ -5795,7 +5804,7 @@
                     </a:lnT>
                     <a:lnB w="12700" cap="flat" cmpd="sng" algn="ctr">
                       <a:solidFill>
-                        <a:srgbClr val="D5D5E5"/>
+                        <a:srgbClr val="D9D9D5"/>
                       </a:solidFill>
                       <a:prstDash val="solid"/>
                       <a:round/>
@@ -5803,7 +5812,7 @@
                       <a:tailEnd type="none" w="med" len="med"/>
                     </a:lnB>
                     <a:solidFill>
-                      <a:srgbClr val="312E81"/>
+                      <a:srgbClr val="202124"/>
                     </a:solidFill>
                   </a:tcPr>
                 </a:tc>
@@ -5827,7 +5836,7 @@
                   <a:tcPr anchor="ctr">
                     <a:lnL w="12700" cap="flat" cmpd="sng" algn="ctr">
                       <a:solidFill>
-                        <a:srgbClr val="D5D5E5"/>
+                        <a:srgbClr val="D9D9D5"/>
                       </a:solidFill>
                       <a:prstDash val="solid"/>
                       <a:round/>
@@ -5836,7 +5845,7 @@
                     </a:lnL>
                     <a:lnR w="12700" cap="flat" cmpd="sng" algn="ctr">
                       <a:solidFill>
-                        <a:srgbClr val="D5D5E5"/>
+                        <a:srgbClr val="D9D9D5"/>
                       </a:solidFill>
                       <a:prstDash val="solid"/>
                       <a:round/>
@@ -5845,7 +5854,7 @@
                     </a:lnR>
                     <a:lnT w="12700" cap="flat" cmpd="sng" algn="ctr">
                       <a:solidFill>
-                        <a:srgbClr val="D5D5E5"/>
+                        <a:srgbClr val="D9D9D5"/>
                       </a:solidFill>
                       <a:prstDash val="solid"/>
                       <a:round/>
@@ -5854,7 +5863,7 @@
                     </a:lnT>
                     <a:lnB w="12700" cap="flat" cmpd="sng" algn="ctr">
                       <a:solidFill>
-                        <a:srgbClr val="D5D5E5"/>
+                        <a:srgbClr val="D9D9D5"/>
                       </a:solidFill>
                       <a:prstDash val="solid"/>
                       <a:round/>
@@ -5862,7 +5871,7 @@
                       <a:tailEnd type="none" w="med" len="med"/>
                     </a:lnB>
                     <a:solidFill>
-                      <a:srgbClr val="312E81"/>
+                      <a:srgbClr val="202124"/>
                     </a:solidFill>
                   </a:tcPr>
                 </a:tc>
@@ -5886,7 +5895,7 @@
                   <a:tcPr anchor="ctr">
                     <a:lnL w="12700" cap="flat" cmpd="sng" algn="ctr">
                       <a:solidFill>
-                        <a:srgbClr val="D5D5E5"/>
+                        <a:srgbClr val="D9D9D5"/>
                       </a:solidFill>
                       <a:prstDash val="solid"/>
                       <a:round/>
@@ -5895,7 +5904,7 @@
                     </a:lnL>
                     <a:lnR w="12700" cap="flat" cmpd="sng" algn="ctr">
                       <a:solidFill>
-                        <a:srgbClr val="D5D5E5"/>
+                        <a:srgbClr val="D9D9D5"/>
                       </a:solidFill>
                       <a:prstDash val="solid"/>
                       <a:round/>
@@ -5904,7 +5913,7 @@
                     </a:lnR>
                     <a:lnT w="12700" cap="flat" cmpd="sng" algn="ctr">
                       <a:solidFill>
-                        <a:srgbClr val="D5D5E5"/>
+                        <a:srgbClr val="D9D9D5"/>
                       </a:solidFill>
                       <a:prstDash val="solid"/>
                       <a:round/>
@@ -5913,7 +5922,7 @@
                     </a:lnT>
                     <a:lnB w="12700" cap="flat" cmpd="sng" algn="ctr">
                       <a:solidFill>
-                        <a:srgbClr val="D5D5E5"/>
+                        <a:srgbClr val="D9D9D5"/>
                       </a:solidFill>
                       <a:prstDash val="solid"/>
                       <a:round/>
@@ -5921,7 +5930,7 @@
                       <a:tailEnd type="none" w="med" len="med"/>
                     </a:lnB>
                     <a:solidFill>
-                      <a:srgbClr val="312E81"/>
+                      <a:srgbClr val="202124"/>
                     </a:solidFill>
                   </a:tcPr>
                 </a:tc>
@@ -5945,7 +5954,7 @@
                   <a:tcPr anchor="ctr">
                     <a:lnL w="12700" cap="flat" cmpd="sng" algn="ctr">
                       <a:solidFill>
-                        <a:srgbClr val="D5D5E5"/>
+                        <a:srgbClr val="D9D9D5"/>
                       </a:solidFill>
                       <a:prstDash val="solid"/>
                       <a:round/>
@@ -5954,7 +5963,7 @@
                     </a:lnL>
                     <a:lnR w="12700" cap="flat" cmpd="sng" algn="ctr">
                       <a:solidFill>
-                        <a:srgbClr val="D5D5E5"/>
+                        <a:srgbClr val="D9D9D5"/>
                       </a:solidFill>
                       <a:prstDash val="solid"/>
                       <a:round/>
@@ -5963,7 +5972,7 @@
                     </a:lnR>
                     <a:lnT w="12700" cap="flat" cmpd="sng" algn="ctr">
                       <a:solidFill>
-                        <a:srgbClr val="D5D5E5"/>
+                        <a:srgbClr val="D9D9D5"/>
                       </a:solidFill>
                       <a:prstDash val="solid"/>
                       <a:round/>
@@ -5972,7 +5981,7 @@
                     </a:lnT>
                     <a:lnB w="12700" cap="flat" cmpd="sng" algn="ctr">
                       <a:solidFill>
-                        <a:srgbClr val="D5D5E5"/>
+                        <a:srgbClr val="D9D9D5"/>
                       </a:solidFill>
                       <a:prstDash val="solid"/>
                       <a:round/>
@@ -5980,7 +5989,7 @@
                       <a:tailEnd type="none" w="med" len="med"/>
                     </a:lnB>
                     <a:solidFill>
-                      <a:srgbClr val="312E81"/>
+                      <a:srgbClr val="202124"/>
                     </a:solidFill>
                   </a:tcPr>
                 </a:tc>
@@ -6004,7 +6013,7 @@
                   <a:tcPr anchor="ctr">
                     <a:lnL w="12700" cap="flat" cmpd="sng" algn="ctr">
                       <a:solidFill>
-                        <a:srgbClr val="D5D5E5"/>
+                        <a:srgbClr val="D9D9D5"/>
                       </a:solidFill>
                       <a:prstDash val="solid"/>
                       <a:round/>
@@ -6013,7 +6022,7 @@
                     </a:lnL>
                     <a:lnR w="12700" cap="flat" cmpd="sng" algn="ctr">
                       <a:solidFill>
-                        <a:srgbClr val="D5D5E5"/>
+                        <a:srgbClr val="D9D9D5"/>
                       </a:solidFill>
                       <a:prstDash val="solid"/>
                       <a:round/>
@@ -6022,7 +6031,7 @@
                     </a:lnR>
                     <a:lnT w="12700" cap="flat" cmpd="sng" algn="ctr">
                       <a:solidFill>
-                        <a:srgbClr val="D5D5E5"/>
+                        <a:srgbClr val="D9D9D5"/>
                       </a:solidFill>
                       <a:prstDash val="solid"/>
                       <a:round/>
@@ -6031,7 +6040,7 @@
                     </a:lnT>
                     <a:lnB w="12700" cap="flat" cmpd="sng" algn="ctr">
                       <a:solidFill>
-                        <a:srgbClr val="D5D5E5"/>
+                        <a:srgbClr val="D9D9D5"/>
                       </a:solidFill>
                       <a:prstDash val="solid"/>
                       <a:round/>
@@ -6039,7 +6048,7 @@
                       <a:tailEnd type="none" w="med" len="med"/>
                     </a:lnB>
                     <a:solidFill>
-                      <a:srgbClr val="312E81"/>
+                      <a:srgbClr val="202124"/>
                     </a:solidFill>
                   </a:tcPr>
                 </a:tc>
@@ -6054,7 +6063,7 @@
                       <a:r>
                         <a:rPr sz="1300" b="1">
                           <a:solidFill>
-                            <a:srgbClr val="1E1B3A"/>
+                            <a:srgbClr val="202124"/>
                           </a:solidFill>
                           <a:latin typeface="Calibri"/>
                         </a:rPr>
@@ -6066,7 +6075,7 @@
                       <a:r>
                         <a:rPr sz="1300" b="0">
                           <a:solidFill>
-                            <a:srgbClr val="1E1B3A"/>
+                            <a:srgbClr val="202124"/>
                           </a:solidFill>
                           <a:latin typeface="Calibri"/>
                         </a:rPr>
@@ -6077,7 +6086,7 @@
                   <a:tcPr anchor="ctr">
                     <a:lnL w="12700" cap="flat" cmpd="sng" algn="ctr">
                       <a:solidFill>
-                        <a:srgbClr val="D5D5E5"/>
+                        <a:srgbClr val="D9D9D5"/>
                       </a:solidFill>
                       <a:prstDash val="solid"/>
                       <a:round/>
@@ -6086,7 +6095,7 @@
                     </a:lnL>
                     <a:lnR w="12700" cap="flat" cmpd="sng" algn="ctr">
                       <a:solidFill>
-                        <a:srgbClr val="D5D5E5"/>
+                        <a:srgbClr val="D9D9D5"/>
                       </a:solidFill>
                       <a:prstDash val="solid"/>
                       <a:round/>
@@ -6095,7 +6104,7 @@
                     </a:lnR>
                     <a:lnT w="12700" cap="flat" cmpd="sng" algn="ctr">
                       <a:solidFill>
-                        <a:srgbClr val="D5D5E5"/>
+                        <a:srgbClr val="D9D9D5"/>
                       </a:solidFill>
                       <a:prstDash val="solid"/>
                       <a:round/>
@@ -6104,7 +6113,7 @@
                     </a:lnT>
                     <a:lnB w="12700" cap="flat" cmpd="sng" algn="ctr">
                       <a:solidFill>
-                        <a:srgbClr val="D5D5E5"/>
+                        <a:srgbClr val="D9D9D5"/>
                       </a:solidFill>
                       <a:prstDash val="solid"/>
                       <a:round/>
@@ -6123,7 +6132,7 @@
                       <a:r>
                         <a:rPr sz="1300" b="0">
                           <a:solidFill>
-                            <a:srgbClr val="1E1B3A"/>
+                            <a:srgbClr val="202124"/>
                           </a:solidFill>
                           <a:latin typeface="Calibri"/>
                         </a:rPr>
@@ -6134,7 +6143,7 @@
                   <a:tcPr anchor="ctr">
                     <a:lnL w="12700" cap="flat" cmpd="sng" algn="ctr">
                       <a:solidFill>
-                        <a:srgbClr val="D5D5E5"/>
+                        <a:srgbClr val="D9D9D5"/>
                       </a:solidFill>
                       <a:prstDash val="solid"/>
                       <a:round/>
@@ -6143,7 +6152,7 @@
                     </a:lnL>
                     <a:lnR w="12700" cap="flat" cmpd="sng" algn="ctr">
                       <a:solidFill>
-                        <a:srgbClr val="D5D5E5"/>
+                        <a:srgbClr val="D9D9D5"/>
                       </a:solidFill>
                       <a:prstDash val="solid"/>
                       <a:round/>
@@ -6152,7 +6161,7 @@
                     </a:lnR>
                     <a:lnT w="12700" cap="flat" cmpd="sng" algn="ctr">
                       <a:solidFill>
-                        <a:srgbClr val="D5D5E5"/>
+                        <a:srgbClr val="D9D9D5"/>
                       </a:solidFill>
                       <a:prstDash val="solid"/>
                       <a:round/>
@@ -6161,7 +6170,7 @@
                     </a:lnT>
                     <a:lnB w="12700" cap="flat" cmpd="sng" algn="ctr">
                       <a:solidFill>
-                        <a:srgbClr val="D5D5E5"/>
+                        <a:srgbClr val="D9D9D5"/>
                       </a:solidFill>
                       <a:prstDash val="solid"/>
                       <a:round/>
@@ -6180,7 +6189,7 @@
                       <a:r>
                         <a:rPr sz="1300" b="0">
                           <a:solidFill>
-                            <a:srgbClr val="1E1B3A"/>
+                            <a:srgbClr val="202124"/>
                           </a:solidFill>
                           <a:latin typeface="Calibri"/>
                         </a:rPr>
@@ -6191,7 +6200,7 @@
                   <a:tcPr anchor="ctr">
                     <a:lnL w="12700" cap="flat" cmpd="sng" algn="ctr">
                       <a:solidFill>
-                        <a:srgbClr val="D5D5E5"/>
+                        <a:srgbClr val="D9D9D5"/>
                       </a:solidFill>
                       <a:prstDash val="solid"/>
                       <a:round/>
@@ -6200,7 +6209,7 @@
                     </a:lnL>
                     <a:lnR w="12700" cap="flat" cmpd="sng" algn="ctr">
                       <a:solidFill>
-                        <a:srgbClr val="D5D5E5"/>
+                        <a:srgbClr val="D9D9D5"/>
                       </a:solidFill>
                       <a:prstDash val="solid"/>
                       <a:round/>
@@ -6209,7 +6218,7 @@
                     </a:lnR>
                     <a:lnT w="12700" cap="flat" cmpd="sng" algn="ctr">
                       <a:solidFill>
-                        <a:srgbClr val="D5D5E5"/>
+                        <a:srgbClr val="D9D9D5"/>
                       </a:solidFill>
                       <a:prstDash val="solid"/>
                       <a:round/>
@@ -6218,7 +6227,7 @@
                     </a:lnT>
                     <a:lnB w="12700" cap="flat" cmpd="sng" algn="ctr">
                       <a:solidFill>
-                        <a:srgbClr val="D5D5E5"/>
+                        <a:srgbClr val="D9D9D5"/>
                       </a:solidFill>
                       <a:prstDash val="solid"/>
                       <a:round/>
@@ -6237,7 +6246,7 @@
                       <a:r>
                         <a:rPr sz="1300" b="0">
                           <a:solidFill>
-                            <a:srgbClr val="1E1B3A"/>
+                            <a:srgbClr val="202124"/>
                           </a:solidFill>
                           <a:latin typeface="Calibri"/>
                         </a:rPr>
@@ -6248,7 +6257,7 @@
                   <a:tcPr anchor="ctr">
                     <a:lnL w="12700" cap="flat" cmpd="sng" algn="ctr">
                       <a:solidFill>
-                        <a:srgbClr val="D5D5E5"/>
+                        <a:srgbClr val="D9D9D5"/>
                       </a:solidFill>
                       <a:prstDash val="solid"/>
                       <a:round/>
@@ -6257,7 +6266,7 @@
                     </a:lnL>
                     <a:lnR w="12700" cap="flat" cmpd="sng" algn="ctr">
                       <a:solidFill>
-                        <a:srgbClr val="D5D5E5"/>
+                        <a:srgbClr val="D9D9D5"/>
                       </a:solidFill>
                       <a:prstDash val="solid"/>
                       <a:round/>
@@ -6266,7 +6275,7 @@
                     </a:lnR>
                     <a:lnT w="12700" cap="flat" cmpd="sng" algn="ctr">
                       <a:solidFill>
-                        <a:srgbClr val="D5D5E5"/>
+                        <a:srgbClr val="D9D9D5"/>
                       </a:solidFill>
                       <a:prstDash val="solid"/>
                       <a:round/>
@@ -6275,7 +6284,7 @@
                     </a:lnT>
                     <a:lnB w="12700" cap="flat" cmpd="sng" algn="ctr">
                       <a:solidFill>
-                        <a:srgbClr val="D5D5E5"/>
+                        <a:srgbClr val="D9D9D5"/>
                       </a:solidFill>
                       <a:prstDash val="solid"/>
                       <a:round/>
@@ -6294,7 +6303,7 @@
                       <a:r>
                         <a:rPr sz="1300" b="0">
                           <a:solidFill>
-                            <a:srgbClr val="1E1B3A"/>
+                            <a:srgbClr val="202124"/>
                           </a:solidFill>
                           <a:latin typeface="Calibri"/>
                         </a:rPr>
@@ -6305,7 +6314,7 @@
                   <a:tcPr anchor="ctr">
                     <a:lnL w="12700" cap="flat" cmpd="sng" algn="ctr">
                       <a:solidFill>
-                        <a:srgbClr val="D5D5E5"/>
+                        <a:srgbClr val="D9D9D5"/>
                       </a:solidFill>
                       <a:prstDash val="solid"/>
                       <a:round/>
@@ -6314,7 +6323,7 @@
                     </a:lnL>
                     <a:lnR w="12700" cap="flat" cmpd="sng" algn="ctr">
                       <a:solidFill>
-                        <a:srgbClr val="D5D5E5"/>
+                        <a:srgbClr val="D9D9D5"/>
                       </a:solidFill>
                       <a:prstDash val="solid"/>
                       <a:round/>
@@ -6323,7 +6332,7 @@
                     </a:lnR>
                     <a:lnT w="12700" cap="flat" cmpd="sng" algn="ctr">
                       <a:solidFill>
-                        <a:srgbClr val="D5D5E5"/>
+                        <a:srgbClr val="D9D9D5"/>
                       </a:solidFill>
                       <a:prstDash val="solid"/>
                       <a:round/>
@@ -6332,7 +6341,7 @@
                     </a:lnT>
                     <a:lnB w="12700" cap="flat" cmpd="sng" algn="ctr">
                       <a:solidFill>
-                        <a:srgbClr val="D5D5E5"/>
+                        <a:srgbClr val="D9D9D5"/>
                       </a:solidFill>
                       <a:prstDash val="solid"/>
                       <a:round/>
@@ -6353,7 +6362,7 @@
                       <a:r>
                         <a:rPr sz="1300" b="1">
                           <a:solidFill>
-                            <a:srgbClr val="1E1B3A"/>
+                            <a:srgbClr val="202124"/>
                           </a:solidFill>
                           <a:latin typeface="Calibri"/>
                         </a:rPr>
@@ -6365,7 +6374,7 @@
                       <a:r>
                         <a:rPr sz="1300" b="0">
                           <a:solidFill>
-                            <a:srgbClr val="1E1B3A"/>
+                            <a:srgbClr val="202124"/>
                           </a:solidFill>
                           <a:latin typeface="Calibri"/>
                         </a:rPr>
@@ -6376,7 +6385,7 @@
                   <a:tcPr anchor="ctr">
                     <a:lnL w="12700" cap="flat" cmpd="sng" algn="ctr">
                       <a:solidFill>
-                        <a:srgbClr val="D5D5E5"/>
+                        <a:srgbClr val="D9D9D5"/>
                       </a:solidFill>
                       <a:prstDash val="solid"/>
                       <a:round/>
@@ -6385,7 +6394,7 @@
                     </a:lnL>
                     <a:lnR w="12700" cap="flat" cmpd="sng" algn="ctr">
                       <a:solidFill>
-                        <a:srgbClr val="D5D5E5"/>
+                        <a:srgbClr val="D9D9D5"/>
                       </a:solidFill>
                       <a:prstDash val="solid"/>
                       <a:round/>
@@ -6394,7 +6403,7 @@
                     </a:lnR>
                     <a:lnT w="12700" cap="flat" cmpd="sng" algn="ctr">
                       <a:solidFill>
-                        <a:srgbClr val="D5D5E5"/>
+                        <a:srgbClr val="D9D9D5"/>
                       </a:solidFill>
                       <a:prstDash val="solid"/>
                       <a:round/>
@@ -6403,7 +6412,7 @@
                     </a:lnT>
                     <a:lnB w="12700" cap="flat" cmpd="sng" algn="ctr">
                       <a:solidFill>
-                        <a:srgbClr val="D5D5E5"/>
+                        <a:srgbClr val="D9D9D5"/>
                       </a:solidFill>
                       <a:prstDash val="solid"/>
                       <a:round/>
@@ -6411,7 +6420,7 @@
                       <a:tailEnd type="none" w="med" len="med"/>
                     </a:lnB>
                     <a:solidFill>
-                      <a:srgbClr val="ECECF7"/>
+                      <a:srgbClr val="F2F2EF"/>
                     </a:solidFill>
                   </a:tcPr>
                 </a:tc>
@@ -6424,7 +6433,7 @@
                       <a:r>
                         <a:rPr sz="1300" b="0">
                           <a:solidFill>
-                            <a:srgbClr val="1E1B3A"/>
+                            <a:srgbClr val="202124"/>
                           </a:solidFill>
                           <a:latin typeface="Calibri"/>
                         </a:rPr>
@@ -6435,7 +6444,7 @@
                   <a:tcPr anchor="ctr">
                     <a:lnL w="12700" cap="flat" cmpd="sng" algn="ctr">
                       <a:solidFill>
-                        <a:srgbClr val="D5D5E5"/>
+                        <a:srgbClr val="D9D9D5"/>
                       </a:solidFill>
                       <a:prstDash val="solid"/>
                       <a:round/>
@@ -6444,7 +6453,7 @@
                     </a:lnL>
                     <a:lnR w="12700" cap="flat" cmpd="sng" algn="ctr">
                       <a:solidFill>
-                        <a:srgbClr val="D5D5E5"/>
+                        <a:srgbClr val="D9D9D5"/>
                       </a:solidFill>
                       <a:prstDash val="solid"/>
                       <a:round/>
@@ -6453,7 +6462,7 @@
                     </a:lnR>
                     <a:lnT w="12700" cap="flat" cmpd="sng" algn="ctr">
                       <a:solidFill>
-                        <a:srgbClr val="D5D5E5"/>
+                        <a:srgbClr val="D9D9D5"/>
                       </a:solidFill>
                       <a:prstDash val="solid"/>
                       <a:round/>
@@ -6462,7 +6471,7 @@
                     </a:lnT>
                     <a:lnB w="12700" cap="flat" cmpd="sng" algn="ctr">
                       <a:solidFill>
-                        <a:srgbClr val="D5D5E5"/>
+                        <a:srgbClr val="D9D9D5"/>
                       </a:solidFill>
                       <a:prstDash val="solid"/>
                       <a:round/>
@@ -6470,7 +6479,7 @@
                       <a:tailEnd type="none" w="med" len="med"/>
                     </a:lnB>
                     <a:solidFill>
-                      <a:srgbClr val="ECECF7"/>
+                      <a:srgbClr val="F2F2EF"/>
                     </a:solidFill>
                   </a:tcPr>
                 </a:tc>
@@ -6483,7 +6492,7 @@
                       <a:r>
                         <a:rPr sz="1300" b="0">
                           <a:solidFill>
-                            <a:srgbClr val="1E1B3A"/>
+                            <a:srgbClr val="202124"/>
                           </a:solidFill>
                           <a:latin typeface="Calibri"/>
                         </a:rPr>
@@ -6494,7 +6503,7 @@
                   <a:tcPr anchor="ctr">
                     <a:lnL w="12700" cap="flat" cmpd="sng" algn="ctr">
                       <a:solidFill>
-                        <a:srgbClr val="D5D5E5"/>
+                        <a:srgbClr val="D9D9D5"/>
                       </a:solidFill>
                       <a:prstDash val="solid"/>
                       <a:round/>
@@ -6503,7 +6512,7 @@
                     </a:lnL>
                     <a:lnR w="12700" cap="flat" cmpd="sng" algn="ctr">
                       <a:solidFill>
-                        <a:srgbClr val="D5D5E5"/>
+                        <a:srgbClr val="D9D9D5"/>
                       </a:solidFill>
                       <a:prstDash val="solid"/>
                       <a:round/>
@@ -6512,7 +6521,7 @@
                     </a:lnR>
                     <a:lnT w="12700" cap="flat" cmpd="sng" algn="ctr">
                       <a:solidFill>
-                        <a:srgbClr val="D5D5E5"/>
+                        <a:srgbClr val="D9D9D5"/>
                       </a:solidFill>
                       <a:prstDash val="solid"/>
                       <a:round/>
@@ -6521,7 +6530,7 @@
                     </a:lnT>
                     <a:lnB w="12700" cap="flat" cmpd="sng" algn="ctr">
                       <a:solidFill>
-                        <a:srgbClr val="D5D5E5"/>
+                        <a:srgbClr val="D9D9D5"/>
                       </a:solidFill>
                       <a:prstDash val="solid"/>
                       <a:round/>
@@ -6529,7 +6538,7 @@
                       <a:tailEnd type="none" w="med" len="med"/>
                     </a:lnB>
                     <a:solidFill>
-                      <a:srgbClr val="ECECF7"/>
+                      <a:srgbClr val="F2F2EF"/>
                     </a:solidFill>
                   </a:tcPr>
                 </a:tc>
@@ -6542,7 +6551,7 @@
                       <a:r>
                         <a:rPr sz="1300" b="0">
                           <a:solidFill>
-                            <a:srgbClr val="1E1B3A"/>
+                            <a:srgbClr val="202124"/>
                           </a:solidFill>
                           <a:latin typeface="Calibri"/>
                         </a:rPr>
@@ -6553,7 +6562,7 @@
                   <a:tcPr anchor="ctr">
                     <a:lnL w="12700" cap="flat" cmpd="sng" algn="ctr">
                       <a:solidFill>
-                        <a:srgbClr val="D5D5E5"/>
+                        <a:srgbClr val="D9D9D5"/>
                       </a:solidFill>
                       <a:prstDash val="solid"/>
                       <a:round/>
@@ -6562,7 +6571,7 @@
                     </a:lnL>
                     <a:lnR w="12700" cap="flat" cmpd="sng" algn="ctr">
                       <a:solidFill>
-                        <a:srgbClr val="D5D5E5"/>
+                        <a:srgbClr val="D9D9D5"/>
                       </a:solidFill>
                       <a:prstDash val="solid"/>
                       <a:round/>
@@ -6571,7 +6580,7 @@
                     </a:lnR>
                     <a:lnT w="12700" cap="flat" cmpd="sng" algn="ctr">
                       <a:solidFill>
-                        <a:srgbClr val="D5D5E5"/>
+                        <a:srgbClr val="D9D9D5"/>
                       </a:solidFill>
                       <a:prstDash val="solid"/>
                       <a:round/>
@@ -6580,7 +6589,7 @@
                     </a:lnT>
                     <a:lnB w="12700" cap="flat" cmpd="sng" algn="ctr">
                       <a:solidFill>
-                        <a:srgbClr val="D5D5E5"/>
+                        <a:srgbClr val="D9D9D5"/>
                       </a:solidFill>
                       <a:prstDash val="solid"/>
                       <a:round/>
@@ -6588,7 +6597,7 @@
                       <a:tailEnd type="none" w="med" len="med"/>
                     </a:lnB>
                     <a:solidFill>
-                      <a:srgbClr val="ECECF7"/>
+                      <a:srgbClr val="F2F2EF"/>
                     </a:solidFill>
                   </a:tcPr>
                 </a:tc>
@@ -6601,7 +6610,7 @@
                       <a:r>
                         <a:rPr sz="1300" b="0">
                           <a:solidFill>
-                            <a:srgbClr val="1E1B3A"/>
+                            <a:srgbClr val="202124"/>
                           </a:solidFill>
                           <a:latin typeface="Calibri"/>
                         </a:rPr>
@@ -6612,7 +6621,7 @@
                   <a:tcPr anchor="ctr">
                     <a:lnL w="12700" cap="flat" cmpd="sng" algn="ctr">
                       <a:solidFill>
-                        <a:srgbClr val="D5D5E5"/>
+                        <a:srgbClr val="D9D9D5"/>
                       </a:solidFill>
                       <a:prstDash val="solid"/>
                       <a:round/>
@@ -6621,7 +6630,7 @@
                     </a:lnL>
                     <a:lnR w="12700" cap="flat" cmpd="sng" algn="ctr">
                       <a:solidFill>
-                        <a:srgbClr val="D5D5E5"/>
+                        <a:srgbClr val="D9D9D5"/>
                       </a:solidFill>
                       <a:prstDash val="solid"/>
                       <a:round/>
@@ -6630,7 +6639,7 @@
                     </a:lnR>
                     <a:lnT w="12700" cap="flat" cmpd="sng" algn="ctr">
                       <a:solidFill>
-                        <a:srgbClr val="D5D5E5"/>
+                        <a:srgbClr val="D9D9D5"/>
                       </a:solidFill>
                       <a:prstDash val="solid"/>
                       <a:round/>
@@ -6639,7 +6648,7 @@
                     </a:lnT>
                     <a:lnB w="12700" cap="flat" cmpd="sng" algn="ctr">
                       <a:solidFill>
-                        <a:srgbClr val="D5D5E5"/>
+                        <a:srgbClr val="D9D9D5"/>
                       </a:solidFill>
                       <a:prstDash val="solid"/>
                       <a:round/>
@@ -6647,7 +6656,7 @@
                       <a:tailEnd type="none" w="med" len="med"/>
                     </a:lnB>
                     <a:solidFill>
-                      <a:srgbClr val="ECECF7"/>
+                      <a:srgbClr val="F2F2EF"/>
                     </a:solidFill>
                   </a:tcPr>
                 </a:tc>
@@ -6662,7 +6671,7 @@
                       <a:r>
                         <a:rPr sz="1300" b="1">
                           <a:solidFill>
-                            <a:srgbClr val="1E1B3A"/>
+                            <a:srgbClr val="202124"/>
                           </a:solidFill>
                           <a:latin typeface="Calibri"/>
                         </a:rPr>
@@ -6674,7 +6683,7 @@
                       <a:r>
                         <a:rPr sz="1300" b="0">
                           <a:solidFill>
-                            <a:srgbClr val="1E1B3A"/>
+                            <a:srgbClr val="202124"/>
                           </a:solidFill>
                           <a:latin typeface="Calibri"/>
                         </a:rPr>
@@ -6685,7 +6694,7 @@
                   <a:tcPr anchor="ctr">
                     <a:lnL w="12700" cap="flat" cmpd="sng" algn="ctr">
                       <a:solidFill>
-                        <a:srgbClr val="D5D5E5"/>
+                        <a:srgbClr val="D9D9D5"/>
                       </a:solidFill>
                       <a:prstDash val="solid"/>
                       <a:round/>
@@ -6694,7 +6703,7 @@
                     </a:lnL>
                     <a:lnR w="12700" cap="flat" cmpd="sng" algn="ctr">
                       <a:solidFill>
-                        <a:srgbClr val="D5D5E5"/>
+                        <a:srgbClr val="D9D9D5"/>
                       </a:solidFill>
                       <a:prstDash val="solid"/>
                       <a:round/>
@@ -6703,7 +6712,7 @@
                     </a:lnR>
                     <a:lnT w="12700" cap="flat" cmpd="sng" algn="ctr">
                       <a:solidFill>
-                        <a:srgbClr val="D5D5E5"/>
+                        <a:srgbClr val="D9D9D5"/>
                       </a:solidFill>
                       <a:prstDash val="solid"/>
                       <a:round/>
@@ -6712,7 +6721,7 @@
                     </a:lnT>
                     <a:lnB w="12700" cap="flat" cmpd="sng" algn="ctr">
                       <a:solidFill>
-                        <a:srgbClr val="D5D5E5"/>
+                        <a:srgbClr val="D9D9D5"/>
                       </a:solidFill>
                       <a:prstDash val="solid"/>
                       <a:round/>
@@ -6731,7 +6740,7 @@
                       <a:r>
                         <a:rPr sz="1300" b="0">
                           <a:solidFill>
-                            <a:srgbClr val="1E1B3A"/>
+                            <a:srgbClr val="202124"/>
                           </a:solidFill>
                           <a:latin typeface="Calibri"/>
                         </a:rPr>
@@ -6742,7 +6751,7 @@
                   <a:tcPr anchor="ctr">
                     <a:lnL w="12700" cap="flat" cmpd="sng" algn="ctr">
                       <a:solidFill>
-                        <a:srgbClr val="D5D5E5"/>
+                        <a:srgbClr val="D9D9D5"/>
                       </a:solidFill>
                       <a:prstDash val="solid"/>
                       <a:round/>
@@ -6751,7 +6760,7 @@
                     </a:lnL>
                     <a:lnR w="12700" cap="flat" cmpd="sng" algn="ctr">
                       <a:solidFill>
-                        <a:srgbClr val="D5D5E5"/>
+                        <a:srgbClr val="D9D9D5"/>
                       </a:solidFill>
                       <a:prstDash val="solid"/>
                       <a:round/>
@@ -6760,7 +6769,7 @@
                     </a:lnR>
                     <a:lnT w="12700" cap="flat" cmpd="sng" algn="ctr">
                       <a:solidFill>
-                        <a:srgbClr val="D5D5E5"/>
+                        <a:srgbClr val="D9D9D5"/>
                       </a:solidFill>
                       <a:prstDash val="solid"/>
                       <a:round/>
@@ -6769,7 +6778,7 @@
                     </a:lnT>
                     <a:lnB w="12700" cap="flat" cmpd="sng" algn="ctr">
                       <a:solidFill>
-                        <a:srgbClr val="D5D5E5"/>
+                        <a:srgbClr val="D9D9D5"/>
                       </a:solidFill>
                       <a:prstDash val="solid"/>
                       <a:round/>
@@ -6788,7 +6797,7 @@
                       <a:r>
                         <a:rPr sz="1300" b="0">
                           <a:solidFill>
-                            <a:srgbClr val="1E1B3A"/>
+                            <a:srgbClr val="202124"/>
                           </a:solidFill>
                           <a:latin typeface="Calibri"/>
                         </a:rPr>
@@ -6799,7 +6808,7 @@
                   <a:tcPr anchor="ctr">
                     <a:lnL w="12700" cap="flat" cmpd="sng" algn="ctr">
                       <a:solidFill>
-                        <a:srgbClr val="D5D5E5"/>
+                        <a:srgbClr val="D9D9D5"/>
                       </a:solidFill>
                       <a:prstDash val="solid"/>
                       <a:round/>
@@ -6808,7 +6817,7 @@
                     </a:lnL>
                     <a:lnR w="12700" cap="flat" cmpd="sng" algn="ctr">
                       <a:solidFill>
-                        <a:srgbClr val="D5D5E5"/>
+                        <a:srgbClr val="D9D9D5"/>
                       </a:solidFill>
                       <a:prstDash val="solid"/>
                       <a:round/>
@@ -6817,7 +6826,7 @@
                     </a:lnR>
                     <a:lnT w="12700" cap="flat" cmpd="sng" algn="ctr">
                       <a:solidFill>
-                        <a:srgbClr val="D5D5E5"/>
+                        <a:srgbClr val="D9D9D5"/>
                       </a:solidFill>
                       <a:prstDash val="solid"/>
                       <a:round/>
@@ -6826,7 +6835,7 @@
                     </a:lnT>
                     <a:lnB w="12700" cap="flat" cmpd="sng" algn="ctr">
                       <a:solidFill>
-                        <a:srgbClr val="D5D5E5"/>
+                        <a:srgbClr val="D9D9D5"/>
                       </a:solidFill>
                       <a:prstDash val="solid"/>
                       <a:round/>
@@ -6845,7 +6854,7 @@
                       <a:r>
                         <a:rPr sz="1300" b="0">
                           <a:solidFill>
-                            <a:srgbClr val="1E1B3A"/>
+                            <a:srgbClr val="202124"/>
                           </a:solidFill>
                           <a:latin typeface="Calibri"/>
                         </a:rPr>
@@ -6856,7 +6865,7 @@
                   <a:tcPr anchor="ctr">
                     <a:lnL w="12700" cap="flat" cmpd="sng" algn="ctr">
                       <a:solidFill>
-                        <a:srgbClr val="D5D5E5"/>
+                        <a:srgbClr val="D9D9D5"/>
                       </a:solidFill>
                       <a:prstDash val="solid"/>
                       <a:round/>
@@ -6865,7 +6874,7 @@
                     </a:lnL>
                     <a:lnR w="12700" cap="flat" cmpd="sng" algn="ctr">
                       <a:solidFill>
-                        <a:srgbClr val="D5D5E5"/>
+                        <a:srgbClr val="D9D9D5"/>
                       </a:solidFill>
                       <a:prstDash val="solid"/>
                       <a:round/>
@@ -6874,7 +6883,7 @@
                     </a:lnR>
                     <a:lnT w="12700" cap="flat" cmpd="sng" algn="ctr">
                       <a:solidFill>
-                        <a:srgbClr val="D5D5E5"/>
+                        <a:srgbClr val="D9D9D5"/>
                       </a:solidFill>
                       <a:prstDash val="solid"/>
                       <a:round/>
@@ -6883,7 +6892,7 @@
                     </a:lnT>
                     <a:lnB w="12700" cap="flat" cmpd="sng" algn="ctr">
                       <a:solidFill>
-                        <a:srgbClr val="D5D5E5"/>
+                        <a:srgbClr val="D9D9D5"/>
                       </a:solidFill>
                       <a:prstDash val="solid"/>
                       <a:round/>
@@ -6902,7 +6911,7 @@
                       <a:r>
                         <a:rPr sz="1300" b="0">
                           <a:solidFill>
-                            <a:srgbClr val="1E1B3A"/>
+                            <a:srgbClr val="202124"/>
                           </a:solidFill>
                           <a:latin typeface="Calibri"/>
                         </a:rPr>
@@ -6913,7 +6922,7 @@
                   <a:tcPr anchor="ctr">
                     <a:lnL w="12700" cap="flat" cmpd="sng" algn="ctr">
                       <a:solidFill>
-                        <a:srgbClr val="D5D5E5"/>
+                        <a:srgbClr val="D9D9D5"/>
                       </a:solidFill>
                       <a:prstDash val="solid"/>
                       <a:round/>
@@ -6922,7 +6931,7 @@
                     </a:lnL>
                     <a:lnR w="12700" cap="flat" cmpd="sng" algn="ctr">
                       <a:solidFill>
-                        <a:srgbClr val="D5D5E5"/>
+                        <a:srgbClr val="D9D9D5"/>
                       </a:solidFill>
                       <a:prstDash val="solid"/>
                       <a:round/>
@@ -6931,7 +6940,7 @@
                     </a:lnR>
                     <a:lnT w="12700" cap="flat" cmpd="sng" algn="ctr">
                       <a:solidFill>
-                        <a:srgbClr val="D5D5E5"/>
+                        <a:srgbClr val="D9D9D5"/>
                       </a:solidFill>
                       <a:prstDash val="solid"/>
                       <a:round/>
@@ -6940,7 +6949,7 @@
                     </a:lnT>
                     <a:lnB w="12700" cap="flat" cmpd="sng" algn="ctr">
                       <a:solidFill>
-                        <a:srgbClr val="D5D5E5"/>
+                        <a:srgbClr val="D9D9D5"/>
                       </a:solidFill>
                       <a:prstDash val="solid"/>
                       <a:round/>
@@ -6961,7 +6970,7 @@
                       <a:r>
                         <a:rPr sz="1300" b="1">
                           <a:solidFill>
-                            <a:srgbClr val="1E1B3A"/>
+                            <a:srgbClr val="202124"/>
                           </a:solidFill>
                           <a:latin typeface="Calibri"/>
                         </a:rPr>
@@ -6973,7 +6982,7 @@
                       <a:r>
                         <a:rPr sz="1300" b="0">
                           <a:solidFill>
-                            <a:srgbClr val="1E1B3A"/>
+                            <a:srgbClr val="202124"/>
                           </a:solidFill>
                           <a:latin typeface="Calibri"/>
                         </a:rPr>
@@ -6984,7 +6993,7 @@
                   <a:tcPr anchor="ctr">
                     <a:lnL w="12700" cap="flat" cmpd="sng" algn="ctr">
                       <a:solidFill>
-                        <a:srgbClr val="D5D5E5"/>
+                        <a:srgbClr val="D9D9D5"/>
                       </a:solidFill>
                       <a:prstDash val="solid"/>
                       <a:round/>
@@ -6993,7 +7002,7 @@
                     </a:lnL>
                     <a:lnR w="12700" cap="flat" cmpd="sng" algn="ctr">
                       <a:solidFill>
-                        <a:srgbClr val="D5D5E5"/>
+                        <a:srgbClr val="D9D9D5"/>
                       </a:solidFill>
                       <a:prstDash val="solid"/>
                       <a:round/>
@@ -7002,7 +7011,7 @@
                     </a:lnR>
                     <a:lnT w="12700" cap="flat" cmpd="sng" algn="ctr">
                       <a:solidFill>
-                        <a:srgbClr val="D5D5E5"/>
+                        <a:srgbClr val="D9D9D5"/>
                       </a:solidFill>
                       <a:prstDash val="solid"/>
                       <a:round/>
@@ -7011,7 +7020,7 @@
                     </a:lnT>
                     <a:lnB w="12700" cap="flat" cmpd="sng" algn="ctr">
                       <a:solidFill>
-                        <a:srgbClr val="D5D5E5"/>
+                        <a:srgbClr val="D9D9D5"/>
                       </a:solidFill>
                       <a:prstDash val="solid"/>
                       <a:round/>
@@ -7019,7 +7028,7 @@
                       <a:tailEnd type="none" w="med" len="med"/>
                     </a:lnB>
                     <a:solidFill>
-                      <a:srgbClr val="ECECF7"/>
+                      <a:srgbClr val="F2F2EF"/>
                     </a:solidFill>
                   </a:tcPr>
                 </a:tc>
@@ -7032,7 +7041,7 @@
                       <a:r>
                         <a:rPr sz="1300" b="0">
                           <a:solidFill>
-                            <a:srgbClr val="1E1B3A"/>
+                            <a:srgbClr val="202124"/>
                           </a:solidFill>
                           <a:latin typeface="Calibri"/>
                         </a:rPr>
@@ -7043,7 +7052,7 @@
                   <a:tcPr anchor="ctr">
                     <a:lnL w="12700" cap="flat" cmpd="sng" algn="ctr">
                       <a:solidFill>
-                        <a:srgbClr val="D5D5E5"/>
+                        <a:srgbClr val="D9D9D5"/>
                       </a:solidFill>
                       <a:prstDash val="solid"/>
                       <a:round/>
@@ -7052,7 +7061,7 @@
                     </a:lnL>
                     <a:lnR w="12700" cap="flat" cmpd="sng" algn="ctr">
                       <a:solidFill>
-                        <a:srgbClr val="D5D5E5"/>
+                        <a:srgbClr val="D9D9D5"/>
                       </a:solidFill>
                       <a:prstDash val="solid"/>
                       <a:round/>
@@ -7061,7 +7070,7 @@
                     </a:lnR>
                     <a:lnT w="12700" cap="flat" cmpd="sng" algn="ctr">
                       <a:solidFill>
-                        <a:srgbClr val="D5D5E5"/>
+                        <a:srgbClr val="D9D9D5"/>
                       </a:solidFill>
                       <a:prstDash val="solid"/>
                       <a:round/>
@@ -7070,7 +7079,7 @@
                     </a:lnT>
                     <a:lnB w="12700" cap="flat" cmpd="sng" algn="ctr">
                       <a:solidFill>
-                        <a:srgbClr val="D5D5E5"/>
+                        <a:srgbClr val="D9D9D5"/>
                       </a:solidFill>
                       <a:prstDash val="solid"/>
                       <a:round/>
@@ -7078,7 +7087,7 @@
                       <a:tailEnd type="none" w="med" len="med"/>
                     </a:lnB>
                     <a:solidFill>
-                      <a:srgbClr val="ECECF7"/>
+                      <a:srgbClr val="F2F2EF"/>
                     </a:solidFill>
                   </a:tcPr>
                 </a:tc>
@@ -7091,7 +7100,7 @@
                       <a:r>
                         <a:rPr sz="1300" b="0">
                           <a:solidFill>
-                            <a:srgbClr val="1E1B3A"/>
+                            <a:srgbClr val="202124"/>
                           </a:solidFill>
                           <a:latin typeface="Calibri"/>
                         </a:rPr>
@@ -7102,7 +7111,7 @@
                   <a:tcPr anchor="ctr">
                     <a:lnL w="12700" cap="flat" cmpd="sng" algn="ctr">
                       <a:solidFill>
-                        <a:srgbClr val="D5D5E5"/>
+                        <a:srgbClr val="D9D9D5"/>
                       </a:solidFill>
                       <a:prstDash val="solid"/>
                       <a:round/>
@@ -7111,7 +7120,7 @@
                     </a:lnL>
                     <a:lnR w="12700" cap="flat" cmpd="sng" algn="ctr">
                       <a:solidFill>
-                        <a:srgbClr val="D5D5E5"/>
+                        <a:srgbClr val="D9D9D5"/>
                       </a:solidFill>
                       <a:prstDash val="solid"/>
                       <a:round/>
@@ -7120,7 +7129,7 @@
                     </a:lnR>
                     <a:lnT w="12700" cap="flat" cmpd="sng" algn="ctr">
                       <a:solidFill>
-                        <a:srgbClr val="D5D5E5"/>
+                        <a:srgbClr val="D9D9D5"/>
                       </a:solidFill>
                       <a:prstDash val="solid"/>
                       <a:round/>
@@ -7129,7 +7138,7 @@
                     </a:lnT>
                     <a:lnB w="12700" cap="flat" cmpd="sng" algn="ctr">
                       <a:solidFill>
-                        <a:srgbClr val="D5D5E5"/>
+                        <a:srgbClr val="D9D9D5"/>
                       </a:solidFill>
                       <a:prstDash val="solid"/>
                       <a:round/>
@@ -7137,7 +7146,7 @@
                       <a:tailEnd type="none" w="med" len="med"/>
                     </a:lnB>
                     <a:solidFill>
-                      <a:srgbClr val="ECECF7"/>
+                      <a:srgbClr val="F2F2EF"/>
                     </a:solidFill>
                   </a:tcPr>
                 </a:tc>
@@ -7150,7 +7159,7 @@
                       <a:r>
                         <a:rPr sz="1300" b="0">
                           <a:solidFill>
-                            <a:srgbClr val="1E1B3A"/>
+                            <a:srgbClr val="202124"/>
                           </a:solidFill>
                           <a:latin typeface="Calibri"/>
                         </a:rPr>
@@ -7161,7 +7170,7 @@
                   <a:tcPr anchor="ctr">
                     <a:lnL w="12700" cap="flat" cmpd="sng" algn="ctr">
                       <a:solidFill>
-                        <a:srgbClr val="D5D5E5"/>
+                        <a:srgbClr val="D9D9D5"/>
                       </a:solidFill>
                       <a:prstDash val="solid"/>
                       <a:round/>
@@ -7170,7 +7179,7 @@
                     </a:lnL>
                     <a:lnR w="12700" cap="flat" cmpd="sng" algn="ctr">
                       <a:solidFill>
-                        <a:srgbClr val="D5D5E5"/>
+                        <a:srgbClr val="D9D9D5"/>
                       </a:solidFill>
                       <a:prstDash val="solid"/>
                       <a:round/>
@@ -7179,7 +7188,7 @@
                     </a:lnR>
                     <a:lnT w="12700" cap="flat" cmpd="sng" algn="ctr">
                       <a:solidFill>
-                        <a:srgbClr val="D5D5E5"/>
+                        <a:srgbClr val="D9D9D5"/>
                       </a:solidFill>
                       <a:prstDash val="solid"/>
                       <a:round/>
@@ -7188,7 +7197,7 @@
                     </a:lnT>
                     <a:lnB w="12700" cap="flat" cmpd="sng" algn="ctr">
                       <a:solidFill>
-                        <a:srgbClr val="D5D5E5"/>
+                        <a:srgbClr val="D9D9D5"/>
                       </a:solidFill>
                       <a:prstDash val="solid"/>
                       <a:round/>
@@ -7196,7 +7205,7 @@
                       <a:tailEnd type="none" w="med" len="med"/>
                     </a:lnB>
                     <a:solidFill>
-                      <a:srgbClr val="ECECF7"/>
+                      <a:srgbClr val="F2F2EF"/>
                     </a:solidFill>
                   </a:tcPr>
                 </a:tc>
@@ -7209,7 +7218,7 @@
                       <a:r>
                         <a:rPr sz="1300" b="0">
                           <a:solidFill>
-                            <a:srgbClr val="1E1B3A"/>
+                            <a:srgbClr val="202124"/>
                           </a:solidFill>
                           <a:latin typeface="Calibri"/>
                         </a:rPr>
@@ -7220,7 +7229,7 @@
                   <a:tcPr anchor="ctr">
                     <a:lnL w="12700" cap="flat" cmpd="sng" algn="ctr">
                       <a:solidFill>
-                        <a:srgbClr val="D5D5E5"/>
+                        <a:srgbClr val="D9D9D5"/>
                       </a:solidFill>
                       <a:prstDash val="solid"/>
                       <a:round/>
@@ -7229,7 +7238,7 @@
                     </a:lnL>
                     <a:lnR w="12700" cap="flat" cmpd="sng" algn="ctr">
                       <a:solidFill>
-                        <a:srgbClr val="D5D5E5"/>
+                        <a:srgbClr val="D9D9D5"/>
                       </a:solidFill>
                       <a:prstDash val="solid"/>
                       <a:round/>
@@ -7238,7 +7247,7 @@
                     </a:lnR>
                     <a:lnT w="12700" cap="flat" cmpd="sng" algn="ctr">
                       <a:solidFill>
-                        <a:srgbClr val="D5D5E5"/>
+                        <a:srgbClr val="D9D9D5"/>
                       </a:solidFill>
                       <a:prstDash val="solid"/>
                       <a:round/>
@@ -7247,7 +7256,7 @@
                     </a:lnT>
                     <a:lnB w="12700" cap="flat" cmpd="sng" algn="ctr">
                       <a:solidFill>
-                        <a:srgbClr val="D5D5E5"/>
+                        <a:srgbClr val="D9D9D5"/>
                       </a:solidFill>
                       <a:prstDash val="solid"/>
                       <a:round/>
@@ -7255,7 +7264,7 @@
                       <a:tailEnd type="none" w="med" len="med"/>
                     </a:lnB>
                     <a:solidFill>
-                      <a:srgbClr val="ECECF7"/>
+                      <a:srgbClr val="F2F2EF"/>
                     </a:solidFill>
                   </a:tcPr>
                 </a:tc>
@@ -7280,7 +7289,7 @@
           </a:prstGeom>
           <a:ln w="50800">
             <a:solidFill>
-              <a:srgbClr val="E8604C"/>
+              <a:srgbClr val="F2A900"/>
             </a:solidFill>
           </a:ln>
         </p:spPr>
@@ -7325,7 +7334,7 @@
             <a:r>
               <a:rPr sz="1600" b="0">
                 <a:solidFill>
-                  <a:srgbClr val="56566E"/>
+                  <a:srgbClr val="57575A"/>
                 </a:solidFill>
                 <a:latin typeface="Calibri"/>
               </a:rPr>
@@ -7359,7 +7368,7 @@
             <a:r>
               <a:rPr sz="1000" b="0">
                 <a:solidFill>
-                  <a:srgbClr val="56566E"/>
+                  <a:srgbClr val="57575A"/>
                 </a:solidFill>
                 <a:latin typeface="Calibri"/>
               </a:rPr>
@@ -7394,7 +7403,7 @@
             <a:r>
               <a:rPr sz="1000" b="0">
                 <a:solidFill>
-                  <a:srgbClr val="56566E"/>
+                  <a:srgbClr val="57575A"/>
                 </a:solidFill>
                 <a:latin typeface="Calibri"/>
               </a:rPr>
@@ -7428,7 +7437,7 @@
             <a:r>
               <a:rPr sz="1400" b="0">
                 <a:solidFill>
-                  <a:srgbClr val="56566E"/>
+                  <a:srgbClr val="57575A"/>
                 </a:solidFill>
                 <a:latin typeface="Calibri"/>
               </a:rPr>
@@ -7442,9 +7451,18 @@
   <p:clrMapOvr>
     <a:masterClrMapping/>
   </p:clrMapOvr>
-  <p:transition spd="med" advTm="30000">
-    <p:push dir="u"/>
-  </p:transition>
+  <mc:AlternateContent xmlns:mc="http://schemas.openxmlformats.org/markup-compatibility/2006">
+    <mc:Choice xmlns:p14="http://schemas.microsoft.com/office/powerpoint/2010/main" Requires="p14">
+      <p:transition spd="slow" p14:dur="1500" advTm="10000">
+        <p:push dir="u"/>
+      </p:transition>
+    </mc:Choice>
+    <mc:Fallback>
+      <p:transition spd="slow" advTm="10000">
+        <p:push dir="u"/>
+      </p:transition>
+    </mc:Fallback>
+  </mc:AlternateContent>
   <p:timing>
     <p:tnLst>
       <p:par>
@@ -7712,7 +7730,7 @@
     <p:bg>
       <p:bgPr>
         <a:solidFill>
-          <a:srgbClr val="F4F4FA"/>
+          <a:srgbClr val="F5F5F3"/>
         </a:solidFill>
         <a:effectLst/>
       </p:bgPr>
@@ -7739,7 +7757,7 @@
             <a:avLst/>
           </a:prstGeom>
           <a:solidFill>
-            <a:srgbClr val="312E81"/>
+            <a:srgbClr val="202124"/>
           </a:solidFill>
           <a:ln>
             <a:noFill/>
@@ -7846,7 +7864,7 @@
                   <a:tcPr anchor="ctr">
                     <a:lnL w="12700" cap="flat" cmpd="sng" algn="ctr">
                       <a:solidFill>
-                        <a:srgbClr val="D5D5E5"/>
+                        <a:srgbClr val="D9D9D5"/>
                       </a:solidFill>
                       <a:prstDash val="solid"/>
                       <a:round/>
@@ -7855,7 +7873,7 @@
                     </a:lnL>
                     <a:lnR w="12700" cap="flat" cmpd="sng" algn="ctr">
                       <a:solidFill>
-                        <a:srgbClr val="D5D5E5"/>
+                        <a:srgbClr val="D9D9D5"/>
                       </a:solidFill>
                       <a:prstDash val="solid"/>
                       <a:round/>
@@ -7864,7 +7882,7 @@
                     </a:lnR>
                     <a:lnT w="12700" cap="flat" cmpd="sng" algn="ctr">
                       <a:solidFill>
-                        <a:srgbClr val="D5D5E5"/>
+                        <a:srgbClr val="D9D9D5"/>
                       </a:solidFill>
                       <a:prstDash val="solid"/>
                       <a:round/>
@@ -7873,7 +7891,7 @@
                     </a:lnT>
                     <a:lnB w="12700" cap="flat" cmpd="sng" algn="ctr">
                       <a:solidFill>
-                        <a:srgbClr val="D5D5E5"/>
+                        <a:srgbClr val="D9D9D5"/>
                       </a:solidFill>
                       <a:prstDash val="solid"/>
                       <a:round/>
@@ -7881,7 +7899,7 @@
                       <a:tailEnd type="none" w="med" len="med"/>
                     </a:lnB>
                     <a:solidFill>
-                      <a:srgbClr val="312E81"/>
+                      <a:srgbClr val="202124"/>
                     </a:solidFill>
                   </a:tcPr>
                 </a:tc>
@@ -7905,7 +7923,7 @@
                   <a:tcPr anchor="ctr">
                     <a:lnL w="12700" cap="flat" cmpd="sng" algn="ctr">
                       <a:solidFill>
-                        <a:srgbClr val="D5D5E5"/>
+                        <a:srgbClr val="D9D9D5"/>
                       </a:solidFill>
                       <a:prstDash val="solid"/>
                       <a:round/>
@@ -7914,7 +7932,7 @@
                     </a:lnL>
                     <a:lnR w="12700" cap="flat" cmpd="sng" algn="ctr">
                       <a:solidFill>
-                        <a:srgbClr val="D5D5E5"/>
+                        <a:srgbClr val="D9D9D5"/>
                       </a:solidFill>
                       <a:prstDash val="solid"/>
                       <a:round/>
@@ -7923,7 +7941,7 @@
                     </a:lnR>
                     <a:lnT w="12700" cap="flat" cmpd="sng" algn="ctr">
                       <a:solidFill>
-                        <a:srgbClr val="D5D5E5"/>
+                        <a:srgbClr val="D9D9D5"/>
                       </a:solidFill>
                       <a:prstDash val="solid"/>
                       <a:round/>
@@ -7932,7 +7950,7 @@
                     </a:lnT>
                     <a:lnB w="12700" cap="flat" cmpd="sng" algn="ctr">
                       <a:solidFill>
-                        <a:srgbClr val="D5D5E5"/>
+                        <a:srgbClr val="D9D9D5"/>
                       </a:solidFill>
                       <a:prstDash val="solid"/>
                       <a:round/>
@@ -7940,7 +7958,7 @@
                       <a:tailEnd type="none" w="med" len="med"/>
                     </a:lnB>
                     <a:solidFill>
-                      <a:srgbClr val="312E81"/>
+                      <a:srgbClr val="202124"/>
                     </a:solidFill>
                   </a:tcPr>
                 </a:tc>
@@ -7964,7 +7982,7 @@
                   <a:tcPr anchor="ctr">
                     <a:lnL w="12700" cap="flat" cmpd="sng" algn="ctr">
                       <a:solidFill>
-                        <a:srgbClr val="D5D5E5"/>
+                        <a:srgbClr val="D9D9D5"/>
                       </a:solidFill>
                       <a:prstDash val="solid"/>
                       <a:round/>
@@ -7973,7 +7991,7 @@
                     </a:lnL>
                     <a:lnR w="12700" cap="flat" cmpd="sng" algn="ctr">
                       <a:solidFill>
-                        <a:srgbClr val="D5D5E5"/>
+                        <a:srgbClr val="D9D9D5"/>
                       </a:solidFill>
                       <a:prstDash val="solid"/>
                       <a:round/>
@@ -7982,7 +8000,7 @@
                     </a:lnR>
                     <a:lnT w="12700" cap="flat" cmpd="sng" algn="ctr">
                       <a:solidFill>
-                        <a:srgbClr val="D5D5E5"/>
+                        <a:srgbClr val="D9D9D5"/>
                       </a:solidFill>
                       <a:prstDash val="solid"/>
                       <a:round/>
@@ -7991,7 +8009,7 @@
                     </a:lnT>
                     <a:lnB w="12700" cap="flat" cmpd="sng" algn="ctr">
                       <a:solidFill>
-                        <a:srgbClr val="D5D5E5"/>
+                        <a:srgbClr val="D9D9D5"/>
                       </a:solidFill>
                       <a:prstDash val="solid"/>
                       <a:round/>
@@ -7999,7 +8017,7 @@
                       <a:tailEnd type="none" w="med" len="med"/>
                     </a:lnB>
                     <a:solidFill>
-                      <a:srgbClr val="312E81"/>
+                      <a:srgbClr val="202124"/>
                     </a:solidFill>
                   </a:tcPr>
                 </a:tc>
@@ -8014,7 +8032,7 @@
                       <a:r>
                         <a:rPr sz="1200" b="1">
                           <a:solidFill>
-                            <a:srgbClr val="1E1B3A"/>
+                            <a:srgbClr val="202124"/>
                           </a:solidFill>
                           <a:latin typeface="Calibri"/>
                         </a:rPr>
@@ -8025,7 +8043,7 @@
                   <a:tcPr anchor="ctr">
                     <a:lnL w="12700" cap="flat" cmpd="sng" algn="ctr">
                       <a:solidFill>
-                        <a:srgbClr val="D5D5E5"/>
+                        <a:srgbClr val="D9D9D5"/>
                       </a:solidFill>
                       <a:prstDash val="solid"/>
                       <a:round/>
@@ -8034,7 +8052,7 @@
                     </a:lnL>
                     <a:lnR w="12700" cap="flat" cmpd="sng" algn="ctr">
                       <a:solidFill>
-                        <a:srgbClr val="D5D5E5"/>
+                        <a:srgbClr val="D9D9D5"/>
                       </a:solidFill>
                       <a:prstDash val="solid"/>
                       <a:round/>
@@ -8043,7 +8061,7 @@
                     </a:lnR>
                     <a:lnT w="12700" cap="flat" cmpd="sng" algn="ctr">
                       <a:solidFill>
-                        <a:srgbClr val="D5D5E5"/>
+                        <a:srgbClr val="D9D9D5"/>
                       </a:solidFill>
                       <a:prstDash val="solid"/>
                       <a:round/>
@@ -8052,7 +8070,7 @@
                     </a:lnT>
                     <a:lnB w="12700" cap="flat" cmpd="sng" algn="ctr">
                       <a:solidFill>
-                        <a:srgbClr val="D5D5E5"/>
+                        <a:srgbClr val="D9D9D5"/>
                       </a:solidFill>
                       <a:prstDash val="solid"/>
                       <a:round/>
@@ -8071,7 +8089,7 @@
                       <a:r>
                         <a:rPr sz="1200" b="0">
                           <a:solidFill>
-                            <a:srgbClr val="1E1B3A"/>
+                            <a:srgbClr val="202124"/>
                           </a:solidFill>
                           <a:latin typeface="Calibri"/>
                         </a:rPr>
@@ -8082,7 +8100,7 @@
                   <a:tcPr anchor="ctr">
                     <a:lnL w="12700" cap="flat" cmpd="sng" algn="ctr">
                       <a:solidFill>
-                        <a:srgbClr val="D5D5E5"/>
+                        <a:srgbClr val="D9D9D5"/>
                       </a:solidFill>
                       <a:prstDash val="solid"/>
                       <a:round/>
@@ -8091,7 +8109,7 @@
                     </a:lnL>
                     <a:lnR w="12700" cap="flat" cmpd="sng" algn="ctr">
                       <a:solidFill>
-                        <a:srgbClr val="D5D5E5"/>
+                        <a:srgbClr val="D9D9D5"/>
                       </a:solidFill>
                       <a:prstDash val="solid"/>
                       <a:round/>
@@ -8100,7 +8118,7 @@
                     </a:lnR>
                     <a:lnT w="12700" cap="flat" cmpd="sng" algn="ctr">
                       <a:solidFill>
-                        <a:srgbClr val="D5D5E5"/>
+                        <a:srgbClr val="D9D9D5"/>
                       </a:solidFill>
                       <a:prstDash val="solid"/>
                       <a:round/>
@@ -8109,7 +8127,7 @@
                     </a:lnT>
                     <a:lnB w="12700" cap="flat" cmpd="sng" algn="ctr">
                       <a:solidFill>
-                        <a:srgbClr val="D5D5E5"/>
+                        <a:srgbClr val="D9D9D5"/>
                       </a:solidFill>
                       <a:prstDash val="solid"/>
                       <a:round/>
@@ -8128,7 +8146,7 @@
                       <a:r>
                         <a:rPr sz="1200" b="0">
                           <a:solidFill>
-                            <a:srgbClr val="1E1B3A"/>
+                            <a:srgbClr val="202124"/>
                           </a:solidFill>
                           <a:latin typeface="Calibri"/>
                         </a:rPr>
@@ -8139,7 +8157,7 @@
                   <a:tcPr anchor="ctr">
                     <a:lnL w="12700" cap="flat" cmpd="sng" algn="ctr">
                       <a:solidFill>
-                        <a:srgbClr val="D5D5E5"/>
+                        <a:srgbClr val="D9D9D5"/>
                       </a:solidFill>
                       <a:prstDash val="solid"/>
                       <a:round/>
@@ -8148,7 +8166,7 @@
                     </a:lnL>
                     <a:lnR w="12700" cap="flat" cmpd="sng" algn="ctr">
                       <a:solidFill>
-                        <a:srgbClr val="D5D5E5"/>
+                        <a:srgbClr val="D9D9D5"/>
                       </a:solidFill>
                       <a:prstDash val="solid"/>
                       <a:round/>
@@ -8157,7 +8175,7 @@
                     </a:lnR>
                     <a:lnT w="12700" cap="flat" cmpd="sng" algn="ctr">
                       <a:solidFill>
-                        <a:srgbClr val="D5D5E5"/>
+                        <a:srgbClr val="D9D9D5"/>
                       </a:solidFill>
                       <a:prstDash val="solid"/>
                       <a:round/>
@@ -8166,7 +8184,7 @@
                     </a:lnT>
                     <a:lnB w="12700" cap="flat" cmpd="sng" algn="ctr">
                       <a:solidFill>
-                        <a:srgbClr val="D5D5E5"/>
+                        <a:srgbClr val="D9D9D5"/>
                       </a:solidFill>
                       <a:prstDash val="solid"/>
                       <a:round/>
@@ -8187,7 +8205,7 @@
                       <a:r>
                         <a:rPr sz="1200" b="1">
                           <a:solidFill>
-                            <a:srgbClr val="1E1B3A"/>
+                            <a:srgbClr val="202124"/>
                           </a:solidFill>
                           <a:latin typeface="Calibri"/>
                         </a:rPr>
@@ -8198,7 +8216,7 @@
                   <a:tcPr anchor="ctr">
                     <a:lnL w="12700" cap="flat" cmpd="sng" algn="ctr">
                       <a:solidFill>
-                        <a:srgbClr val="D5D5E5"/>
+                        <a:srgbClr val="D9D9D5"/>
                       </a:solidFill>
                       <a:prstDash val="solid"/>
                       <a:round/>
@@ -8207,7 +8225,7 @@
                     </a:lnL>
                     <a:lnR w="12700" cap="flat" cmpd="sng" algn="ctr">
                       <a:solidFill>
-                        <a:srgbClr val="D5D5E5"/>
+                        <a:srgbClr val="D9D9D5"/>
                       </a:solidFill>
                       <a:prstDash val="solid"/>
                       <a:round/>
@@ -8216,7 +8234,7 @@
                     </a:lnR>
                     <a:lnT w="12700" cap="flat" cmpd="sng" algn="ctr">
                       <a:solidFill>
-                        <a:srgbClr val="D5D5E5"/>
+                        <a:srgbClr val="D9D9D5"/>
                       </a:solidFill>
                       <a:prstDash val="solid"/>
                       <a:round/>
@@ -8225,7 +8243,7 @@
                     </a:lnT>
                     <a:lnB w="12700" cap="flat" cmpd="sng" algn="ctr">
                       <a:solidFill>
-                        <a:srgbClr val="D5D5E5"/>
+                        <a:srgbClr val="D9D9D5"/>
                       </a:solidFill>
                       <a:prstDash val="solid"/>
                       <a:round/>
@@ -8233,7 +8251,7 @@
                       <a:tailEnd type="none" w="med" len="med"/>
                     </a:lnB>
                     <a:solidFill>
-                      <a:srgbClr val="ECECF7"/>
+                      <a:srgbClr val="F2F2EF"/>
                     </a:solidFill>
                   </a:tcPr>
                 </a:tc>
@@ -8246,7 +8264,7 @@
                       <a:r>
                         <a:rPr sz="1200" b="0">
                           <a:solidFill>
-                            <a:srgbClr val="1E1B3A"/>
+                            <a:srgbClr val="202124"/>
                           </a:solidFill>
                           <a:latin typeface="Calibri"/>
                         </a:rPr>
@@ -8257,7 +8275,7 @@
                   <a:tcPr anchor="ctr">
                     <a:lnL w="12700" cap="flat" cmpd="sng" algn="ctr">
                       <a:solidFill>
-                        <a:srgbClr val="D5D5E5"/>
+                        <a:srgbClr val="D9D9D5"/>
                       </a:solidFill>
                       <a:prstDash val="solid"/>
                       <a:round/>
@@ -8266,7 +8284,7 @@
                     </a:lnL>
                     <a:lnR w="12700" cap="flat" cmpd="sng" algn="ctr">
                       <a:solidFill>
-                        <a:srgbClr val="D5D5E5"/>
+                        <a:srgbClr val="D9D9D5"/>
                       </a:solidFill>
                       <a:prstDash val="solid"/>
                       <a:round/>
@@ -8275,7 +8293,7 @@
                     </a:lnR>
                     <a:lnT w="12700" cap="flat" cmpd="sng" algn="ctr">
                       <a:solidFill>
-                        <a:srgbClr val="D5D5E5"/>
+                        <a:srgbClr val="D9D9D5"/>
                       </a:solidFill>
                       <a:prstDash val="solid"/>
                       <a:round/>
@@ -8284,7 +8302,7 @@
                     </a:lnT>
                     <a:lnB w="12700" cap="flat" cmpd="sng" algn="ctr">
                       <a:solidFill>
-                        <a:srgbClr val="D5D5E5"/>
+                        <a:srgbClr val="D9D9D5"/>
                       </a:solidFill>
                       <a:prstDash val="solid"/>
                       <a:round/>
@@ -8292,7 +8310,7 @@
                       <a:tailEnd type="none" w="med" len="med"/>
                     </a:lnB>
                     <a:solidFill>
-                      <a:srgbClr val="ECECF7"/>
+                      <a:srgbClr val="F2F2EF"/>
                     </a:solidFill>
                   </a:tcPr>
                 </a:tc>
@@ -8305,7 +8323,7 @@
                       <a:r>
                         <a:rPr sz="1200" b="0">
                           <a:solidFill>
-                            <a:srgbClr val="1E1B3A"/>
+                            <a:srgbClr val="202124"/>
                           </a:solidFill>
                           <a:latin typeface="Calibri"/>
                         </a:rPr>
@@ -8316,7 +8334,7 @@
                   <a:tcPr anchor="ctr">
                     <a:lnL w="12700" cap="flat" cmpd="sng" algn="ctr">
                       <a:solidFill>
-                        <a:srgbClr val="D5D5E5"/>
+                        <a:srgbClr val="D9D9D5"/>
                       </a:solidFill>
                       <a:prstDash val="solid"/>
                       <a:round/>
@@ -8325,7 +8343,7 @@
                     </a:lnL>
                     <a:lnR w="12700" cap="flat" cmpd="sng" algn="ctr">
                       <a:solidFill>
-                        <a:srgbClr val="D5D5E5"/>
+                        <a:srgbClr val="D9D9D5"/>
                       </a:solidFill>
                       <a:prstDash val="solid"/>
                       <a:round/>
@@ -8334,7 +8352,7 @@
                     </a:lnR>
                     <a:lnT w="12700" cap="flat" cmpd="sng" algn="ctr">
                       <a:solidFill>
-                        <a:srgbClr val="D5D5E5"/>
+                        <a:srgbClr val="D9D9D5"/>
                       </a:solidFill>
                       <a:prstDash val="solid"/>
                       <a:round/>
@@ -8343,7 +8361,7 @@
                     </a:lnT>
                     <a:lnB w="12700" cap="flat" cmpd="sng" algn="ctr">
                       <a:solidFill>
-                        <a:srgbClr val="D5D5E5"/>
+                        <a:srgbClr val="D9D9D5"/>
                       </a:solidFill>
                       <a:prstDash val="solid"/>
                       <a:round/>
@@ -8351,7 +8369,7 @@
                       <a:tailEnd type="none" w="med" len="med"/>
                     </a:lnB>
                     <a:solidFill>
-                      <a:srgbClr val="ECECF7"/>
+                      <a:srgbClr val="F2F2EF"/>
                     </a:solidFill>
                   </a:tcPr>
                 </a:tc>
@@ -8366,7 +8384,7 @@
                       <a:r>
                         <a:rPr sz="1200" b="1">
                           <a:solidFill>
-                            <a:srgbClr val="1E1B3A"/>
+                            <a:srgbClr val="202124"/>
                           </a:solidFill>
                           <a:latin typeface="Calibri"/>
                         </a:rPr>
@@ -8377,7 +8395,7 @@
                   <a:tcPr anchor="ctr">
                     <a:lnL w="12700" cap="flat" cmpd="sng" algn="ctr">
                       <a:solidFill>
-                        <a:srgbClr val="D5D5E5"/>
+                        <a:srgbClr val="D9D9D5"/>
                       </a:solidFill>
                       <a:prstDash val="solid"/>
                       <a:round/>
@@ -8386,7 +8404,7 @@
                     </a:lnL>
                     <a:lnR w="12700" cap="flat" cmpd="sng" algn="ctr">
                       <a:solidFill>
-                        <a:srgbClr val="D5D5E5"/>
+                        <a:srgbClr val="D9D9D5"/>
                       </a:solidFill>
                       <a:prstDash val="solid"/>
                       <a:round/>
@@ -8395,7 +8413,7 @@
                     </a:lnR>
                     <a:lnT w="12700" cap="flat" cmpd="sng" algn="ctr">
                       <a:solidFill>
-                        <a:srgbClr val="D5D5E5"/>
+                        <a:srgbClr val="D9D9D5"/>
                       </a:solidFill>
                       <a:prstDash val="solid"/>
                       <a:round/>
@@ -8404,7 +8422,7 @@
                     </a:lnT>
                     <a:lnB w="12700" cap="flat" cmpd="sng" algn="ctr">
                       <a:solidFill>
-                        <a:srgbClr val="D5D5E5"/>
+                        <a:srgbClr val="D9D9D5"/>
                       </a:solidFill>
                       <a:prstDash val="solid"/>
                       <a:round/>
@@ -8423,7 +8441,7 @@
                       <a:r>
                         <a:rPr sz="1200" b="0">
                           <a:solidFill>
-                            <a:srgbClr val="1E1B3A"/>
+                            <a:srgbClr val="202124"/>
                           </a:solidFill>
                           <a:latin typeface="Calibri"/>
                         </a:rPr>
@@ -8434,7 +8452,7 @@
                   <a:tcPr anchor="ctr">
                     <a:lnL w="12700" cap="flat" cmpd="sng" algn="ctr">
                       <a:solidFill>
-                        <a:srgbClr val="D5D5E5"/>
+                        <a:srgbClr val="D9D9D5"/>
                       </a:solidFill>
                       <a:prstDash val="solid"/>
                       <a:round/>
@@ -8443,7 +8461,7 @@
                     </a:lnL>
                     <a:lnR w="12700" cap="flat" cmpd="sng" algn="ctr">
                       <a:solidFill>
-                        <a:srgbClr val="D5D5E5"/>
+                        <a:srgbClr val="D9D9D5"/>
                       </a:solidFill>
                       <a:prstDash val="solid"/>
                       <a:round/>
@@ -8452,7 +8470,7 @@
                     </a:lnR>
                     <a:lnT w="12700" cap="flat" cmpd="sng" algn="ctr">
                       <a:solidFill>
-                        <a:srgbClr val="D5D5E5"/>
+                        <a:srgbClr val="D9D9D5"/>
                       </a:solidFill>
                       <a:prstDash val="solid"/>
                       <a:round/>
@@ -8461,7 +8479,7 @@
                     </a:lnT>
                     <a:lnB w="12700" cap="flat" cmpd="sng" algn="ctr">
                       <a:solidFill>
-                        <a:srgbClr val="D5D5E5"/>
+                        <a:srgbClr val="D9D9D5"/>
                       </a:solidFill>
                       <a:prstDash val="solid"/>
                       <a:round/>
@@ -8480,7 +8498,7 @@
                       <a:r>
                         <a:rPr sz="1200" b="0">
                           <a:solidFill>
-                            <a:srgbClr val="1E1B3A"/>
+                            <a:srgbClr val="202124"/>
                           </a:solidFill>
                           <a:latin typeface="Calibri"/>
                         </a:rPr>
@@ -8491,7 +8509,7 @@
                   <a:tcPr anchor="ctr">
                     <a:lnL w="12700" cap="flat" cmpd="sng" algn="ctr">
                       <a:solidFill>
-                        <a:srgbClr val="D5D5E5"/>
+                        <a:srgbClr val="D9D9D5"/>
                       </a:solidFill>
                       <a:prstDash val="solid"/>
                       <a:round/>
@@ -8500,7 +8518,7 @@
                     </a:lnL>
                     <a:lnR w="12700" cap="flat" cmpd="sng" algn="ctr">
                       <a:solidFill>
-                        <a:srgbClr val="D5D5E5"/>
+                        <a:srgbClr val="D9D9D5"/>
                       </a:solidFill>
                       <a:prstDash val="solid"/>
                       <a:round/>
@@ -8509,7 +8527,7 @@
                     </a:lnR>
                     <a:lnT w="12700" cap="flat" cmpd="sng" algn="ctr">
                       <a:solidFill>
-                        <a:srgbClr val="D5D5E5"/>
+                        <a:srgbClr val="D9D9D5"/>
                       </a:solidFill>
                       <a:prstDash val="solid"/>
                       <a:round/>
@@ -8518,7 +8536,7 @@
                     </a:lnT>
                     <a:lnB w="12700" cap="flat" cmpd="sng" algn="ctr">
                       <a:solidFill>
-                        <a:srgbClr val="D5D5E5"/>
+                        <a:srgbClr val="D9D9D5"/>
                       </a:solidFill>
                       <a:prstDash val="solid"/>
                       <a:round/>
@@ -8539,7 +8557,7 @@
                       <a:r>
                         <a:rPr sz="1200" b="1">
                           <a:solidFill>
-                            <a:srgbClr val="1E1B3A"/>
+                            <a:srgbClr val="202124"/>
                           </a:solidFill>
                           <a:latin typeface="Calibri"/>
                         </a:rPr>
@@ -8550,7 +8568,7 @@
                   <a:tcPr anchor="ctr">
                     <a:lnL w="12700" cap="flat" cmpd="sng" algn="ctr">
                       <a:solidFill>
-                        <a:srgbClr val="D5D5E5"/>
+                        <a:srgbClr val="D9D9D5"/>
                       </a:solidFill>
                       <a:prstDash val="solid"/>
                       <a:round/>
@@ -8559,7 +8577,7 @@
                     </a:lnL>
                     <a:lnR w="12700" cap="flat" cmpd="sng" algn="ctr">
                       <a:solidFill>
-                        <a:srgbClr val="D5D5E5"/>
+                        <a:srgbClr val="D9D9D5"/>
                       </a:solidFill>
                       <a:prstDash val="solid"/>
                       <a:round/>
@@ -8568,7 +8586,7 @@
                     </a:lnR>
                     <a:lnT w="12700" cap="flat" cmpd="sng" algn="ctr">
                       <a:solidFill>
-                        <a:srgbClr val="D5D5E5"/>
+                        <a:srgbClr val="D9D9D5"/>
                       </a:solidFill>
                       <a:prstDash val="solid"/>
                       <a:round/>
@@ -8577,7 +8595,7 @@
                     </a:lnT>
                     <a:lnB w="12700" cap="flat" cmpd="sng" algn="ctr">
                       <a:solidFill>
-                        <a:srgbClr val="D5D5E5"/>
+                        <a:srgbClr val="D9D9D5"/>
                       </a:solidFill>
                       <a:prstDash val="solid"/>
                       <a:round/>
@@ -8585,7 +8603,7 @@
                       <a:tailEnd type="none" w="med" len="med"/>
                     </a:lnB>
                     <a:solidFill>
-                      <a:srgbClr val="ECECF7"/>
+                      <a:srgbClr val="F2F2EF"/>
                     </a:solidFill>
                   </a:tcPr>
                 </a:tc>
@@ -8598,7 +8616,7 @@
                       <a:r>
                         <a:rPr sz="1200" b="0">
                           <a:solidFill>
-                            <a:srgbClr val="1E1B3A"/>
+                            <a:srgbClr val="202124"/>
                           </a:solidFill>
                           <a:latin typeface="Calibri"/>
                         </a:rPr>
@@ -8609,7 +8627,7 @@
                   <a:tcPr anchor="ctr">
                     <a:lnL w="12700" cap="flat" cmpd="sng" algn="ctr">
                       <a:solidFill>
-                        <a:srgbClr val="D5D5E5"/>
+                        <a:srgbClr val="D9D9D5"/>
                       </a:solidFill>
                       <a:prstDash val="solid"/>
                       <a:round/>
@@ -8618,7 +8636,7 @@
                     </a:lnL>
                     <a:lnR w="12700" cap="flat" cmpd="sng" algn="ctr">
                       <a:solidFill>
-                        <a:srgbClr val="D5D5E5"/>
+                        <a:srgbClr val="D9D9D5"/>
                       </a:solidFill>
                       <a:prstDash val="solid"/>
                       <a:round/>
@@ -8627,7 +8645,7 @@
                     </a:lnR>
                     <a:lnT w="12700" cap="flat" cmpd="sng" algn="ctr">
                       <a:solidFill>
-                        <a:srgbClr val="D5D5E5"/>
+                        <a:srgbClr val="D9D9D5"/>
                       </a:solidFill>
                       <a:prstDash val="solid"/>
                       <a:round/>
@@ -8636,7 +8654,7 @@
                     </a:lnT>
                     <a:lnB w="12700" cap="flat" cmpd="sng" algn="ctr">
                       <a:solidFill>
-                        <a:srgbClr val="D5D5E5"/>
+                        <a:srgbClr val="D9D9D5"/>
                       </a:solidFill>
                       <a:prstDash val="solid"/>
                       <a:round/>
@@ -8644,7 +8662,7 @@
                       <a:tailEnd type="none" w="med" len="med"/>
                     </a:lnB>
                     <a:solidFill>
-                      <a:srgbClr val="ECECF7"/>
+                      <a:srgbClr val="F2F2EF"/>
                     </a:solidFill>
                   </a:tcPr>
                 </a:tc>
@@ -8657,7 +8675,7 @@
                       <a:r>
                         <a:rPr sz="1200" b="0">
                           <a:solidFill>
-                            <a:srgbClr val="1E1B3A"/>
+                            <a:srgbClr val="202124"/>
                           </a:solidFill>
                           <a:latin typeface="Calibri"/>
                         </a:rPr>
@@ -8668,7 +8686,7 @@
                   <a:tcPr anchor="ctr">
                     <a:lnL w="12700" cap="flat" cmpd="sng" algn="ctr">
                       <a:solidFill>
-                        <a:srgbClr val="D5D5E5"/>
+                        <a:srgbClr val="D9D9D5"/>
                       </a:solidFill>
                       <a:prstDash val="solid"/>
                       <a:round/>
@@ -8677,7 +8695,7 @@
                     </a:lnL>
                     <a:lnR w="12700" cap="flat" cmpd="sng" algn="ctr">
                       <a:solidFill>
-                        <a:srgbClr val="D5D5E5"/>
+                        <a:srgbClr val="D9D9D5"/>
                       </a:solidFill>
                       <a:prstDash val="solid"/>
                       <a:round/>
@@ -8686,7 +8704,7 @@
                     </a:lnR>
                     <a:lnT w="12700" cap="flat" cmpd="sng" algn="ctr">
                       <a:solidFill>
-                        <a:srgbClr val="D5D5E5"/>
+                        <a:srgbClr val="D9D9D5"/>
                       </a:solidFill>
                       <a:prstDash val="solid"/>
                       <a:round/>
@@ -8695,7 +8713,7 @@
                     </a:lnT>
                     <a:lnB w="12700" cap="flat" cmpd="sng" algn="ctr">
                       <a:solidFill>
-                        <a:srgbClr val="D5D5E5"/>
+                        <a:srgbClr val="D9D9D5"/>
                       </a:solidFill>
                       <a:prstDash val="solid"/>
                       <a:round/>
@@ -8703,7 +8721,7 @@
                       <a:tailEnd type="none" w="med" len="med"/>
                     </a:lnB>
                     <a:solidFill>
-                      <a:srgbClr val="ECECF7"/>
+                      <a:srgbClr val="F2F2EF"/>
                     </a:solidFill>
                   </a:tcPr>
                 </a:tc>
@@ -8718,7 +8736,7 @@
                       <a:r>
                         <a:rPr sz="1200" b="1">
                           <a:solidFill>
-                            <a:srgbClr val="1E1B3A"/>
+                            <a:srgbClr val="202124"/>
                           </a:solidFill>
                           <a:latin typeface="Calibri"/>
                         </a:rPr>
@@ -8729,7 +8747,7 @@
                   <a:tcPr anchor="ctr">
                     <a:lnL w="12700" cap="flat" cmpd="sng" algn="ctr">
                       <a:solidFill>
-                        <a:srgbClr val="D5D5E5"/>
+                        <a:srgbClr val="D9D9D5"/>
                       </a:solidFill>
                       <a:prstDash val="solid"/>
                       <a:round/>
@@ -8738,7 +8756,7 @@
                     </a:lnL>
                     <a:lnR w="12700" cap="flat" cmpd="sng" algn="ctr">
                       <a:solidFill>
-                        <a:srgbClr val="D5D5E5"/>
+                        <a:srgbClr val="D9D9D5"/>
                       </a:solidFill>
                       <a:prstDash val="solid"/>
                       <a:round/>
@@ -8747,7 +8765,7 @@
                     </a:lnR>
                     <a:lnT w="12700" cap="flat" cmpd="sng" algn="ctr">
                       <a:solidFill>
-                        <a:srgbClr val="D5D5E5"/>
+                        <a:srgbClr val="D9D9D5"/>
                       </a:solidFill>
                       <a:prstDash val="solid"/>
                       <a:round/>
@@ -8756,7 +8774,7 @@
                     </a:lnT>
                     <a:lnB w="12700" cap="flat" cmpd="sng" algn="ctr">
                       <a:solidFill>
-                        <a:srgbClr val="D5D5E5"/>
+                        <a:srgbClr val="D9D9D5"/>
                       </a:solidFill>
                       <a:prstDash val="solid"/>
                       <a:round/>
@@ -8775,7 +8793,7 @@
                       <a:r>
                         <a:rPr sz="1200" b="0">
                           <a:solidFill>
-                            <a:srgbClr val="1E1B3A"/>
+                            <a:srgbClr val="202124"/>
                           </a:solidFill>
                           <a:latin typeface="Calibri"/>
                         </a:rPr>
@@ -8786,7 +8804,7 @@
                   <a:tcPr anchor="ctr">
                     <a:lnL w="12700" cap="flat" cmpd="sng" algn="ctr">
                       <a:solidFill>
-                        <a:srgbClr val="D5D5E5"/>
+                        <a:srgbClr val="D9D9D5"/>
                       </a:solidFill>
                       <a:prstDash val="solid"/>
                       <a:round/>
@@ -8795,7 +8813,7 @@
                     </a:lnL>
                     <a:lnR w="12700" cap="flat" cmpd="sng" algn="ctr">
                       <a:solidFill>
-                        <a:srgbClr val="D5D5E5"/>
+                        <a:srgbClr val="D9D9D5"/>
                       </a:solidFill>
                       <a:prstDash val="solid"/>
                       <a:round/>
@@ -8804,7 +8822,7 @@
                     </a:lnR>
                     <a:lnT w="12700" cap="flat" cmpd="sng" algn="ctr">
                       <a:solidFill>
-                        <a:srgbClr val="D5D5E5"/>
+                        <a:srgbClr val="D9D9D5"/>
                       </a:solidFill>
                       <a:prstDash val="solid"/>
                       <a:round/>
@@ -8813,7 +8831,7 @@
                     </a:lnT>
                     <a:lnB w="12700" cap="flat" cmpd="sng" algn="ctr">
                       <a:solidFill>
-                        <a:srgbClr val="D5D5E5"/>
+                        <a:srgbClr val="D9D9D5"/>
                       </a:solidFill>
                       <a:prstDash val="solid"/>
                       <a:round/>
@@ -8832,7 +8850,7 @@
                       <a:r>
                         <a:rPr sz="1200" b="0">
                           <a:solidFill>
-                            <a:srgbClr val="1E1B3A"/>
+                            <a:srgbClr val="202124"/>
                           </a:solidFill>
                           <a:latin typeface="Calibri"/>
                         </a:rPr>
@@ -8843,7 +8861,7 @@
                   <a:tcPr anchor="ctr">
                     <a:lnL w="12700" cap="flat" cmpd="sng" algn="ctr">
                       <a:solidFill>
-                        <a:srgbClr val="D5D5E5"/>
+                        <a:srgbClr val="D9D9D5"/>
                       </a:solidFill>
                       <a:prstDash val="solid"/>
                       <a:round/>
@@ -8852,7 +8870,7 @@
                     </a:lnL>
                     <a:lnR w="12700" cap="flat" cmpd="sng" algn="ctr">
                       <a:solidFill>
-                        <a:srgbClr val="D5D5E5"/>
+                        <a:srgbClr val="D9D9D5"/>
                       </a:solidFill>
                       <a:prstDash val="solid"/>
                       <a:round/>
@@ -8861,7 +8879,7 @@
                     </a:lnR>
                     <a:lnT w="12700" cap="flat" cmpd="sng" algn="ctr">
                       <a:solidFill>
-                        <a:srgbClr val="D5D5E5"/>
+                        <a:srgbClr val="D9D9D5"/>
                       </a:solidFill>
                       <a:prstDash val="solid"/>
                       <a:round/>
@@ -8870,7 +8888,7 @@
                     </a:lnT>
                     <a:lnB w="12700" cap="flat" cmpd="sng" algn="ctr">
                       <a:solidFill>
-                        <a:srgbClr val="D5D5E5"/>
+                        <a:srgbClr val="D9D9D5"/>
                       </a:solidFill>
                       <a:prstDash val="solid"/>
                       <a:round/>
@@ -8891,7 +8909,7 @@
                       <a:r>
                         <a:rPr sz="1200" b="1">
                           <a:solidFill>
-                            <a:srgbClr val="1E1B3A"/>
+                            <a:srgbClr val="202124"/>
                           </a:solidFill>
                           <a:latin typeface="Calibri"/>
                         </a:rPr>
@@ -8902,7 +8920,7 @@
                   <a:tcPr anchor="ctr">
                     <a:lnL w="12700" cap="flat" cmpd="sng" algn="ctr">
                       <a:solidFill>
-                        <a:srgbClr val="D5D5E5"/>
+                        <a:srgbClr val="D9D9D5"/>
                       </a:solidFill>
                       <a:prstDash val="solid"/>
                       <a:round/>
@@ -8911,7 +8929,7 @@
                     </a:lnL>
                     <a:lnR w="12700" cap="flat" cmpd="sng" algn="ctr">
                       <a:solidFill>
-                        <a:srgbClr val="D5D5E5"/>
+                        <a:srgbClr val="D9D9D5"/>
                       </a:solidFill>
                       <a:prstDash val="solid"/>
                       <a:round/>
@@ -8920,7 +8938,7 @@
                     </a:lnR>
                     <a:lnT w="12700" cap="flat" cmpd="sng" algn="ctr">
                       <a:solidFill>
-                        <a:srgbClr val="D5D5E5"/>
+                        <a:srgbClr val="D9D9D5"/>
                       </a:solidFill>
                       <a:prstDash val="solid"/>
                       <a:round/>
@@ -8929,7 +8947,7 @@
                     </a:lnT>
                     <a:lnB w="12700" cap="flat" cmpd="sng" algn="ctr">
                       <a:solidFill>
-                        <a:srgbClr val="D5D5E5"/>
+                        <a:srgbClr val="D9D9D5"/>
                       </a:solidFill>
                       <a:prstDash val="solid"/>
                       <a:round/>
@@ -8937,7 +8955,7 @@
                       <a:tailEnd type="none" w="med" len="med"/>
                     </a:lnB>
                     <a:solidFill>
-                      <a:srgbClr val="ECECF7"/>
+                      <a:srgbClr val="F2F2EF"/>
                     </a:solidFill>
                   </a:tcPr>
                 </a:tc>
@@ -8950,7 +8968,7 @@
                       <a:r>
                         <a:rPr sz="1200" b="0">
                           <a:solidFill>
-                            <a:srgbClr val="1E1B3A"/>
+                            <a:srgbClr val="202124"/>
                           </a:solidFill>
                           <a:latin typeface="Calibri"/>
                         </a:rPr>
@@ -8961,7 +8979,7 @@
                   <a:tcPr anchor="ctr">
                     <a:lnL w="12700" cap="flat" cmpd="sng" algn="ctr">
                       <a:solidFill>
-                        <a:srgbClr val="D5D5E5"/>
+                        <a:srgbClr val="D9D9D5"/>
                       </a:solidFill>
                       <a:prstDash val="solid"/>
                       <a:round/>
@@ -8970,7 +8988,7 @@
                     </a:lnL>
                     <a:lnR w="12700" cap="flat" cmpd="sng" algn="ctr">
                       <a:solidFill>
-                        <a:srgbClr val="D5D5E5"/>
+                        <a:srgbClr val="D9D9D5"/>
                       </a:solidFill>
                       <a:prstDash val="solid"/>
                       <a:round/>
@@ -8979,7 +8997,7 @@
                     </a:lnR>
                     <a:lnT w="12700" cap="flat" cmpd="sng" algn="ctr">
                       <a:solidFill>
-                        <a:srgbClr val="D5D5E5"/>
+                        <a:srgbClr val="D9D9D5"/>
                       </a:solidFill>
                       <a:prstDash val="solid"/>
                       <a:round/>
@@ -8988,7 +9006,7 @@
                     </a:lnT>
                     <a:lnB w="12700" cap="flat" cmpd="sng" algn="ctr">
                       <a:solidFill>
-                        <a:srgbClr val="D5D5E5"/>
+                        <a:srgbClr val="D9D9D5"/>
                       </a:solidFill>
                       <a:prstDash val="solid"/>
                       <a:round/>
@@ -8996,7 +9014,7 @@
                       <a:tailEnd type="none" w="med" len="med"/>
                     </a:lnB>
                     <a:solidFill>
-                      <a:srgbClr val="ECECF7"/>
+                      <a:srgbClr val="F2F2EF"/>
                     </a:solidFill>
                   </a:tcPr>
                 </a:tc>
@@ -9009,7 +9027,7 @@
                       <a:r>
                         <a:rPr sz="1200" b="0">
                           <a:solidFill>
-                            <a:srgbClr val="1E1B3A"/>
+                            <a:srgbClr val="202124"/>
                           </a:solidFill>
                           <a:latin typeface="Calibri"/>
                         </a:rPr>
@@ -9020,7 +9038,7 @@
                   <a:tcPr anchor="ctr">
                     <a:lnL w="12700" cap="flat" cmpd="sng" algn="ctr">
                       <a:solidFill>
-                        <a:srgbClr val="D5D5E5"/>
+                        <a:srgbClr val="D9D9D5"/>
                       </a:solidFill>
                       <a:prstDash val="solid"/>
                       <a:round/>
@@ -9029,7 +9047,7 @@
                     </a:lnL>
                     <a:lnR w="12700" cap="flat" cmpd="sng" algn="ctr">
                       <a:solidFill>
-                        <a:srgbClr val="D5D5E5"/>
+                        <a:srgbClr val="D9D9D5"/>
                       </a:solidFill>
                       <a:prstDash val="solid"/>
                       <a:round/>
@@ -9038,7 +9056,7 @@
                     </a:lnR>
                     <a:lnT w="12700" cap="flat" cmpd="sng" algn="ctr">
                       <a:solidFill>
-                        <a:srgbClr val="D5D5E5"/>
+                        <a:srgbClr val="D9D9D5"/>
                       </a:solidFill>
                       <a:prstDash val="solid"/>
                       <a:round/>
@@ -9047,7 +9065,7 @@
                     </a:lnT>
                     <a:lnB w="12700" cap="flat" cmpd="sng" algn="ctr">
                       <a:solidFill>
-                        <a:srgbClr val="D5D5E5"/>
+                        <a:srgbClr val="D9D9D5"/>
                       </a:solidFill>
                       <a:prstDash val="solid"/>
                       <a:round/>
@@ -9055,7 +9073,7 @@
                       <a:tailEnd type="none" w="med" len="med"/>
                     </a:lnB>
                     <a:solidFill>
-                      <a:srgbClr val="ECECF7"/>
+                      <a:srgbClr val="F2F2EF"/>
                     </a:solidFill>
                   </a:tcPr>
                 </a:tc>
@@ -9070,7 +9088,7 @@
                       <a:r>
                         <a:rPr sz="1200" b="1">
                           <a:solidFill>
-                            <a:srgbClr val="1E1B3A"/>
+                            <a:srgbClr val="202124"/>
                           </a:solidFill>
                           <a:latin typeface="Calibri"/>
                         </a:rPr>
@@ -9081,7 +9099,7 @@
                   <a:tcPr anchor="ctr">
                     <a:lnL w="12700" cap="flat" cmpd="sng" algn="ctr">
                       <a:solidFill>
-                        <a:srgbClr val="D5D5E5"/>
+                        <a:srgbClr val="D9D9D5"/>
                       </a:solidFill>
                       <a:prstDash val="solid"/>
                       <a:round/>
@@ -9090,7 +9108,7 @@
                     </a:lnL>
                     <a:lnR w="12700" cap="flat" cmpd="sng" algn="ctr">
                       <a:solidFill>
-                        <a:srgbClr val="D5D5E5"/>
+                        <a:srgbClr val="D9D9D5"/>
                       </a:solidFill>
                       <a:prstDash val="solid"/>
                       <a:round/>
@@ -9099,7 +9117,7 @@
                     </a:lnR>
                     <a:lnT w="12700" cap="flat" cmpd="sng" algn="ctr">
                       <a:solidFill>
-                        <a:srgbClr val="D5D5E5"/>
+                        <a:srgbClr val="D9D9D5"/>
                       </a:solidFill>
                       <a:prstDash val="solid"/>
                       <a:round/>
@@ -9108,7 +9126,7 @@
                     </a:lnT>
                     <a:lnB w="12700" cap="flat" cmpd="sng" algn="ctr">
                       <a:solidFill>
-                        <a:srgbClr val="D5D5E5"/>
+                        <a:srgbClr val="D9D9D5"/>
                       </a:solidFill>
                       <a:prstDash val="solid"/>
                       <a:round/>
@@ -9127,7 +9145,7 @@
                       <a:r>
                         <a:rPr sz="1200" b="0">
                           <a:solidFill>
-                            <a:srgbClr val="1E1B3A"/>
+                            <a:srgbClr val="202124"/>
                           </a:solidFill>
                           <a:latin typeface="Calibri"/>
                         </a:rPr>
@@ -9138,7 +9156,7 @@
                   <a:tcPr anchor="ctr">
                     <a:lnL w="12700" cap="flat" cmpd="sng" algn="ctr">
                       <a:solidFill>
-                        <a:srgbClr val="D5D5E5"/>
+                        <a:srgbClr val="D9D9D5"/>
                       </a:solidFill>
                       <a:prstDash val="solid"/>
                       <a:round/>
@@ -9147,7 +9165,7 @@
                     </a:lnL>
                     <a:lnR w="12700" cap="flat" cmpd="sng" algn="ctr">
                       <a:solidFill>
-                        <a:srgbClr val="D5D5E5"/>
+                        <a:srgbClr val="D9D9D5"/>
                       </a:solidFill>
                       <a:prstDash val="solid"/>
                       <a:round/>
@@ -9156,7 +9174,7 @@
                     </a:lnR>
                     <a:lnT w="12700" cap="flat" cmpd="sng" algn="ctr">
                       <a:solidFill>
-                        <a:srgbClr val="D5D5E5"/>
+                        <a:srgbClr val="D9D9D5"/>
                       </a:solidFill>
                       <a:prstDash val="solid"/>
                       <a:round/>
@@ -9165,7 +9183,7 @@
                     </a:lnT>
                     <a:lnB w="12700" cap="flat" cmpd="sng" algn="ctr">
                       <a:solidFill>
-                        <a:srgbClr val="D5D5E5"/>
+                        <a:srgbClr val="D9D9D5"/>
                       </a:solidFill>
                       <a:prstDash val="solid"/>
                       <a:round/>
@@ -9184,7 +9202,7 @@
                       <a:r>
                         <a:rPr sz="1200" b="0">
                           <a:solidFill>
-                            <a:srgbClr val="1E1B3A"/>
+                            <a:srgbClr val="202124"/>
                           </a:solidFill>
                           <a:latin typeface="Calibri"/>
                         </a:rPr>
@@ -9195,7 +9213,7 @@
                   <a:tcPr anchor="ctr">
                     <a:lnL w="12700" cap="flat" cmpd="sng" algn="ctr">
                       <a:solidFill>
-                        <a:srgbClr val="D5D5E5"/>
+                        <a:srgbClr val="D9D9D5"/>
                       </a:solidFill>
                       <a:prstDash val="solid"/>
                       <a:round/>
@@ -9204,7 +9222,7 @@
                     </a:lnL>
                     <a:lnR w="12700" cap="flat" cmpd="sng" algn="ctr">
                       <a:solidFill>
-                        <a:srgbClr val="D5D5E5"/>
+                        <a:srgbClr val="D9D9D5"/>
                       </a:solidFill>
                       <a:prstDash val="solid"/>
                       <a:round/>
@@ -9213,7 +9231,7 @@
                     </a:lnR>
                     <a:lnT w="12700" cap="flat" cmpd="sng" algn="ctr">
                       <a:solidFill>
-                        <a:srgbClr val="D5D5E5"/>
+                        <a:srgbClr val="D9D9D5"/>
                       </a:solidFill>
                       <a:prstDash val="solid"/>
                       <a:round/>
@@ -9222,7 +9240,7 @@
                     </a:lnT>
                     <a:lnB w="12700" cap="flat" cmpd="sng" algn="ctr">
                       <a:solidFill>
-                        <a:srgbClr val="D5D5E5"/>
+                        <a:srgbClr val="D9D9D5"/>
                       </a:solidFill>
                       <a:prstDash val="solid"/>
                       <a:round/>
@@ -9253,7 +9271,7 @@
           </a:prstGeom>
           <a:ln w="50800">
             <a:solidFill>
-              <a:srgbClr val="E8604C"/>
+              <a:srgbClr val="F2A900"/>
             </a:solidFill>
           </a:ln>
         </p:spPr>
@@ -9298,7 +9316,7 @@
             <a:r>
               <a:rPr sz="1600" b="0">
                 <a:solidFill>
-                  <a:srgbClr val="56566E"/>
+                  <a:srgbClr val="57575A"/>
                 </a:solidFill>
                 <a:latin typeface="Calibri"/>
               </a:rPr>
@@ -9332,7 +9350,7 @@
             <a:r>
               <a:rPr sz="1000" b="0">
                 <a:solidFill>
-                  <a:srgbClr val="56566E"/>
+                  <a:srgbClr val="57575A"/>
                 </a:solidFill>
                 <a:latin typeface="Calibri"/>
               </a:rPr>
@@ -9367,7 +9385,7 @@
             <a:r>
               <a:rPr sz="1000" b="0">
                 <a:solidFill>
-                  <a:srgbClr val="56566E"/>
+                  <a:srgbClr val="57575A"/>
                 </a:solidFill>
                 <a:latin typeface="Calibri"/>
               </a:rPr>
@@ -9381,9 +9399,18 @@
   <p:clrMapOvr>
     <a:masterClrMapping/>
   </p:clrMapOvr>
-  <p:transition spd="med" advTm="35000">
-    <p:push dir="u"/>
-  </p:transition>
+  <mc:AlternateContent xmlns:mc="http://schemas.openxmlformats.org/markup-compatibility/2006">
+    <mc:Choice xmlns:p14="http://schemas.microsoft.com/office/powerpoint/2010/main" Requires="p14">
+      <p:transition spd="slow" p14:dur="1500" advTm="10000">
+        <p:push dir="u"/>
+      </p:transition>
+    </mc:Choice>
+    <mc:Fallback>
+      <p:transition spd="slow" advTm="10000">
+        <p:push dir="u"/>
+      </p:transition>
+    </mc:Fallback>
+  </mc:AlternateContent>
   <p:timing>
     <p:tnLst>
       <p:par>
@@ -9606,7 +9633,7 @@
     <p:bg>
       <p:bgPr>
         <a:solidFill>
-          <a:srgbClr val="F4F4FA"/>
+          <a:srgbClr val="F5F5F3"/>
         </a:solidFill>
         <a:effectLst/>
       </p:bgPr>
@@ -9633,7 +9660,7 @@
             <a:avLst/>
           </a:prstGeom>
           <a:solidFill>
-            <a:srgbClr val="312E81"/>
+            <a:srgbClr val="202124"/>
           </a:solidFill>
           <a:ln>
             <a:noFill/>
@@ -9730,7 +9757,7 @@
           </a:prstGeom>
           <a:ln w="50800">
             <a:solidFill>
-              <a:srgbClr val="E8604C"/>
+              <a:srgbClr val="F2A900"/>
             </a:solidFill>
           </a:ln>
         </p:spPr>
@@ -9775,7 +9802,7 @@
             <a:r>
               <a:rPr sz="1600" b="0">
                 <a:solidFill>
-                  <a:srgbClr val="56566E"/>
+                  <a:srgbClr val="57575A"/>
                 </a:solidFill>
                 <a:latin typeface="Calibri"/>
               </a:rPr>
@@ -9809,7 +9836,7 @@
             <a:r>
               <a:rPr sz="1000" b="0">
                 <a:solidFill>
-                  <a:srgbClr val="56566E"/>
+                  <a:srgbClr val="57575A"/>
                 </a:solidFill>
                 <a:latin typeface="Calibri"/>
               </a:rPr>
@@ -9844,7 +9871,7 @@
             <a:r>
               <a:rPr sz="1000" b="0">
                 <a:solidFill>
-                  <a:srgbClr val="56566E"/>
+                  <a:srgbClr val="57575A"/>
                 </a:solidFill>
                 <a:latin typeface="Calibri"/>
               </a:rPr>
@@ -9911,7 +9938,7 @@
             <a:avLst/>
           </a:prstGeom>
           <a:solidFill>
-            <a:srgbClr val="E8604C"/>
+            <a:srgbClr val="F2A900"/>
           </a:solidFill>
           <a:ln>
             <a:noFill/>
@@ -9969,7 +9996,7 @@
             <a:r>
               <a:rPr sz="1700" b="1">
                 <a:solidFill>
-                  <a:srgbClr val="1E1B3A"/>
+                  <a:srgbClr val="202124"/>
                 </a:solidFill>
                 <a:latin typeface="Calibri"/>
               </a:rPr>
@@ -9978,7 +10005,7 @@
             <a:r>
               <a:rPr sz="1700" b="0">
                 <a:solidFill>
-                  <a:srgbClr val="1E1B3A"/>
+                  <a:srgbClr val="202124"/>
                 </a:solidFill>
                 <a:latin typeface="Calibri"/>
               </a:rPr>
@@ -9994,7 +10021,7 @@
             <a:r>
               <a:rPr sz="1700" b="1">
                 <a:solidFill>
-                  <a:srgbClr val="1E1B3A"/>
+                  <a:srgbClr val="202124"/>
                 </a:solidFill>
                 <a:latin typeface="Calibri"/>
               </a:rPr>
@@ -10003,7 +10030,7 @@
             <a:r>
               <a:rPr sz="1700" b="0">
                 <a:solidFill>
-                  <a:srgbClr val="1E1B3A"/>
+                  <a:srgbClr val="202124"/>
                 </a:solidFill>
                 <a:latin typeface="Calibri"/>
               </a:rPr>
@@ -10019,7 +10046,7 @@
             <a:r>
               <a:rPr sz="1700" b="1">
                 <a:solidFill>
-                  <a:srgbClr val="1E1B3A"/>
+                  <a:srgbClr val="202124"/>
                 </a:solidFill>
                 <a:latin typeface="Calibri"/>
               </a:rPr>
@@ -10028,7 +10055,7 @@
             <a:r>
               <a:rPr sz="1700" b="0">
                 <a:solidFill>
-                  <a:srgbClr val="1E1B3A"/>
+                  <a:srgbClr val="202124"/>
                 </a:solidFill>
                 <a:latin typeface="Calibri"/>
               </a:rPr>
@@ -10042,9 +10069,18 @@
   <p:clrMapOvr>
     <a:masterClrMapping/>
   </p:clrMapOvr>
-  <p:transition spd="med" advTm="30000">
-    <p:push dir="u"/>
-  </p:transition>
+  <mc:AlternateContent xmlns:mc="http://schemas.openxmlformats.org/markup-compatibility/2006">
+    <mc:Choice xmlns:p14="http://schemas.microsoft.com/office/powerpoint/2010/main" Requires="p14">
+      <p:transition spd="slow" p14:dur="1500" advTm="10000">
+        <p:push dir="u"/>
+      </p:transition>
+    </mc:Choice>
+    <mc:Fallback>
+      <p:transition spd="slow" advTm="10000">
+        <p:push dir="u"/>
+      </p:transition>
+    </mc:Fallback>
+  </mc:AlternateContent>
   <p:timing>
     <p:tnLst>
       <p:par>
@@ -10387,7 +10423,7 @@
     <p:bg>
       <p:bgPr>
         <a:solidFill>
-          <a:srgbClr val="F4F4FA"/>
+          <a:srgbClr val="F5F5F3"/>
         </a:solidFill>
         <a:effectLst/>
       </p:bgPr>
@@ -10414,7 +10450,7 @@
             <a:avLst/>
           </a:prstGeom>
           <a:solidFill>
-            <a:srgbClr val="312E81"/>
+            <a:srgbClr val="202124"/>
           </a:solidFill>
           <a:ln>
             <a:noFill/>
@@ -10520,7 +10556,7 @@
                   <a:tcPr anchor="ctr">
                     <a:lnL w="12700" cap="flat" cmpd="sng" algn="ctr">
                       <a:solidFill>
-                        <a:srgbClr val="D5D5E5"/>
+                        <a:srgbClr val="D9D9D5"/>
                       </a:solidFill>
                       <a:prstDash val="solid"/>
                       <a:round/>
@@ -10529,7 +10565,7 @@
                     </a:lnL>
                     <a:lnR w="12700" cap="flat" cmpd="sng" algn="ctr">
                       <a:solidFill>
-                        <a:srgbClr val="D5D5E5"/>
+                        <a:srgbClr val="D9D9D5"/>
                       </a:solidFill>
                       <a:prstDash val="solid"/>
                       <a:round/>
@@ -10538,7 +10574,7 @@
                     </a:lnR>
                     <a:lnT w="12700" cap="flat" cmpd="sng" algn="ctr">
                       <a:solidFill>
-                        <a:srgbClr val="D5D5E5"/>
+                        <a:srgbClr val="D9D9D5"/>
                       </a:solidFill>
                       <a:prstDash val="solid"/>
                       <a:round/>
@@ -10547,7 +10583,7 @@
                     </a:lnT>
                     <a:lnB w="12700" cap="flat" cmpd="sng" algn="ctr">
                       <a:solidFill>
-                        <a:srgbClr val="D5D5E5"/>
+                        <a:srgbClr val="D9D9D5"/>
                       </a:solidFill>
                       <a:prstDash val="solid"/>
                       <a:round/>
@@ -10555,7 +10591,7 @@
                       <a:tailEnd type="none" w="med" len="med"/>
                     </a:lnB>
                     <a:solidFill>
-                      <a:srgbClr val="312E81"/>
+                      <a:srgbClr val="202124"/>
                     </a:solidFill>
                   </a:tcPr>
                 </a:tc>
@@ -10579,7 +10615,7 @@
                   <a:tcPr anchor="ctr">
                     <a:lnL w="12700" cap="flat" cmpd="sng" algn="ctr">
                       <a:solidFill>
-                        <a:srgbClr val="D5D5E5"/>
+                        <a:srgbClr val="D9D9D5"/>
                       </a:solidFill>
                       <a:prstDash val="solid"/>
                       <a:round/>
@@ -10588,7 +10624,7 @@
                     </a:lnL>
                     <a:lnR w="12700" cap="flat" cmpd="sng" algn="ctr">
                       <a:solidFill>
-                        <a:srgbClr val="D5D5E5"/>
+                        <a:srgbClr val="D9D9D5"/>
                       </a:solidFill>
                       <a:prstDash val="solid"/>
                       <a:round/>
@@ -10597,7 +10633,7 @@
                     </a:lnR>
                     <a:lnT w="12700" cap="flat" cmpd="sng" algn="ctr">
                       <a:solidFill>
-                        <a:srgbClr val="D5D5E5"/>
+                        <a:srgbClr val="D9D9D5"/>
                       </a:solidFill>
                       <a:prstDash val="solid"/>
                       <a:round/>
@@ -10606,7 +10642,7 @@
                     </a:lnT>
                     <a:lnB w="12700" cap="flat" cmpd="sng" algn="ctr">
                       <a:solidFill>
-                        <a:srgbClr val="D5D5E5"/>
+                        <a:srgbClr val="D9D9D5"/>
                       </a:solidFill>
                       <a:prstDash val="solid"/>
                       <a:round/>
@@ -10614,7 +10650,7 @@
                       <a:tailEnd type="none" w="med" len="med"/>
                     </a:lnB>
                     <a:solidFill>
-                      <a:srgbClr val="312E81"/>
+                      <a:srgbClr val="202124"/>
                     </a:solidFill>
                   </a:tcPr>
                 </a:tc>
@@ -10629,7 +10665,7 @@
                       <a:r>
                         <a:rPr sz="1600" b="1">
                           <a:solidFill>
-                            <a:srgbClr val="1E1B3A"/>
+                            <a:srgbClr val="202124"/>
                           </a:solidFill>
                           <a:latin typeface="Calibri"/>
                         </a:rPr>
@@ -10640,7 +10676,7 @@
                   <a:tcPr anchor="ctr">
                     <a:lnL w="12700" cap="flat" cmpd="sng" algn="ctr">
                       <a:solidFill>
-                        <a:srgbClr val="D5D5E5"/>
+                        <a:srgbClr val="D9D9D5"/>
                       </a:solidFill>
                       <a:prstDash val="solid"/>
                       <a:round/>
@@ -10649,7 +10685,7 @@
                     </a:lnL>
                     <a:lnR w="12700" cap="flat" cmpd="sng" algn="ctr">
                       <a:solidFill>
-                        <a:srgbClr val="D5D5E5"/>
+                        <a:srgbClr val="D9D9D5"/>
                       </a:solidFill>
                       <a:prstDash val="solid"/>
                       <a:round/>
@@ -10658,7 +10694,7 @@
                     </a:lnR>
                     <a:lnT w="12700" cap="flat" cmpd="sng" algn="ctr">
                       <a:solidFill>
-                        <a:srgbClr val="D5D5E5"/>
+                        <a:srgbClr val="D9D9D5"/>
                       </a:solidFill>
                       <a:prstDash val="solid"/>
                       <a:round/>
@@ -10667,7 +10703,7 @@
                     </a:lnT>
                     <a:lnB w="12700" cap="flat" cmpd="sng" algn="ctr">
                       <a:solidFill>
-                        <a:srgbClr val="D5D5E5"/>
+                        <a:srgbClr val="D9D9D5"/>
                       </a:solidFill>
                       <a:prstDash val="solid"/>
                       <a:round/>
@@ -10686,7 +10722,7 @@
                       <a:r>
                         <a:rPr sz="1600" b="0">
                           <a:solidFill>
-                            <a:srgbClr val="1E1B3A"/>
+                            <a:srgbClr val="202124"/>
                           </a:solidFill>
                           <a:latin typeface="Calibri"/>
                         </a:rPr>
@@ -10697,7 +10733,7 @@
                   <a:tcPr anchor="ctr">
                     <a:lnL w="12700" cap="flat" cmpd="sng" algn="ctr">
                       <a:solidFill>
-                        <a:srgbClr val="D5D5E5"/>
+                        <a:srgbClr val="D9D9D5"/>
                       </a:solidFill>
                       <a:prstDash val="solid"/>
                       <a:round/>
@@ -10706,7 +10742,7 @@
                     </a:lnL>
                     <a:lnR w="12700" cap="flat" cmpd="sng" algn="ctr">
                       <a:solidFill>
-                        <a:srgbClr val="D5D5E5"/>
+                        <a:srgbClr val="D9D9D5"/>
                       </a:solidFill>
                       <a:prstDash val="solid"/>
                       <a:round/>
@@ -10715,7 +10751,7 @@
                     </a:lnR>
                     <a:lnT w="12700" cap="flat" cmpd="sng" algn="ctr">
                       <a:solidFill>
-                        <a:srgbClr val="D5D5E5"/>
+                        <a:srgbClr val="D9D9D5"/>
                       </a:solidFill>
                       <a:prstDash val="solid"/>
                       <a:round/>
@@ -10724,7 +10760,7 @@
                     </a:lnT>
                     <a:lnB w="12700" cap="flat" cmpd="sng" algn="ctr">
                       <a:solidFill>
-                        <a:srgbClr val="D5D5E5"/>
+                        <a:srgbClr val="D9D9D5"/>
                       </a:solidFill>
                       <a:prstDash val="solid"/>
                       <a:round/>
@@ -10745,7 +10781,7 @@
                       <a:r>
                         <a:rPr sz="1600" b="1">
                           <a:solidFill>
-                            <a:srgbClr val="1E1B3A"/>
+                            <a:srgbClr val="202124"/>
                           </a:solidFill>
                           <a:latin typeface="Calibri"/>
                         </a:rPr>
@@ -10756,7 +10792,7 @@
                   <a:tcPr anchor="ctr">
                     <a:lnL w="12700" cap="flat" cmpd="sng" algn="ctr">
                       <a:solidFill>
-                        <a:srgbClr val="D5D5E5"/>
+                        <a:srgbClr val="D9D9D5"/>
                       </a:solidFill>
                       <a:prstDash val="solid"/>
                       <a:round/>
@@ -10765,7 +10801,7 @@
                     </a:lnL>
                     <a:lnR w="12700" cap="flat" cmpd="sng" algn="ctr">
                       <a:solidFill>
-                        <a:srgbClr val="D5D5E5"/>
+                        <a:srgbClr val="D9D9D5"/>
                       </a:solidFill>
                       <a:prstDash val="solid"/>
                       <a:round/>
@@ -10774,7 +10810,7 @@
                     </a:lnR>
                     <a:lnT w="12700" cap="flat" cmpd="sng" algn="ctr">
                       <a:solidFill>
-                        <a:srgbClr val="D5D5E5"/>
+                        <a:srgbClr val="D9D9D5"/>
                       </a:solidFill>
                       <a:prstDash val="solid"/>
                       <a:round/>
@@ -10783,7 +10819,7 @@
                     </a:lnT>
                     <a:lnB w="12700" cap="flat" cmpd="sng" algn="ctr">
                       <a:solidFill>
-                        <a:srgbClr val="D5D5E5"/>
+                        <a:srgbClr val="D9D9D5"/>
                       </a:solidFill>
                       <a:prstDash val="solid"/>
                       <a:round/>
@@ -10791,7 +10827,7 @@
                       <a:tailEnd type="none" w="med" len="med"/>
                     </a:lnB>
                     <a:solidFill>
-                      <a:srgbClr val="ECECF7"/>
+                      <a:srgbClr val="F2F2EF"/>
                     </a:solidFill>
                   </a:tcPr>
                 </a:tc>
@@ -10804,7 +10840,7 @@
                       <a:r>
                         <a:rPr sz="1600" b="0">
                           <a:solidFill>
-                            <a:srgbClr val="1E1B3A"/>
+                            <a:srgbClr val="202124"/>
                           </a:solidFill>
                           <a:latin typeface="Calibri"/>
                         </a:rPr>
@@ -10815,7 +10851,7 @@
                   <a:tcPr anchor="ctr">
                     <a:lnL w="12700" cap="flat" cmpd="sng" algn="ctr">
                       <a:solidFill>
-                        <a:srgbClr val="D5D5E5"/>
+                        <a:srgbClr val="D9D9D5"/>
                       </a:solidFill>
                       <a:prstDash val="solid"/>
                       <a:round/>
@@ -10824,7 +10860,7 @@
                     </a:lnL>
                     <a:lnR w="12700" cap="flat" cmpd="sng" algn="ctr">
                       <a:solidFill>
-                        <a:srgbClr val="D5D5E5"/>
+                        <a:srgbClr val="D9D9D5"/>
                       </a:solidFill>
                       <a:prstDash val="solid"/>
                       <a:round/>
@@ -10833,7 +10869,7 @@
                     </a:lnR>
                     <a:lnT w="12700" cap="flat" cmpd="sng" algn="ctr">
                       <a:solidFill>
-                        <a:srgbClr val="D5D5E5"/>
+                        <a:srgbClr val="D9D9D5"/>
                       </a:solidFill>
                       <a:prstDash val="solid"/>
                       <a:round/>
@@ -10842,7 +10878,7 @@
                     </a:lnT>
                     <a:lnB w="12700" cap="flat" cmpd="sng" algn="ctr">
                       <a:solidFill>
-                        <a:srgbClr val="D5D5E5"/>
+                        <a:srgbClr val="D9D9D5"/>
                       </a:solidFill>
                       <a:prstDash val="solid"/>
                       <a:round/>
@@ -10850,7 +10886,7 @@
                       <a:tailEnd type="none" w="med" len="med"/>
                     </a:lnB>
                     <a:solidFill>
-                      <a:srgbClr val="ECECF7"/>
+                      <a:srgbClr val="F2F2EF"/>
                     </a:solidFill>
                   </a:tcPr>
                 </a:tc>
@@ -10865,7 +10901,7 @@
                       <a:r>
                         <a:rPr sz="1600" b="1">
                           <a:solidFill>
-                            <a:srgbClr val="1E1B3A"/>
+                            <a:srgbClr val="202124"/>
                           </a:solidFill>
                           <a:latin typeface="Calibri"/>
                         </a:rPr>
@@ -10876,7 +10912,7 @@
                   <a:tcPr anchor="ctr">
                     <a:lnL w="12700" cap="flat" cmpd="sng" algn="ctr">
                       <a:solidFill>
-                        <a:srgbClr val="D5D5E5"/>
+                        <a:srgbClr val="D9D9D5"/>
                       </a:solidFill>
                       <a:prstDash val="solid"/>
                       <a:round/>
@@ -10885,7 +10921,7 @@
                     </a:lnL>
                     <a:lnR w="12700" cap="flat" cmpd="sng" algn="ctr">
                       <a:solidFill>
-                        <a:srgbClr val="D5D5E5"/>
+                        <a:srgbClr val="D9D9D5"/>
                       </a:solidFill>
                       <a:prstDash val="solid"/>
                       <a:round/>
@@ -10894,7 +10930,7 @@
                     </a:lnR>
                     <a:lnT w="12700" cap="flat" cmpd="sng" algn="ctr">
                       <a:solidFill>
-                        <a:srgbClr val="D5D5E5"/>
+                        <a:srgbClr val="D9D9D5"/>
                       </a:solidFill>
                       <a:prstDash val="solid"/>
                       <a:round/>
@@ -10903,7 +10939,7 @@
                     </a:lnT>
                     <a:lnB w="12700" cap="flat" cmpd="sng" algn="ctr">
                       <a:solidFill>
-                        <a:srgbClr val="D5D5E5"/>
+                        <a:srgbClr val="D9D9D5"/>
                       </a:solidFill>
                       <a:prstDash val="solid"/>
                       <a:round/>
@@ -10922,7 +10958,7 @@
                       <a:r>
                         <a:rPr sz="1600" b="0">
                           <a:solidFill>
-                            <a:srgbClr val="1E1B3A"/>
+                            <a:srgbClr val="202124"/>
                           </a:solidFill>
                           <a:latin typeface="Calibri"/>
                         </a:rPr>
@@ -10933,7 +10969,7 @@
                   <a:tcPr anchor="ctr">
                     <a:lnL w="12700" cap="flat" cmpd="sng" algn="ctr">
                       <a:solidFill>
-                        <a:srgbClr val="D5D5E5"/>
+                        <a:srgbClr val="D9D9D5"/>
                       </a:solidFill>
                       <a:prstDash val="solid"/>
                       <a:round/>
@@ -10942,7 +10978,7 @@
                     </a:lnL>
                     <a:lnR w="12700" cap="flat" cmpd="sng" algn="ctr">
                       <a:solidFill>
-                        <a:srgbClr val="D5D5E5"/>
+                        <a:srgbClr val="D9D9D5"/>
                       </a:solidFill>
                       <a:prstDash val="solid"/>
                       <a:round/>
@@ -10951,7 +10987,7 @@
                     </a:lnR>
                     <a:lnT w="12700" cap="flat" cmpd="sng" algn="ctr">
                       <a:solidFill>
-                        <a:srgbClr val="D5D5E5"/>
+                        <a:srgbClr val="D9D9D5"/>
                       </a:solidFill>
                       <a:prstDash val="solid"/>
                       <a:round/>
@@ -10960,7 +10996,7 @@
                     </a:lnT>
                     <a:lnB w="12700" cap="flat" cmpd="sng" algn="ctr">
                       <a:solidFill>
-                        <a:srgbClr val="D5D5E5"/>
+                        <a:srgbClr val="D9D9D5"/>
                       </a:solidFill>
                       <a:prstDash val="solid"/>
                       <a:round/>
@@ -10981,7 +11017,7 @@
                       <a:r>
                         <a:rPr sz="1600" b="1">
                           <a:solidFill>
-                            <a:srgbClr val="1E1B3A"/>
+                            <a:srgbClr val="202124"/>
                           </a:solidFill>
                           <a:latin typeface="Calibri"/>
                         </a:rPr>
@@ -10992,7 +11028,7 @@
                   <a:tcPr anchor="ctr">
                     <a:lnL w="12700" cap="flat" cmpd="sng" algn="ctr">
                       <a:solidFill>
-                        <a:srgbClr val="D5D5E5"/>
+                        <a:srgbClr val="D9D9D5"/>
                       </a:solidFill>
                       <a:prstDash val="solid"/>
                       <a:round/>
@@ -11001,7 +11037,7 @@
                     </a:lnL>
                     <a:lnR w="12700" cap="flat" cmpd="sng" algn="ctr">
                       <a:solidFill>
-                        <a:srgbClr val="D5D5E5"/>
+                        <a:srgbClr val="D9D9D5"/>
                       </a:solidFill>
                       <a:prstDash val="solid"/>
                       <a:round/>
@@ -11010,7 +11046,7 @@
                     </a:lnR>
                     <a:lnT w="12700" cap="flat" cmpd="sng" algn="ctr">
                       <a:solidFill>
-                        <a:srgbClr val="D5D5E5"/>
+                        <a:srgbClr val="D9D9D5"/>
                       </a:solidFill>
                       <a:prstDash val="solid"/>
                       <a:round/>
@@ -11019,7 +11055,7 @@
                     </a:lnT>
                     <a:lnB w="12700" cap="flat" cmpd="sng" algn="ctr">
                       <a:solidFill>
-                        <a:srgbClr val="D5D5E5"/>
+                        <a:srgbClr val="D9D9D5"/>
                       </a:solidFill>
                       <a:prstDash val="solid"/>
                       <a:round/>
@@ -11027,7 +11063,7 @@
                       <a:tailEnd type="none" w="med" len="med"/>
                     </a:lnB>
                     <a:solidFill>
-                      <a:srgbClr val="ECECF7"/>
+                      <a:srgbClr val="F2F2EF"/>
                     </a:solidFill>
                   </a:tcPr>
                 </a:tc>
@@ -11040,7 +11076,7 @@
                       <a:r>
                         <a:rPr sz="1600" b="0">
                           <a:solidFill>
-                            <a:srgbClr val="1E1B3A"/>
+                            <a:srgbClr val="202124"/>
                           </a:solidFill>
                           <a:latin typeface="Calibri"/>
                         </a:rPr>
@@ -11051,7 +11087,7 @@
                   <a:tcPr anchor="ctr">
                     <a:lnL w="12700" cap="flat" cmpd="sng" algn="ctr">
                       <a:solidFill>
-                        <a:srgbClr val="D5D5E5"/>
+                        <a:srgbClr val="D9D9D5"/>
                       </a:solidFill>
                       <a:prstDash val="solid"/>
                       <a:round/>
@@ -11060,7 +11096,7 @@
                     </a:lnL>
                     <a:lnR w="12700" cap="flat" cmpd="sng" algn="ctr">
                       <a:solidFill>
-                        <a:srgbClr val="D5D5E5"/>
+                        <a:srgbClr val="D9D9D5"/>
                       </a:solidFill>
                       <a:prstDash val="solid"/>
                       <a:round/>
@@ -11069,7 +11105,7 @@
                     </a:lnR>
                     <a:lnT w="12700" cap="flat" cmpd="sng" algn="ctr">
                       <a:solidFill>
-                        <a:srgbClr val="D5D5E5"/>
+                        <a:srgbClr val="D9D9D5"/>
                       </a:solidFill>
                       <a:prstDash val="solid"/>
                       <a:round/>
@@ -11078,7 +11114,7 @@
                     </a:lnT>
                     <a:lnB w="12700" cap="flat" cmpd="sng" algn="ctr">
                       <a:solidFill>
-                        <a:srgbClr val="D5D5E5"/>
+                        <a:srgbClr val="D9D9D5"/>
                       </a:solidFill>
                       <a:prstDash val="solid"/>
                       <a:round/>
@@ -11086,7 +11122,7 @@
                       <a:tailEnd type="none" w="med" len="med"/>
                     </a:lnB>
                     <a:solidFill>
-                      <a:srgbClr val="ECECF7"/>
+                      <a:srgbClr val="F2F2EF"/>
                     </a:solidFill>
                   </a:tcPr>
                 </a:tc>
@@ -11101,7 +11137,7 @@
                       <a:r>
                         <a:rPr sz="1600" b="1">
                           <a:solidFill>
-                            <a:srgbClr val="1E1B3A"/>
+                            <a:srgbClr val="202124"/>
                           </a:solidFill>
                           <a:latin typeface="Calibri"/>
                         </a:rPr>
@@ -11112,7 +11148,7 @@
                   <a:tcPr anchor="ctr">
                     <a:lnL w="12700" cap="flat" cmpd="sng" algn="ctr">
                       <a:solidFill>
-                        <a:srgbClr val="D5D5E5"/>
+                        <a:srgbClr val="D9D9D5"/>
                       </a:solidFill>
                       <a:prstDash val="solid"/>
                       <a:round/>
@@ -11121,7 +11157,7 @@
                     </a:lnL>
                     <a:lnR w="12700" cap="flat" cmpd="sng" algn="ctr">
                       <a:solidFill>
-                        <a:srgbClr val="D5D5E5"/>
+                        <a:srgbClr val="D9D9D5"/>
                       </a:solidFill>
                       <a:prstDash val="solid"/>
                       <a:round/>
@@ -11130,7 +11166,7 @@
                     </a:lnR>
                     <a:lnT w="12700" cap="flat" cmpd="sng" algn="ctr">
                       <a:solidFill>
-                        <a:srgbClr val="D5D5E5"/>
+                        <a:srgbClr val="D9D9D5"/>
                       </a:solidFill>
                       <a:prstDash val="solid"/>
                       <a:round/>
@@ -11139,7 +11175,7 @@
                     </a:lnT>
                     <a:lnB w="12700" cap="flat" cmpd="sng" algn="ctr">
                       <a:solidFill>
-                        <a:srgbClr val="D5D5E5"/>
+                        <a:srgbClr val="D9D9D5"/>
                       </a:solidFill>
                       <a:prstDash val="solid"/>
                       <a:round/>
@@ -11158,7 +11194,7 @@
                       <a:r>
                         <a:rPr sz="1600" b="0">
                           <a:solidFill>
-                            <a:srgbClr val="1E1B3A"/>
+                            <a:srgbClr val="202124"/>
                           </a:solidFill>
                           <a:latin typeface="Calibri"/>
                         </a:rPr>
@@ -11169,7 +11205,7 @@
                   <a:tcPr anchor="ctr">
                     <a:lnL w="12700" cap="flat" cmpd="sng" algn="ctr">
                       <a:solidFill>
-                        <a:srgbClr val="D5D5E5"/>
+                        <a:srgbClr val="D9D9D5"/>
                       </a:solidFill>
                       <a:prstDash val="solid"/>
                       <a:round/>
@@ -11178,7 +11214,7 @@
                     </a:lnL>
                     <a:lnR w="12700" cap="flat" cmpd="sng" algn="ctr">
                       <a:solidFill>
-                        <a:srgbClr val="D5D5E5"/>
+                        <a:srgbClr val="D9D9D5"/>
                       </a:solidFill>
                       <a:prstDash val="solid"/>
                       <a:round/>
@@ -11187,7 +11223,7 @@
                     </a:lnR>
                     <a:lnT w="12700" cap="flat" cmpd="sng" algn="ctr">
                       <a:solidFill>
-                        <a:srgbClr val="D5D5E5"/>
+                        <a:srgbClr val="D9D9D5"/>
                       </a:solidFill>
                       <a:prstDash val="solid"/>
                       <a:round/>
@@ -11196,7 +11232,7 @@
                     </a:lnT>
                     <a:lnB w="12700" cap="flat" cmpd="sng" algn="ctr">
                       <a:solidFill>
-                        <a:srgbClr val="D5D5E5"/>
+                        <a:srgbClr val="D9D9D5"/>
                       </a:solidFill>
                       <a:prstDash val="solid"/>
                       <a:round/>
@@ -11217,7 +11253,7 @@
                       <a:r>
                         <a:rPr sz="1600" b="1">
                           <a:solidFill>
-                            <a:srgbClr val="1E1B3A"/>
+                            <a:srgbClr val="202124"/>
                           </a:solidFill>
                           <a:latin typeface="Calibri"/>
                         </a:rPr>
@@ -11228,7 +11264,7 @@
                   <a:tcPr anchor="ctr">
                     <a:lnL w="12700" cap="flat" cmpd="sng" algn="ctr">
                       <a:solidFill>
-                        <a:srgbClr val="D5D5E5"/>
+                        <a:srgbClr val="D9D9D5"/>
                       </a:solidFill>
                       <a:prstDash val="solid"/>
                       <a:round/>
@@ -11237,7 +11273,7 @@
                     </a:lnL>
                     <a:lnR w="12700" cap="flat" cmpd="sng" algn="ctr">
                       <a:solidFill>
-                        <a:srgbClr val="D5D5E5"/>
+                        <a:srgbClr val="D9D9D5"/>
                       </a:solidFill>
                       <a:prstDash val="solid"/>
                       <a:round/>
@@ -11246,7 +11282,7 @@
                     </a:lnR>
                     <a:lnT w="12700" cap="flat" cmpd="sng" algn="ctr">
                       <a:solidFill>
-                        <a:srgbClr val="D5D5E5"/>
+                        <a:srgbClr val="D9D9D5"/>
                       </a:solidFill>
                       <a:prstDash val="solid"/>
                       <a:round/>
@@ -11255,7 +11291,7 @@
                     </a:lnT>
                     <a:lnB w="12700" cap="flat" cmpd="sng" algn="ctr">
                       <a:solidFill>
-                        <a:srgbClr val="D5D5E5"/>
+                        <a:srgbClr val="D9D9D5"/>
                       </a:solidFill>
                       <a:prstDash val="solid"/>
                       <a:round/>
@@ -11263,7 +11299,7 @@
                       <a:tailEnd type="none" w="med" len="med"/>
                     </a:lnB>
                     <a:solidFill>
-                      <a:srgbClr val="ECECF7"/>
+                      <a:srgbClr val="F2F2EF"/>
                     </a:solidFill>
                   </a:tcPr>
                 </a:tc>
@@ -11276,7 +11312,7 @@
                       <a:r>
                         <a:rPr sz="1600" b="0">
                           <a:solidFill>
-                            <a:srgbClr val="1E1B3A"/>
+                            <a:srgbClr val="202124"/>
                           </a:solidFill>
                           <a:latin typeface="Calibri"/>
                         </a:rPr>
@@ -11287,7 +11323,7 @@
                   <a:tcPr anchor="ctr">
                     <a:lnL w="12700" cap="flat" cmpd="sng" algn="ctr">
                       <a:solidFill>
-                        <a:srgbClr val="D5D5E5"/>
+                        <a:srgbClr val="D9D9D5"/>
                       </a:solidFill>
                       <a:prstDash val="solid"/>
                       <a:round/>
@@ -11296,7 +11332,7 @@
                     </a:lnL>
                     <a:lnR w="12700" cap="flat" cmpd="sng" algn="ctr">
                       <a:solidFill>
-                        <a:srgbClr val="D5D5E5"/>
+                        <a:srgbClr val="D9D9D5"/>
                       </a:solidFill>
                       <a:prstDash val="solid"/>
                       <a:round/>
@@ -11305,7 +11341,7 @@
                     </a:lnR>
                     <a:lnT w="12700" cap="flat" cmpd="sng" algn="ctr">
                       <a:solidFill>
-                        <a:srgbClr val="D5D5E5"/>
+                        <a:srgbClr val="D9D9D5"/>
                       </a:solidFill>
                       <a:prstDash val="solid"/>
                       <a:round/>
@@ -11314,7 +11350,7 @@
                     </a:lnT>
                     <a:lnB w="12700" cap="flat" cmpd="sng" algn="ctr">
                       <a:solidFill>
-                        <a:srgbClr val="D5D5E5"/>
+                        <a:srgbClr val="D9D9D5"/>
                       </a:solidFill>
                       <a:prstDash val="solid"/>
                       <a:round/>
@@ -11322,7 +11358,7 @@
                       <a:tailEnd type="none" w="med" len="med"/>
                     </a:lnB>
                     <a:solidFill>
-                      <a:srgbClr val="ECECF7"/>
+                      <a:srgbClr val="F2F2EF"/>
                     </a:solidFill>
                   </a:tcPr>
                 </a:tc>
@@ -11347,7 +11383,7 @@
           </a:prstGeom>
           <a:ln w="50800">
             <a:solidFill>
-              <a:srgbClr val="E8604C"/>
+              <a:srgbClr val="F2A900"/>
             </a:solidFill>
           </a:ln>
         </p:spPr>
@@ -11392,7 +11428,7 @@
             <a:r>
               <a:rPr sz="1600" b="0">
                 <a:solidFill>
-                  <a:srgbClr val="56566E"/>
+                  <a:srgbClr val="57575A"/>
                 </a:solidFill>
                 <a:latin typeface="Calibri"/>
               </a:rPr>
@@ -11426,7 +11462,7 @@
             <a:r>
               <a:rPr sz="1000" b="0">
                 <a:solidFill>
-                  <a:srgbClr val="56566E"/>
+                  <a:srgbClr val="57575A"/>
                 </a:solidFill>
                 <a:latin typeface="Calibri"/>
               </a:rPr>
@@ -11461,7 +11497,7 @@
             <a:r>
               <a:rPr sz="1000" b="0">
                 <a:solidFill>
-                  <a:srgbClr val="56566E"/>
+                  <a:srgbClr val="57575A"/>
                 </a:solidFill>
                 <a:latin typeface="Calibri"/>
               </a:rPr>
@@ -11475,9 +11511,18 @@
   <p:clrMapOvr>
     <a:masterClrMapping/>
   </p:clrMapOvr>
-  <p:transition spd="med" advTm="30000">
-    <p:push dir="u"/>
-  </p:transition>
+  <mc:AlternateContent xmlns:mc="http://schemas.openxmlformats.org/markup-compatibility/2006">
+    <mc:Choice xmlns:p14="http://schemas.microsoft.com/office/powerpoint/2010/main" Requires="p14">
+      <p:transition spd="slow" p14:dur="1500" advTm="10000">
+        <p:push dir="u"/>
+      </p:transition>
+    </mc:Choice>
+    <mc:Fallback>
+      <p:transition spd="slow" advTm="10000">
+        <p:push dir="u"/>
+      </p:transition>
+    </mc:Fallback>
+  </mc:AlternateContent>
   <p:timing>
     <p:tnLst>
       <p:par>
@@ -11700,7 +11745,7 @@
     <p:bg>
       <p:bgPr>
         <a:solidFill>
-          <a:srgbClr val="F4F4FA"/>
+          <a:srgbClr val="F5F5F3"/>
         </a:solidFill>
         <a:effectLst/>
       </p:bgPr>
@@ -11727,7 +11772,7 @@
             <a:avLst/>
           </a:prstGeom>
           <a:solidFill>
-            <a:srgbClr val="312E81"/>
+            <a:srgbClr val="202124"/>
           </a:solidFill>
           <a:ln>
             <a:noFill/>
@@ -11833,7 +11878,7 @@
                   <a:tcPr anchor="ctr">
                     <a:lnL w="12700" cap="flat" cmpd="sng" algn="ctr">
                       <a:solidFill>
-                        <a:srgbClr val="D5D5E5"/>
+                        <a:srgbClr val="D9D9D5"/>
                       </a:solidFill>
                       <a:prstDash val="solid"/>
                       <a:round/>
@@ -11842,7 +11887,7 @@
                     </a:lnL>
                     <a:lnR w="12700" cap="flat" cmpd="sng" algn="ctr">
                       <a:solidFill>
-                        <a:srgbClr val="D5D5E5"/>
+                        <a:srgbClr val="D9D9D5"/>
                       </a:solidFill>
                       <a:prstDash val="solid"/>
                       <a:round/>
@@ -11851,7 +11896,7 @@
                     </a:lnR>
                     <a:lnT w="12700" cap="flat" cmpd="sng" algn="ctr">
                       <a:solidFill>
-                        <a:srgbClr val="D5D5E5"/>
+                        <a:srgbClr val="D9D9D5"/>
                       </a:solidFill>
                       <a:prstDash val="solid"/>
                       <a:round/>
@@ -11860,7 +11905,7 @@
                     </a:lnT>
                     <a:lnB w="12700" cap="flat" cmpd="sng" algn="ctr">
                       <a:solidFill>
-                        <a:srgbClr val="D5D5E5"/>
+                        <a:srgbClr val="D9D9D5"/>
                       </a:solidFill>
                       <a:prstDash val="solid"/>
                       <a:round/>
@@ -11868,7 +11913,7 @@
                       <a:tailEnd type="none" w="med" len="med"/>
                     </a:lnB>
                     <a:solidFill>
-                      <a:srgbClr val="312E81"/>
+                      <a:srgbClr val="202124"/>
                     </a:solidFill>
                   </a:tcPr>
                 </a:tc>
@@ -11892,7 +11937,7 @@
                   <a:tcPr anchor="ctr">
                     <a:lnL w="12700" cap="flat" cmpd="sng" algn="ctr">
                       <a:solidFill>
-                        <a:srgbClr val="D5D5E5"/>
+                        <a:srgbClr val="D9D9D5"/>
                       </a:solidFill>
                       <a:prstDash val="solid"/>
                       <a:round/>
@@ -11901,7 +11946,7 @@
                     </a:lnL>
                     <a:lnR w="12700" cap="flat" cmpd="sng" algn="ctr">
                       <a:solidFill>
-                        <a:srgbClr val="D5D5E5"/>
+                        <a:srgbClr val="D9D9D5"/>
                       </a:solidFill>
                       <a:prstDash val="solid"/>
                       <a:round/>
@@ -11910,7 +11955,7 @@
                     </a:lnR>
                     <a:lnT w="12700" cap="flat" cmpd="sng" algn="ctr">
                       <a:solidFill>
-                        <a:srgbClr val="D5D5E5"/>
+                        <a:srgbClr val="D9D9D5"/>
                       </a:solidFill>
                       <a:prstDash val="solid"/>
                       <a:round/>
@@ -11919,7 +11964,7 @@
                     </a:lnT>
                     <a:lnB w="12700" cap="flat" cmpd="sng" algn="ctr">
                       <a:solidFill>
-                        <a:srgbClr val="D5D5E5"/>
+                        <a:srgbClr val="D9D9D5"/>
                       </a:solidFill>
                       <a:prstDash val="solid"/>
                       <a:round/>
@@ -11927,7 +11972,7 @@
                       <a:tailEnd type="none" w="med" len="med"/>
                     </a:lnB>
                     <a:solidFill>
-                      <a:srgbClr val="312E81"/>
+                      <a:srgbClr val="202124"/>
                     </a:solidFill>
                   </a:tcPr>
                 </a:tc>
@@ -11942,7 +11987,7 @@
                       <a:r>
                         <a:rPr sz="1800" b="1">
                           <a:solidFill>
-                            <a:srgbClr val="1E1B3A"/>
+                            <a:srgbClr val="202124"/>
                           </a:solidFill>
                           <a:latin typeface="Calibri"/>
                         </a:rPr>
@@ -11953,7 +11998,7 @@
                   <a:tcPr anchor="ctr">
                     <a:lnL w="12700" cap="flat" cmpd="sng" algn="ctr">
                       <a:solidFill>
-                        <a:srgbClr val="D5D5E5"/>
+                        <a:srgbClr val="D9D9D5"/>
                       </a:solidFill>
                       <a:prstDash val="solid"/>
                       <a:round/>
@@ -11962,7 +12007,7 @@
                     </a:lnL>
                     <a:lnR w="12700" cap="flat" cmpd="sng" algn="ctr">
                       <a:solidFill>
-                        <a:srgbClr val="D5D5E5"/>
+                        <a:srgbClr val="D9D9D5"/>
                       </a:solidFill>
                       <a:prstDash val="solid"/>
                       <a:round/>
@@ -11971,7 +12016,7 @@
                     </a:lnR>
                     <a:lnT w="12700" cap="flat" cmpd="sng" algn="ctr">
                       <a:solidFill>
-                        <a:srgbClr val="D5D5E5"/>
+                        <a:srgbClr val="D9D9D5"/>
                       </a:solidFill>
                       <a:prstDash val="solid"/>
                       <a:round/>
@@ -11980,7 +12025,7 @@
                     </a:lnT>
                     <a:lnB w="12700" cap="flat" cmpd="sng" algn="ctr">
                       <a:solidFill>
-                        <a:srgbClr val="D5D5E5"/>
+                        <a:srgbClr val="D9D9D5"/>
                       </a:solidFill>
                       <a:prstDash val="solid"/>
                       <a:round/>
@@ -11999,7 +12044,7 @@
                       <a:r>
                         <a:rPr sz="1800" b="0">
                           <a:solidFill>
-                            <a:srgbClr val="1E1B3A"/>
+                            <a:srgbClr val="202124"/>
                           </a:solidFill>
                           <a:latin typeface="Calibri"/>
                         </a:rPr>
@@ -12010,7 +12055,7 @@
                   <a:tcPr anchor="ctr">
                     <a:lnL w="12700" cap="flat" cmpd="sng" algn="ctr">
                       <a:solidFill>
-                        <a:srgbClr val="D5D5E5"/>
+                        <a:srgbClr val="D9D9D5"/>
                       </a:solidFill>
                       <a:prstDash val="solid"/>
                       <a:round/>
@@ -12019,7 +12064,7 @@
                     </a:lnL>
                     <a:lnR w="12700" cap="flat" cmpd="sng" algn="ctr">
                       <a:solidFill>
-                        <a:srgbClr val="D5D5E5"/>
+                        <a:srgbClr val="D9D9D5"/>
                       </a:solidFill>
                       <a:prstDash val="solid"/>
                       <a:round/>
@@ -12028,7 +12073,7 @@
                     </a:lnR>
                     <a:lnT w="12700" cap="flat" cmpd="sng" algn="ctr">
                       <a:solidFill>
-                        <a:srgbClr val="D5D5E5"/>
+                        <a:srgbClr val="D9D9D5"/>
                       </a:solidFill>
                       <a:prstDash val="solid"/>
                       <a:round/>
@@ -12037,7 +12082,7 @@
                     </a:lnT>
                     <a:lnB w="12700" cap="flat" cmpd="sng" algn="ctr">
                       <a:solidFill>
-                        <a:srgbClr val="D5D5E5"/>
+                        <a:srgbClr val="D9D9D5"/>
                       </a:solidFill>
                       <a:prstDash val="solid"/>
                       <a:round/>
@@ -12058,7 +12103,7 @@
                       <a:r>
                         <a:rPr sz="1800" b="1">
                           <a:solidFill>
-                            <a:srgbClr val="1E1B3A"/>
+                            <a:srgbClr val="202124"/>
                           </a:solidFill>
                           <a:latin typeface="Calibri"/>
                         </a:rPr>
@@ -12069,7 +12114,7 @@
                   <a:tcPr anchor="ctr">
                     <a:lnL w="12700" cap="flat" cmpd="sng" algn="ctr">
                       <a:solidFill>
-                        <a:srgbClr val="D5D5E5"/>
+                        <a:srgbClr val="D9D9D5"/>
                       </a:solidFill>
                       <a:prstDash val="solid"/>
                       <a:round/>
@@ -12078,7 +12123,7 @@
                     </a:lnL>
                     <a:lnR w="12700" cap="flat" cmpd="sng" algn="ctr">
                       <a:solidFill>
-                        <a:srgbClr val="D5D5E5"/>
+                        <a:srgbClr val="D9D9D5"/>
                       </a:solidFill>
                       <a:prstDash val="solid"/>
                       <a:round/>
@@ -12087,7 +12132,7 @@
                     </a:lnR>
                     <a:lnT w="12700" cap="flat" cmpd="sng" algn="ctr">
                       <a:solidFill>
-                        <a:srgbClr val="D5D5E5"/>
+                        <a:srgbClr val="D9D9D5"/>
                       </a:solidFill>
                       <a:prstDash val="solid"/>
                       <a:round/>
@@ -12096,7 +12141,7 @@
                     </a:lnT>
                     <a:lnB w="12700" cap="flat" cmpd="sng" algn="ctr">
                       <a:solidFill>
-                        <a:srgbClr val="D5D5E5"/>
+                        <a:srgbClr val="D9D9D5"/>
                       </a:solidFill>
                       <a:prstDash val="solid"/>
                       <a:round/>
@@ -12104,7 +12149,7 @@
                       <a:tailEnd type="none" w="med" len="med"/>
                     </a:lnB>
                     <a:solidFill>
-                      <a:srgbClr val="ECECF7"/>
+                      <a:srgbClr val="F2F2EF"/>
                     </a:solidFill>
                   </a:tcPr>
                 </a:tc>
@@ -12117,7 +12162,7 @@
                       <a:r>
                         <a:rPr sz="1800" b="0">
                           <a:solidFill>
-                            <a:srgbClr val="1E1B3A"/>
+                            <a:srgbClr val="202124"/>
                           </a:solidFill>
                           <a:latin typeface="Calibri"/>
                         </a:rPr>
@@ -12128,7 +12173,7 @@
                   <a:tcPr anchor="ctr">
                     <a:lnL w="12700" cap="flat" cmpd="sng" algn="ctr">
                       <a:solidFill>
-                        <a:srgbClr val="D5D5E5"/>
+                        <a:srgbClr val="D9D9D5"/>
                       </a:solidFill>
                       <a:prstDash val="solid"/>
                       <a:round/>
@@ -12137,7 +12182,7 @@
                     </a:lnL>
                     <a:lnR w="12700" cap="flat" cmpd="sng" algn="ctr">
                       <a:solidFill>
-                        <a:srgbClr val="D5D5E5"/>
+                        <a:srgbClr val="D9D9D5"/>
                       </a:solidFill>
                       <a:prstDash val="solid"/>
                       <a:round/>
@@ -12146,7 +12191,7 @@
                     </a:lnR>
                     <a:lnT w="12700" cap="flat" cmpd="sng" algn="ctr">
                       <a:solidFill>
-                        <a:srgbClr val="D5D5E5"/>
+                        <a:srgbClr val="D9D9D5"/>
                       </a:solidFill>
                       <a:prstDash val="solid"/>
                       <a:round/>
@@ -12155,7 +12200,7 @@
                     </a:lnT>
                     <a:lnB w="12700" cap="flat" cmpd="sng" algn="ctr">
                       <a:solidFill>
-                        <a:srgbClr val="D5D5E5"/>
+                        <a:srgbClr val="D9D9D5"/>
                       </a:solidFill>
                       <a:prstDash val="solid"/>
                       <a:round/>
@@ -12163,7 +12208,7 @@
                       <a:tailEnd type="none" w="med" len="med"/>
                     </a:lnB>
                     <a:solidFill>
-                      <a:srgbClr val="ECECF7"/>
+                      <a:srgbClr val="F2F2EF"/>
                     </a:solidFill>
                   </a:tcPr>
                 </a:tc>
@@ -12178,7 +12223,7 @@
                       <a:r>
                         <a:rPr sz="1800" b="1">
                           <a:solidFill>
-                            <a:srgbClr val="1E1B3A"/>
+                            <a:srgbClr val="202124"/>
                           </a:solidFill>
                           <a:latin typeface="Calibri"/>
                         </a:rPr>
@@ -12189,7 +12234,7 @@
                   <a:tcPr anchor="ctr">
                     <a:lnL w="12700" cap="flat" cmpd="sng" algn="ctr">
                       <a:solidFill>
-                        <a:srgbClr val="D5D5E5"/>
+                        <a:srgbClr val="D9D9D5"/>
                       </a:solidFill>
                       <a:prstDash val="solid"/>
                       <a:round/>
@@ -12198,7 +12243,7 @@
                     </a:lnL>
                     <a:lnR w="12700" cap="flat" cmpd="sng" algn="ctr">
                       <a:solidFill>
-                        <a:srgbClr val="D5D5E5"/>
+                        <a:srgbClr val="D9D9D5"/>
                       </a:solidFill>
                       <a:prstDash val="solid"/>
                       <a:round/>
@@ -12207,7 +12252,7 @@
                     </a:lnR>
                     <a:lnT w="12700" cap="flat" cmpd="sng" algn="ctr">
                       <a:solidFill>
-                        <a:srgbClr val="D5D5E5"/>
+                        <a:srgbClr val="D9D9D5"/>
                       </a:solidFill>
                       <a:prstDash val="solid"/>
                       <a:round/>
@@ -12216,7 +12261,7 @@
                     </a:lnT>
                     <a:lnB w="12700" cap="flat" cmpd="sng" algn="ctr">
                       <a:solidFill>
-                        <a:srgbClr val="D5D5E5"/>
+                        <a:srgbClr val="D9D9D5"/>
                       </a:solidFill>
                       <a:prstDash val="solid"/>
                       <a:round/>
@@ -12235,7 +12280,7 @@
                       <a:r>
                         <a:rPr sz="1800" b="0">
                           <a:solidFill>
-                            <a:srgbClr val="1E1B3A"/>
+                            <a:srgbClr val="202124"/>
                           </a:solidFill>
                           <a:latin typeface="Calibri"/>
                         </a:rPr>
@@ -12246,7 +12291,7 @@
                   <a:tcPr anchor="ctr">
                     <a:lnL w="12700" cap="flat" cmpd="sng" algn="ctr">
                       <a:solidFill>
-                        <a:srgbClr val="D5D5E5"/>
+                        <a:srgbClr val="D9D9D5"/>
                       </a:solidFill>
                       <a:prstDash val="solid"/>
                       <a:round/>
@@ -12255,7 +12300,7 @@
                     </a:lnL>
                     <a:lnR w="12700" cap="flat" cmpd="sng" algn="ctr">
                       <a:solidFill>
-                        <a:srgbClr val="D5D5E5"/>
+                        <a:srgbClr val="D9D9D5"/>
                       </a:solidFill>
                       <a:prstDash val="solid"/>
                       <a:round/>
@@ -12264,7 +12309,7 @@
                     </a:lnR>
                     <a:lnT w="12700" cap="flat" cmpd="sng" algn="ctr">
                       <a:solidFill>
-                        <a:srgbClr val="D5D5E5"/>
+                        <a:srgbClr val="D9D9D5"/>
                       </a:solidFill>
                       <a:prstDash val="solid"/>
                       <a:round/>
@@ -12273,7 +12318,7 @@
                     </a:lnT>
                     <a:lnB w="12700" cap="flat" cmpd="sng" algn="ctr">
                       <a:solidFill>
-                        <a:srgbClr val="D5D5E5"/>
+                        <a:srgbClr val="D9D9D5"/>
                       </a:solidFill>
                       <a:prstDash val="solid"/>
                       <a:round/>
@@ -12294,7 +12339,7 @@
                       <a:r>
                         <a:rPr sz="1800" b="1">
                           <a:solidFill>
-                            <a:srgbClr val="1E1B3A"/>
+                            <a:srgbClr val="202124"/>
                           </a:solidFill>
                           <a:latin typeface="Calibri"/>
                         </a:rPr>
@@ -12305,7 +12350,7 @@
                   <a:tcPr anchor="ctr">
                     <a:lnL w="12700" cap="flat" cmpd="sng" algn="ctr">
                       <a:solidFill>
-                        <a:srgbClr val="D5D5E5"/>
+                        <a:srgbClr val="D9D9D5"/>
                       </a:solidFill>
                       <a:prstDash val="solid"/>
                       <a:round/>
@@ -12314,7 +12359,7 @@
                     </a:lnL>
                     <a:lnR w="12700" cap="flat" cmpd="sng" algn="ctr">
                       <a:solidFill>
-                        <a:srgbClr val="D5D5E5"/>
+                        <a:srgbClr val="D9D9D5"/>
                       </a:solidFill>
                       <a:prstDash val="solid"/>
                       <a:round/>
@@ -12323,7 +12368,7 @@
                     </a:lnR>
                     <a:lnT w="12700" cap="flat" cmpd="sng" algn="ctr">
                       <a:solidFill>
-                        <a:srgbClr val="D5D5E5"/>
+                        <a:srgbClr val="D9D9D5"/>
                       </a:solidFill>
                       <a:prstDash val="solid"/>
                       <a:round/>
@@ -12332,7 +12377,7 @@
                     </a:lnT>
                     <a:lnB w="12700" cap="flat" cmpd="sng" algn="ctr">
                       <a:solidFill>
-                        <a:srgbClr val="D5D5E5"/>
+                        <a:srgbClr val="D9D9D5"/>
                       </a:solidFill>
                       <a:prstDash val="solid"/>
                       <a:round/>
@@ -12340,7 +12385,7 @@
                       <a:tailEnd type="none" w="med" len="med"/>
                     </a:lnB>
                     <a:solidFill>
-                      <a:srgbClr val="ECECF7"/>
+                      <a:srgbClr val="F2F2EF"/>
                     </a:solidFill>
                   </a:tcPr>
                 </a:tc>
@@ -12353,7 +12398,7 @@
                       <a:r>
                         <a:rPr sz="1800" b="0">
                           <a:solidFill>
-                            <a:srgbClr val="1E1B3A"/>
+                            <a:srgbClr val="202124"/>
                           </a:solidFill>
                           <a:latin typeface="Calibri"/>
                         </a:rPr>
@@ -12364,7 +12409,7 @@
                   <a:tcPr anchor="ctr">
                     <a:lnL w="12700" cap="flat" cmpd="sng" algn="ctr">
                       <a:solidFill>
-                        <a:srgbClr val="D5D5E5"/>
+                        <a:srgbClr val="D9D9D5"/>
                       </a:solidFill>
                       <a:prstDash val="solid"/>
                       <a:round/>
@@ -12373,7 +12418,7 @@
                     </a:lnL>
                     <a:lnR w="12700" cap="flat" cmpd="sng" algn="ctr">
                       <a:solidFill>
-                        <a:srgbClr val="D5D5E5"/>
+                        <a:srgbClr val="D9D9D5"/>
                       </a:solidFill>
                       <a:prstDash val="solid"/>
                       <a:round/>
@@ -12382,7 +12427,7 @@
                     </a:lnR>
                     <a:lnT w="12700" cap="flat" cmpd="sng" algn="ctr">
                       <a:solidFill>
-                        <a:srgbClr val="D5D5E5"/>
+                        <a:srgbClr val="D9D9D5"/>
                       </a:solidFill>
                       <a:prstDash val="solid"/>
                       <a:round/>
@@ -12391,7 +12436,7 @@
                     </a:lnT>
                     <a:lnB w="12700" cap="flat" cmpd="sng" algn="ctr">
                       <a:solidFill>
-                        <a:srgbClr val="D5D5E5"/>
+                        <a:srgbClr val="D9D9D5"/>
                       </a:solidFill>
                       <a:prstDash val="solid"/>
                       <a:round/>
@@ -12399,7 +12444,7 @@
                       <a:tailEnd type="none" w="med" len="med"/>
                     </a:lnB>
                     <a:solidFill>
-                      <a:srgbClr val="ECECF7"/>
+                      <a:srgbClr val="F2F2EF"/>
                     </a:solidFill>
                   </a:tcPr>
                 </a:tc>
@@ -12424,7 +12469,7 @@
           </a:prstGeom>
           <a:ln w="50800">
             <a:solidFill>
-              <a:srgbClr val="E8604C"/>
+              <a:srgbClr val="F2A900"/>
             </a:solidFill>
           </a:ln>
         </p:spPr>
@@ -12469,7 +12514,7 @@
             <a:r>
               <a:rPr sz="1600" b="0">
                 <a:solidFill>
-                  <a:srgbClr val="56566E"/>
+                  <a:srgbClr val="57575A"/>
                 </a:solidFill>
                 <a:latin typeface="Calibri"/>
               </a:rPr>
@@ -12503,7 +12548,7 @@
             <a:r>
               <a:rPr sz="1000" b="0">
                 <a:solidFill>
-                  <a:srgbClr val="56566E"/>
+                  <a:srgbClr val="57575A"/>
                 </a:solidFill>
                 <a:latin typeface="Calibri"/>
               </a:rPr>
@@ -12538,7 +12583,7 @@
             <a:r>
               <a:rPr sz="1000" b="0">
                 <a:solidFill>
-                  <a:srgbClr val="56566E"/>
+                  <a:srgbClr val="57575A"/>
                 </a:solidFill>
                 <a:latin typeface="Calibri"/>
               </a:rPr>
@@ -12572,7 +12617,7 @@
             <a:r>
               <a:rPr sz="1400" b="0">
                 <a:solidFill>
-                  <a:srgbClr val="56566E"/>
+                  <a:srgbClr val="57575A"/>
                 </a:solidFill>
                 <a:latin typeface="Calibri"/>
               </a:rPr>
@@ -12586,9 +12631,18 @@
   <p:clrMapOvr>
     <a:masterClrMapping/>
   </p:clrMapOvr>
-  <p:transition spd="med" advTm="30000">
-    <p:push dir="u"/>
-  </p:transition>
+  <mc:AlternateContent xmlns:mc="http://schemas.openxmlformats.org/markup-compatibility/2006">
+    <mc:Choice xmlns:p14="http://schemas.microsoft.com/office/powerpoint/2010/main" Requires="p14">
+      <p:transition spd="slow" p14:dur="1500" advTm="10000">
+        <p:push dir="u"/>
+      </p:transition>
+    </mc:Choice>
+    <mc:Fallback>
+      <p:transition spd="slow" advTm="10000">
+        <p:push dir="u"/>
+      </p:transition>
+    </mc:Fallback>
+  </mc:AlternateContent>
   <p:timing>
     <p:tnLst>
       <p:par>
@@ -12856,7 +12910,7 @@
     <p:bg>
       <p:bgPr>
         <a:solidFill>
-          <a:srgbClr val="F4F4FA"/>
+          <a:srgbClr val="F5F5F3"/>
         </a:solidFill>
         <a:effectLst/>
       </p:bgPr>
@@ -12883,7 +12937,7 @@
             <a:avLst/>
           </a:prstGeom>
           <a:solidFill>
-            <a:srgbClr val="312E81"/>
+            <a:srgbClr val="202124"/>
           </a:solidFill>
           <a:ln>
             <a:noFill/>
@@ -13002,7 +13056,7 @@
             <a:avLst/>
           </a:prstGeom>
           <a:solidFill>
-            <a:srgbClr val="E8604C"/>
+            <a:srgbClr val="F2A900"/>
           </a:solidFill>
           <a:ln>
             <a:noFill/>
@@ -13055,13 +13109,13 @@
                 <a:spcPts val="1000"/>
               </a:spcAft>
               <a:buClr>
-                <a:srgbClr val="E8604C"/>
+                <a:srgbClr val="F2A900"/>
               </a:buClr>
             </a:pPr>
             <a:r>
               <a:rPr sz="2000" b="1">
                 <a:solidFill>
-                  <a:srgbClr val="312E81"/>
+                  <a:srgbClr val="8A6100"/>
                 </a:solidFill>
                 <a:latin typeface="Calibri"/>
               </a:rPr>
@@ -13070,7 +13124,7 @@
             <a:r>
               <a:rPr sz="2000" b="0">
                 <a:solidFill>
-                  <a:srgbClr val="1E1B3A"/>
+                  <a:srgbClr val="202124"/>
                 </a:solidFill>
                 <a:latin typeface="Calibri"/>
               </a:rPr>
@@ -13083,13 +13137,13 @@
                 <a:spcPts val="1000"/>
               </a:spcAft>
               <a:buClr>
-                <a:srgbClr val="E8604C"/>
+                <a:srgbClr val="F2A900"/>
               </a:buClr>
             </a:pPr>
             <a:r>
               <a:rPr sz="2000" b="1">
                 <a:solidFill>
-                  <a:srgbClr val="312E81"/>
+                  <a:srgbClr val="8A6100"/>
                 </a:solidFill>
                 <a:latin typeface="Calibri"/>
               </a:rPr>
@@ -13098,7 +13152,7 @@
             <a:r>
               <a:rPr sz="2000" b="0">
                 <a:solidFill>
-                  <a:srgbClr val="1E1B3A"/>
+                  <a:srgbClr val="202124"/>
                 </a:solidFill>
                 <a:latin typeface="Calibri"/>
               </a:rPr>
@@ -13111,13 +13165,13 @@
                 <a:spcPts val="1000"/>
               </a:spcAft>
               <a:buClr>
-                <a:srgbClr val="E8604C"/>
+                <a:srgbClr val="F2A900"/>
               </a:buClr>
             </a:pPr>
             <a:r>
               <a:rPr sz="2000" b="1">
                 <a:solidFill>
-                  <a:srgbClr val="312E81"/>
+                  <a:srgbClr val="8A6100"/>
                 </a:solidFill>
                 <a:latin typeface="Calibri"/>
               </a:rPr>
@@ -13126,7 +13180,7 @@
             <a:r>
               <a:rPr sz="2000" b="0">
                 <a:solidFill>
-                  <a:srgbClr val="1E1B3A"/>
+                  <a:srgbClr val="202124"/>
                 </a:solidFill>
                 <a:latin typeface="Calibri"/>
               </a:rPr>
@@ -13139,13 +13193,13 @@
                 <a:spcPts val="1000"/>
               </a:spcAft>
               <a:buClr>
-                <a:srgbClr val="E8604C"/>
+                <a:srgbClr val="F2A900"/>
               </a:buClr>
             </a:pPr>
             <a:r>
               <a:rPr sz="2000" b="1">
                 <a:solidFill>
-                  <a:srgbClr val="312E81"/>
+                  <a:srgbClr val="8A6100"/>
                 </a:solidFill>
                 <a:latin typeface="Calibri"/>
               </a:rPr>
@@ -13154,7 +13208,7 @@
             <a:r>
               <a:rPr sz="2000" b="0">
                 <a:solidFill>
-                  <a:srgbClr val="1E1B3A"/>
+                  <a:srgbClr val="202124"/>
                 </a:solidFill>
                 <a:latin typeface="Calibri"/>
               </a:rPr>
@@ -13179,7 +13233,7 @@
           </a:prstGeom>
           <a:ln w="50800">
             <a:solidFill>
-              <a:srgbClr val="E8604C"/>
+              <a:srgbClr val="F2A900"/>
             </a:solidFill>
           </a:ln>
         </p:spPr>
@@ -13224,7 +13278,7 @@
             <a:r>
               <a:rPr sz="1600" b="0">
                 <a:solidFill>
-                  <a:srgbClr val="56566E"/>
+                  <a:srgbClr val="57575A"/>
                 </a:solidFill>
                 <a:latin typeface="Calibri"/>
               </a:rPr>
@@ -13258,7 +13312,7 @@
             <a:r>
               <a:rPr sz="1000" b="0">
                 <a:solidFill>
-                  <a:srgbClr val="56566E"/>
+                  <a:srgbClr val="57575A"/>
                 </a:solidFill>
                 <a:latin typeface="Calibri"/>
               </a:rPr>
@@ -13293,7 +13347,7 @@
             <a:r>
               <a:rPr sz="1000" b="0">
                 <a:solidFill>
-                  <a:srgbClr val="56566E"/>
+                  <a:srgbClr val="57575A"/>
                 </a:solidFill>
                 <a:latin typeface="Calibri"/>
               </a:rPr>
@@ -13307,9 +13361,18 @@
   <p:clrMapOvr>
     <a:masterClrMapping/>
   </p:clrMapOvr>
-  <p:transition spd="med" advTm="25000">
-    <p:push dir="u"/>
-  </p:transition>
+  <mc:AlternateContent xmlns:mc="http://schemas.openxmlformats.org/markup-compatibility/2006">
+    <mc:Choice xmlns:p14="http://schemas.microsoft.com/office/powerpoint/2010/main" Requires="p14">
+      <p:transition spd="slow" p14:dur="1500" advTm="10000">
+        <p:push dir="u"/>
+      </p:transition>
+    </mc:Choice>
+    <mc:Fallback>
+      <p:transition spd="slow" advTm="10000">
+        <p:push dir="u"/>
+      </p:transition>
+    </mc:Fallback>
+  </mc:AlternateContent>
   <p:timing>
     <p:tnLst>
       <p:par>
@@ -13605,7 +13668,7 @@
     <p:bg>
       <p:bgPr>
         <a:solidFill>
-          <a:srgbClr val="312E81"/>
+          <a:srgbClr val="202124"/>
         </a:solidFill>
         <a:effectLst/>
       </p:bgPr>
@@ -13632,7 +13695,7 @@
             <a:avLst/>
           </a:prstGeom>
           <a:solidFill>
-            <a:srgbClr val="3D3A96"/>
+            <a:srgbClr val="303134"/>
           </a:solidFill>
           <a:ln>
             <a:noFill/>
@@ -13675,7 +13738,7 @@
             <a:avLst/>
           </a:prstGeom>
           <a:solidFill>
-            <a:srgbClr val="E8604C"/>
+            <a:srgbClr val="F2A900"/>
           </a:solidFill>
           <a:ln>
             <a:noFill/>
@@ -13764,7 +13827,7 @@
             <a:r>
               <a:rPr sz="2200" b="0">
                 <a:solidFill>
-                  <a:srgbClr val="D9D8F2"/>
+                  <a:srgbClr val="D6D6D6"/>
                 </a:solidFill>
                 <a:latin typeface="Calibri"/>
               </a:rPr>
@@ -13780,7 +13843,7 @@
             <a:r>
               <a:rPr sz="1600" b="0">
                 <a:solidFill>
-                  <a:srgbClr val="D9D8F2"/>
+                  <a:srgbClr val="D6D6D6"/>
                 </a:solidFill>
                 <a:latin typeface="Calibri"/>
               </a:rPr>
@@ -13805,7 +13868,7 @@
           </a:prstGeom>
           <a:ln w="50800">
             <a:solidFill>
-              <a:srgbClr val="E8604C"/>
+              <a:srgbClr val="F2A900"/>
             </a:solidFill>
           </a:ln>
         </p:spPr>
@@ -13829,9 +13892,18 @@
   <p:clrMapOvr>
     <a:masterClrMapping/>
   </p:clrMapOvr>
-  <p:transition spd="med" advTm="10000">
-    <p:fade/>
-  </p:transition>
+  <mc:AlternateContent xmlns:mc="http://schemas.openxmlformats.org/markup-compatibility/2006">
+    <mc:Choice xmlns:p14="http://schemas.microsoft.com/office/powerpoint/2010/main" Requires="p14">
+      <p:transition spd="slow" p14:dur="1500" advTm="10000">
+        <p:push dir="u"/>
+      </p:transition>
+    </mc:Choice>
+    <mc:Fallback>
+      <p:transition spd="slow" advTm="10000">
+        <p:push dir="u"/>
+      </p:transition>
+    </mc:Fallback>
+  </mc:AlternateContent>
   <p:timing>
     <p:tnLst>
       <p:par>
@@ -14019,7 +14091,7 @@
     <p:bg>
       <p:bgPr>
         <a:solidFill>
-          <a:srgbClr val="F4F4FA"/>
+          <a:srgbClr val="F5F5F3"/>
         </a:solidFill>
         <a:effectLst/>
       </p:bgPr>
@@ -14046,7 +14118,7 @@
             <a:avLst/>
           </a:prstGeom>
           <a:solidFill>
-            <a:srgbClr val="312E81"/>
+            <a:srgbClr val="202124"/>
           </a:solidFill>
           <a:ln>
             <a:noFill/>
@@ -14165,7 +14237,7 @@
             <a:avLst/>
           </a:prstGeom>
           <a:solidFill>
-            <a:srgbClr val="E8604C"/>
+            <a:srgbClr val="F2A900"/>
           </a:solidFill>
           <a:ln>
             <a:noFill/>
@@ -14218,13 +14290,13 @@
                 <a:spcPts val="1000"/>
               </a:spcAft>
               <a:buClr>
-                <a:srgbClr val="E8604C"/>
+                <a:srgbClr val="F2A900"/>
               </a:buClr>
             </a:pPr>
             <a:r>
               <a:rPr sz="2200" b="1">
                 <a:solidFill>
-                  <a:srgbClr val="312E81"/>
+                  <a:srgbClr val="8A6100"/>
                 </a:solidFill>
                 <a:latin typeface="Calibri"/>
               </a:rPr>
@@ -14233,7 +14305,7 @@
             <a:r>
               <a:rPr sz="2200" b="0">
                 <a:solidFill>
-                  <a:srgbClr val="1E1B3A"/>
+                  <a:srgbClr val="202124"/>
                 </a:solidFill>
                 <a:latin typeface="Calibri"/>
               </a:rPr>
@@ -14246,13 +14318,13 @@
                 <a:spcPts val="1000"/>
               </a:spcAft>
               <a:buClr>
-                <a:srgbClr val="E8604C"/>
+                <a:srgbClr val="F2A900"/>
               </a:buClr>
             </a:pPr>
             <a:r>
               <a:rPr sz="2200" b="1">
                 <a:solidFill>
-                  <a:srgbClr val="312E81"/>
+                  <a:srgbClr val="8A6100"/>
                 </a:solidFill>
                 <a:latin typeface="Calibri"/>
               </a:rPr>
@@ -14261,7 +14333,7 @@
             <a:r>
               <a:rPr sz="2200" b="0">
                 <a:solidFill>
-                  <a:srgbClr val="1E1B3A"/>
+                  <a:srgbClr val="202124"/>
                 </a:solidFill>
                 <a:latin typeface="Calibri"/>
               </a:rPr>
@@ -14274,13 +14346,13 @@
                 <a:spcPts val="1000"/>
               </a:spcAft>
               <a:buClr>
-                <a:srgbClr val="E8604C"/>
+                <a:srgbClr val="F2A900"/>
               </a:buClr>
             </a:pPr>
             <a:r>
               <a:rPr sz="2200" b="1">
                 <a:solidFill>
-                  <a:srgbClr val="312E81"/>
+                  <a:srgbClr val="8A6100"/>
                 </a:solidFill>
                 <a:latin typeface="Calibri"/>
               </a:rPr>
@@ -14289,7 +14361,7 @@
             <a:r>
               <a:rPr sz="2200" b="0">
                 <a:solidFill>
-                  <a:srgbClr val="1E1B3A"/>
+                  <a:srgbClr val="202124"/>
                 </a:solidFill>
                 <a:latin typeface="Calibri"/>
               </a:rPr>
@@ -14302,13 +14374,13 @@
                 <a:spcPts val="1000"/>
               </a:spcAft>
               <a:buClr>
-                <a:srgbClr val="E8604C"/>
+                <a:srgbClr val="F2A900"/>
               </a:buClr>
             </a:pPr>
             <a:r>
               <a:rPr sz="2200" b="1">
                 <a:solidFill>
-                  <a:srgbClr val="312E81"/>
+                  <a:srgbClr val="8A6100"/>
                 </a:solidFill>
                 <a:latin typeface="Calibri"/>
               </a:rPr>
@@ -14317,7 +14389,7 @@
             <a:r>
               <a:rPr sz="2200" b="0">
                 <a:solidFill>
-                  <a:srgbClr val="1E1B3A"/>
+                  <a:srgbClr val="202124"/>
                 </a:solidFill>
                 <a:latin typeface="Calibri"/>
               </a:rPr>
@@ -14330,13 +14402,13 @@
                 <a:spcPts val="1000"/>
               </a:spcAft>
               <a:buClr>
-                <a:srgbClr val="E8604C"/>
+                <a:srgbClr val="F2A900"/>
               </a:buClr>
             </a:pPr>
             <a:r>
               <a:rPr sz="2200" b="1">
                 <a:solidFill>
-                  <a:srgbClr val="312E81"/>
+                  <a:srgbClr val="8A6100"/>
                 </a:solidFill>
                 <a:latin typeface="Calibri"/>
               </a:rPr>
@@ -14345,7 +14417,7 @@
             <a:r>
               <a:rPr sz="2200" b="0">
                 <a:solidFill>
-                  <a:srgbClr val="1E1B3A"/>
+                  <a:srgbClr val="202124"/>
                 </a:solidFill>
                 <a:latin typeface="Calibri"/>
               </a:rPr>
@@ -14370,7 +14442,7 @@
           </a:prstGeom>
           <a:ln w="50800">
             <a:solidFill>
-              <a:srgbClr val="E8604C"/>
+              <a:srgbClr val="F2A900"/>
             </a:solidFill>
           </a:ln>
         </p:spPr>
@@ -14415,7 +14487,7 @@
             <a:r>
               <a:rPr sz="1600" b="0">
                 <a:solidFill>
-                  <a:srgbClr val="56566E"/>
+                  <a:srgbClr val="57575A"/>
                 </a:solidFill>
                 <a:latin typeface="Calibri"/>
               </a:rPr>
@@ -14449,7 +14521,7 @@
             <a:r>
               <a:rPr sz="1000" b="0">
                 <a:solidFill>
-                  <a:srgbClr val="56566E"/>
+                  <a:srgbClr val="57575A"/>
                 </a:solidFill>
                 <a:latin typeface="Calibri"/>
               </a:rPr>
@@ -14484,7 +14556,7 @@
             <a:r>
               <a:rPr sz="1000" b="0">
                 <a:solidFill>
-                  <a:srgbClr val="56566E"/>
+                  <a:srgbClr val="57575A"/>
                 </a:solidFill>
                 <a:latin typeface="Calibri"/>
               </a:rPr>
@@ -14498,9 +14570,18 @@
   <p:clrMapOvr>
     <a:masterClrMapping/>
   </p:clrMapOvr>
-  <p:transition spd="med" advTm="25000">
-    <p:push dir="u"/>
-  </p:transition>
+  <mc:AlternateContent xmlns:mc="http://schemas.openxmlformats.org/markup-compatibility/2006">
+    <mc:Choice xmlns:p14="http://schemas.microsoft.com/office/powerpoint/2010/main" Requires="p14">
+      <p:transition spd="slow" p14:dur="1500" advTm="10000">
+        <p:push dir="u"/>
+      </p:transition>
+    </mc:Choice>
+    <mc:Fallback>
+      <p:transition spd="slow" advTm="10000">
+        <p:push dir="u"/>
+      </p:transition>
+    </mc:Fallback>
+  </mc:AlternateContent>
   <p:timing>
     <p:tnLst>
       <p:par>
@@ -14796,7 +14877,7 @@
     <p:bg>
       <p:bgPr>
         <a:solidFill>
-          <a:srgbClr val="F4F4FA"/>
+          <a:srgbClr val="F5F5F3"/>
         </a:solidFill>
         <a:effectLst/>
       </p:bgPr>
@@ -14823,7 +14904,7 @@
             <a:avLst/>
           </a:prstGeom>
           <a:solidFill>
-            <a:srgbClr val="312E81"/>
+            <a:srgbClr val="202124"/>
           </a:solidFill>
           <a:ln>
             <a:noFill/>
@@ -14929,7 +15010,7 @@
                   <a:tcPr anchor="ctr">
                     <a:lnL w="12700" cap="flat" cmpd="sng" algn="ctr">
                       <a:solidFill>
-                        <a:srgbClr val="D5D5E5"/>
+                        <a:srgbClr val="D9D9D5"/>
                       </a:solidFill>
                       <a:prstDash val="solid"/>
                       <a:round/>
@@ -14938,7 +15019,7 @@
                     </a:lnL>
                     <a:lnR w="12700" cap="flat" cmpd="sng" algn="ctr">
                       <a:solidFill>
-                        <a:srgbClr val="D5D5E5"/>
+                        <a:srgbClr val="D9D9D5"/>
                       </a:solidFill>
                       <a:prstDash val="solid"/>
                       <a:round/>
@@ -14947,7 +15028,7 @@
                     </a:lnR>
                     <a:lnT w="12700" cap="flat" cmpd="sng" algn="ctr">
                       <a:solidFill>
-                        <a:srgbClr val="D5D5E5"/>
+                        <a:srgbClr val="D9D9D5"/>
                       </a:solidFill>
                       <a:prstDash val="solid"/>
                       <a:round/>
@@ -14956,7 +15037,7 @@
                     </a:lnT>
                     <a:lnB w="12700" cap="flat" cmpd="sng" algn="ctr">
                       <a:solidFill>
-                        <a:srgbClr val="D5D5E5"/>
+                        <a:srgbClr val="D9D9D5"/>
                       </a:solidFill>
                       <a:prstDash val="solid"/>
                       <a:round/>
@@ -14964,7 +15045,7 @@
                       <a:tailEnd type="none" w="med" len="med"/>
                     </a:lnB>
                     <a:solidFill>
-                      <a:srgbClr val="312E81"/>
+                      <a:srgbClr val="202124"/>
                     </a:solidFill>
                   </a:tcPr>
                 </a:tc>
@@ -14988,7 +15069,7 @@
                   <a:tcPr anchor="ctr">
                     <a:lnL w="12700" cap="flat" cmpd="sng" algn="ctr">
                       <a:solidFill>
-                        <a:srgbClr val="D5D5E5"/>
+                        <a:srgbClr val="D9D9D5"/>
                       </a:solidFill>
                       <a:prstDash val="solid"/>
                       <a:round/>
@@ -14997,7 +15078,7 @@
                     </a:lnL>
                     <a:lnR w="12700" cap="flat" cmpd="sng" algn="ctr">
                       <a:solidFill>
-                        <a:srgbClr val="D5D5E5"/>
+                        <a:srgbClr val="D9D9D5"/>
                       </a:solidFill>
                       <a:prstDash val="solid"/>
                       <a:round/>
@@ -15006,7 +15087,7 @@
                     </a:lnR>
                     <a:lnT w="12700" cap="flat" cmpd="sng" algn="ctr">
                       <a:solidFill>
-                        <a:srgbClr val="D5D5E5"/>
+                        <a:srgbClr val="D9D9D5"/>
                       </a:solidFill>
                       <a:prstDash val="solid"/>
                       <a:round/>
@@ -15015,7 +15096,7 @@
                     </a:lnT>
                     <a:lnB w="12700" cap="flat" cmpd="sng" algn="ctr">
                       <a:solidFill>
-                        <a:srgbClr val="D5D5E5"/>
+                        <a:srgbClr val="D9D9D5"/>
                       </a:solidFill>
                       <a:prstDash val="solid"/>
                       <a:round/>
@@ -15023,7 +15104,7 @@
                       <a:tailEnd type="none" w="med" len="med"/>
                     </a:lnB>
                     <a:solidFill>
-                      <a:srgbClr val="312E81"/>
+                      <a:srgbClr val="202124"/>
                     </a:solidFill>
                   </a:tcPr>
                 </a:tc>
@@ -15038,7 +15119,7 @@
                       <a:r>
                         <a:rPr sz="1800" b="1">
                           <a:solidFill>
-                            <a:srgbClr val="1E1B3A"/>
+                            <a:srgbClr val="202124"/>
                           </a:solidFill>
                           <a:latin typeface="Calibri"/>
                         </a:rPr>
@@ -15049,7 +15130,7 @@
                   <a:tcPr anchor="ctr">
                     <a:lnL w="12700" cap="flat" cmpd="sng" algn="ctr">
                       <a:solidFill>
-                        <a:srgbClr val="D5D5E5"/>
+                        <a:srgbClr val="D9D9D5"/>
                       </a:solidFill>
                       <a:prstDash val="solid"/>
                       <a:round/>
@@ -15058,7 +15139,7 @@
                     </a:lnL>
                     <a:lnR w="12700" cap="flat" cmpd="sng" algn="ctr">
                       <a:solidFill>
-                        <a:srgbClr val="D5D5E5"/>
+                        <a:srgbClr val="D9D9D5"/>
                       </a:solidFill>
                       <a:prstDash val="solid"/>
                       <a:round/>
@@ -15067,7 +15148,7 @@
                     </a:lnR>
                     <a:lnT w="12700" cap="flat" cmpd="sng" algn="ctr">
                       <a:solidFill>
-                        <a:srgbClr val="D5D5E5"/>
+                        <a:srgbClr val="D9D9D5"/>
                       </a:solidFill>
                       <a:prstDash val="solid"/>
                       <a:round/>
@@ -15076,7 +15157,7 @@
                     </a:lnT>
                     <a:lnB w="12700" cap="flat" cmpd="sng" algn="ctr">
                       <a:solidFill>
-                        <a:srgbClr val="D5D5E5"/>
+                        <a:srgbClr val="D9D9D5"/>
                       </a:solidFill>
                       <a:prstDash val="solid"/>
                       <a:round/>
@@ -15095,7 +15176,7 @@
                       <a:r>
                         <a:rPr sz="1800" b="0">
                           <a:solidFill>
-                            <a:srgbClr val="1E1B3A"/>
+                            <a:srgbClr val="202124"/>
                           </a:solidFill>
                           <a:latin typeface="Calibri"/>
                         </a:rPr>
@@ -15106,7 +15187,7 @@
                   <a:tcPr anchor="ctr">
                     <a:lnL w="12700" cap="flat" cmpd="sng" algn="ctr">
                       <a:solidFill>
-                        <a:srgbClr val="D5D5E5"/>
+                        <a:srgbClr val="D9D9D5"/>
                       </a:solidFill>
                       <a:prstDash val="solid"/>
                       <a:round/>
@@ -15115,7 +15196,7 @@
                     </a:lnL>
                     <a:lnR w="12700" cap="flat" cmpd="sng" algn="ctr">
                       <a:solidFill>
-                        <a:srgbClr val="D5D5E5"/>
+                        <a:srgbClr val="D9D9D5"/>
                       </a:solidFill>
                       <a:prstDash val="solid"/>
                       <a:round/>
@@ -15124,7 +15205,7 @@
                     </a:lnR>
                     <a:lnT w="12700" cap="flat" cmpd="sng" algn="ctr">
                       <a:solidFill>
-                        <a:srgbClr val="D5D5E5"/>
+                        <a:srgbClr val="D9D9D5"/>
                       </a:solidFill>
                       <a:prstDash val="solid"/>
                       <a:round/>
@@ -15133,7 +15214,7 @@
                     </a:lnT>
                     <a:lnB w="12700" cap="flat" cmpd="sng" algn="ctr">
                       <a:solidFill>
-                        <a:srgbClr val="D5D5E5"/>
+                        <a:srgbClr val="D9D9D5"/>
                       </a:solidFill>
                       <a:prstDash val="solid"/>
                       <a:round/>
@@ -15154,7 +15235,7 @@
                       <a:r>
                         <a:rPr sz="1800" b="1">
                           <a:solidFill>
-                            <a:srgbClr val="1E1B3A"/>
+                            <a:srgbClr val="202124"/>
                           </a:solidFill>
                           <a:latin typeface="Calibri"/>
                         </a:rPr>
@@ -15165,7 +15246,7 @@
                   <a:tcPr anchor="ctr">
                     <a:lnL w="12700" cap="flat" cmpd="sng" algn="ctr">
                       <a:solidFill>
-                        <a:srgbClr val="D5D5E5"/>
+                        <a:srgbClr val="D9D9D5"/>
                       </a:solidFill>
                       <a:prstDash val="solid"/>
                       <a:round/>
@@ -15174,7 +15255,7 @@
                     </a:lnL>
                     <a:lnR w="12700" cap="flat" cmpd="sng" algn="ctr">
                       <a:solidFill>
-                        <a:srgbClr val="D5D5E5"/>
+                        <a:srgbClr val="D9D9D5"/>
                       </a:solidFill>
                       <a:prstDash val="solid"/>
                       <a:round/>
@@ -15183,7 +15264,7 @@
                     </a:lnR>
                     <a:lnT w="12700" cap="flat" cmpd="sng" algn="ctr">
                       <a:solidFill>
-                        <a:srgbClr val="D5D5E5"/>
+                        <a:srgbClr val="D9D9D5"/>
                       </a:solidFill>
                       <a:prstDash val="solid"/>
                       <a:round/>
@@ -15192,7 +15273,7 @@
                     </a:lnT>
                     <a:lnB w="12700" cap="flat" cmpd="sng" algn="ctr">
                       <a:solidFill>
-                        <a:srgbClr val="D5D5E5"/>
+                        <a:srgbClr val="D9D9D5"/>
                       </a:solidFill>
                       <a:prstDash val="solid"/>
                       <a:round/>
@@ -15200,7 +15281,7 @@
                       <a:tailEnd type="none" w="med" len="med"/>
                     </a:lnB>
                     <a:solidFill>
-                      <a:srgbClr val="ECECF7"/>
+                      <a:srgbClr val="F2F2EF"/>
                     </a:solidFill>
                   </a:tcPr>
                 </a:tc>
@@ -15213,7 +15294,7 @@
                       <a:r>
                         <a:rPr sz="1800" b="0">
                           <a:solidFill>
-                            <a:srgbClr val="1E1B3A"/>
+                            <a:srgbClr val="202124"/>
                           </a:solidFill>
                           <a:latin typeface="Calibri"/>
                         </a:rPr>
@@ -15224,7 +15305,7 @@
                   <a:tcPr anchor="ctr">
                     <a:lnL w="12700" cap="flat" cmpd="sng" algn="ctr">
                       <a:solidFill>
-                        <a:srgbClr val="D5D5E5"/>
+                        <a:srgbClr val="D9D9D5"/>
                       </a:solidFill>
                       <a:prstDash val="solid"/>
                       <a:round/>
@@ -15233,7 +15314,7 @@
                     </a:lnL>
                     <a:lnR w="12700" cap="flat" cmpd="sng" algn="ctr">
                       <a:solidFill>
-                        <a:srgbClr val="D5D5E5"/>
+                        <a:srgbClr val="D9D9D5"/>
                       </a:solidFill>
                       <a:prstDash val="solid"/>
                       <a:round/>
@@ -15242,7 +15323,7 @@
                     </a:lnR>
                     <a:lnT w="12700" cap="flat" cmpd="sng" algn="ctr">
                       <a:solidFill>
-                        <a:srgbClr val="D5D5E5"/>
+                        <a:srgbClr val="D9D9D5"/>
                       </a:solidFill>
                       <a:prstDash val="solid"/>
                       <a:round/>
@@ -15251,7 +15332,7 @@
                     </a:lnT>
                     <a:lnB w="12700" cap="flat" cmpd="sng" algn="ctr">
                       <a:solidFill>
-                        <a:srgbClr val="D5D5E5"/>
+                        <a:srgbClr val="D9D9D5"/>
                       </a:solidFill>
                       <a:prstDash val="solid"/>
                       <a:round/>
@@ -15259,7 +15340,7 @@
                       <a:tailEnd type="none" w="med" len="med"/>
                     </a:lnB>
                     <a:solidFill>
-                      <a:srgbClr val="ECECF7"/>
+                      <a:srgbClr val="F2F2EF"/>
                     </a:solidFill>
                   </a:tcPr>
                 </a:tc>
@@ -15274,7 +15355,7 @@
                       <a:r>
                         <a:rPr sz="1800" b="1">
                           <a:solidFill>
-                            <a:srgbClr val="1E1B3A"/>
+                            <a:srgbClr val="202124"/>
                           </a:solidFill>
                           <a:latin typeface="Calibri"/>
                         </a:rPr>
@@ -15285,7 +15366,7 @@
                   <a:tcPr anchor="ctr">
                     <a:lnL w="12700" cap="flat" cmpd="sng" algn="ctr">
                       <a:solidFill>
-                        <a:srgbClr val="D5D5E5"/>
+                        <a:srgbClr val="D9D9D5"/>
                       </a:solidFill>
                       <a:prstDash val="solid"/>
                       <a:round/>
@@ -15294,7 +15375,7 @@
                     </a:lnL>
                     <a:lnR w="12700" cap="flat" cmpd="sng" algn="ctr">
                       <a:solidFill>
-                        <a:srgbClr val="D5D5E5"/>
+                        <a:srgbClr val="D9D9D5"/>
                       </a:solidFill>
                       <a:prstDash val="solid"/>
                       <a:round/>
@@ -15303,7 +15384,7 @@
                     </a:lnR>
                     <a:lnT w="12700" cap="flat" cmpd="sng" algn="ctr">
                       <a:solidFill>
-                        <a:srgbClr val="D5D5E5"/>
+                        <a:srgbClr val="D9D9D5"/>
                       </a:solidFill>
                       <a:prstDash val="solid"/>
                       <a:round/>
@@ -15312,7 +15393,7 @@
                     </a:lnT>
                     <a:lnB w="12700" cap="flat" cmpd="sng" algn="ctr">
                       <a:solidFill>
-                        <a:srgbClr val="D5D5E5"/>
+                        <a:srgbClr val="D9D9D5"/>
                       </a:solidFill>
                       <a:prstDash val="solid"/>
                       <a:round/>
@@ -15331,7 +15412,7 @@
                       <a:r>
                         <a:rPr sz="1800" b="0">
                           <a:solidFill>
-                            <a:srgbClr val="1E1B3A"/>
+                            <a:srgbClr val="202124"/>
                           </a:solidFill>
                           <a:latin typeface="Calibri"/>
                         </a:rPr>
@@ -15342,7 +15423,7 @@
                   <a:tcPr anchor="ctr">
                     <a:lnL w="12700" cap="flat" cmpd="sng" algn="ctr">
                       <a:solidFill>
-                        <a:srgbClr val="D5D5E5"/>
+                        <a:srgbClr val="D9D9D5"/>
                       </a:solidFill>
                       <a:prstDash val="solid"/>
                       <a:round/>
@@ -15351,7 +15432,7 @@
                     </a:lnL>
                     <a:lnR w="12700" cap="flat" cmpd="sng" algn="ctr">
                       <a:solidFill>
-                        <a:srgbClr val="D5D5E5"/>
+                        <a:srgbClr val="D9D9D5"/>
                       </a:solidFill>
                       <a:prstDash val="solid"/>
                       <a:round/>
@@ -15360,7 +15441,7 @@
                     </a:lnR>
                     <a:lnT w="12700" cap="flat" cmpd="sng" algn="ctr">
                       <a:solidFill>
-                        <a:srgbClr val="D5D5E5"/>
+                        <a:srgbClr val="D9D9D5"/>
                       </a:solidFill>
                       <a:prstDash val="solid"/>
                       <a:round/>
@@ -15369,7 +15450,7 @@
                     </a:lnT>
                     <a:lnB w="12700" cap="flat" cmpd="sng" algn="ctr">
                       <a:solidFill>
-                        <a:srgbClr val="D5D5E5"/>
+                        <a:srgbClr val="D9D9D5"/>
                       </a:solidFill>
                       <a:prstDash val="solid"/>
                       <a:round/>
@@ -15390,7 +15471,7 @@
                       <a:r>
                         <a:rPr sz="1800" b="1">
                           <a:solidFill>
-                            <a:srgbClr val="1E1B3A"/>
+                            <a:srgbClr val="202124"/>
                           </a:solidFill>
                           <a:latin typeface="Calibri"/>
                         </a:rPr>
@@ -15401,7 +15482,7 @@
                   <a:tcPr anchor="ctr">
                     <a:lnL w="12700" cap="flat" cmpd="sng" algn="ctr">
                       <a:solidFill>
-                        <a:srgbClr val="D5D5E5"/>
+                        <a:srgbClr val="D9D9D5"/>
                       </a:solidFill>
                       <a:prstDash val="solid"/>
                       <a:round/>
@@ -15410,7 +15491,7 @@
                     </a:lnL>
                     <a:lnR w="12700" cap="flat" cmpd="sng" algn="ctr">
                       <a:solidFill>
-                        <a:srgbClr val="D5D5E5"/>
+                        <a:srgbClr val="D9D9D5"/>
                       </a:solidFill>
                       <a:prstDash val="solid"/>
                       <a:round/>
@@ -15419,7 +15500,7 @@
                     </a:lnR>
                     <a:lnT w="12700" cap="flat" cmpd="sng" algn="ctr">
                       <a:solidFill>
-                        <a:srgbClr val="D5D5E5"/>
+                        <a:srgbClr val="D9D9D5"/>
                       </a:solidFill>
                       <a:prstDash val="solid"/>
                       <a:round/>
@@ -15428,7 +15509,7 @@
                     </a:lnT>
                     <a:lnB w="12700" cap="flat" cmpd="sng" algn="ctr">
                       <a:solidFill>
-                        <a:srgbClr val="D5D5E5"/>
+                        <a:srgbClr val="D9D9D5"/>
                       </a:solidFill>
                       <a:prstDash val="solid"/>
                       <a:round/>
@@ -15436,7 +15517,7 @@
                       <a:tailEnd type="none" w="med" len="med"/>
                     </a:lnB>
                     <a:solidFill>
-                      <a:srgbClr val="ECECF7"/>
+                      <a:srgbClr val="F2F2EF"/>
                     </a:solidFill>
                   </a:tcPr>
                 </a:tc>
@@ -15449,7 +15530,7 @@
                       <a:r>
                         <a:rPr sz="1800" b="0">
                           <a:solidFill>
-                            <a:srgbClr val="1E1B3A"/>
+                            <a:srgbClr val="202124"/>
                           </a:solidFill>
                           <a:latin typeface="Calibri"/>
                         </a:rPr>
@@ -15460,7 +15541,7 @@
                   <a:tcPr anchor="ctr">
                     <a:lnL w="12700" cap="flat" cmpd="sng" algn="ctr">
                       <a:solidFill>
-                        <a:srgbClr val="D5D5E5"/>
+                        <a:srgbClr val="D9D9D5"/>
                       </a:solidFill>
                       <a:prstDash val="solid"/>
                       <a:round/>
@@ -15469,7 +15550,7 @@
                     </a:lnL>
                     <a:lnR w="12700" cap="flat" cmpd="sng" algn="ctr">
                       <a:solidFill>
-                        <a:srgbClr val="D5D5E5"/>
+                        <a:srgbClr val="D9D9D5"/>
                       </a:solidFill>
                       <a:prstDash val="solid"/>
                       <a:round/>
@@ -15478,7 +15559,7 @@
                     </a:lnR>
                     <a:lnT w="12700" cap="flat" cmpd="sng" algn="ctr">
                       <a:solidFill>
-                        <a:srgbClr val="D5D5E5"/>
+                        <a:srgbClr val="D9D9D5"/>
                       </a:solidFill>
                       <a:prstDash val="solid"/>
                       <a:round/>
@@ -15487,7 +15568,7 @@
                     </a:lnT>
                     <a:lnB w="12700" cap="flat" cmpd="sng" algn="ctr">
                       <a:solidFill>
-                        <a:srgbClr val="D5D5E5"/>
+                        <a:srgbClr val="D9D9D5"/>
                       </a:solidFill>
                       <a:prstDash val="solid"/>
                       <a:round/>
@@ -15495,7 +15576,7 @@
                       <a:tailEnd type="none" w="med" len="med"/>
                     </a:lnB>
                     <a:solidFill>
-                      <a:srgbClr val="ECECF7"/>
+                      <a:srgbClr val="F2F2EF"/>
                     </a:solidFill>
                   </a:tcPr>
                 </a:tc>
@@ -15510,7 +15591,7 @@
                       <a:r>
                         <a:rPr sz="1800" b="1">
                           <a:solidFill>
-                            <a:srgbClr val="1E1B3A"/>
+                            <a:srgbClr val="202124"/>
                           </a:solidFill>
                           <a:latin typeface="Calibri"/>
                         </a:rPr>
@@ -15521,7 +15602,7 @@
                   <a:tcPr anchor="ctr">
                     <a:lnL w="12700" cap="flat" cmpd="sng" algn="ctr">
                       <a:solidFill>
-                        <a:srgbClr val="D5D5E5"/>
+                        <a:srgbClr val="D9D9D5"/>
                       </a:solidFill>
                       <a:prstDash val="solid"/>
                       <a:round/>
@@ -15530,7 +15611,7 @@
                     </a:lnL>
                     <a:lnR w="12700" cap="flat" cmpd="sng" algn="ctr">
                       <a:solidFill>
-                        <a:srgbClr val="D5D5E5"/>
+                        <a:srgbClr val="D9D9D5"/>
                       </a:solidFill>
                       <a:prstDash val="solid"/>
                       <a:round/>
@@ -15539,7 +15620,7 @@
                     </a:lnR>
                     <a:lnT w="12700" cap="flat" cmpd="sng" algn="ctr">
                       <a:solidFill>
-                        <a:srgbClr val="D5D5E5"/>
+                        <a:srgbClr val="D9D9D5"/>
                       </a:solidFill>
                       <a:prstDash val="solid"/>
                       <a:round/>
@@ -15548,7 +15629,7 @@
                     </a:lnT>
                     <a:lnB w="12700" cap="flat" cmpd="sng" algn="ctr">
                       <a:solidFill>
-                        <a:srgbClr val="D5D5E5"/>
+                        <a:srgbClr val="D9D9D5"/>
                       </a:solidFill>
                       <a:prstDash val="solid"/>
                       <a:round/>
@@ -15567,7 +15648,7 @@
                       <a:r>
                         <a:rPr sz="1800" b="0">
                           <a:solidFill>
-                            <a:srgbClr val="1E1B3A"/>
+                            <a:srgbClr val="202124"/>
                           </a:solidFill>
                           <a:latin typeface="Calibri"/>
                         </a:rPr>
@@ -15578,7 +15659,7 @@
                   <a:tcPr anchor="ctr">
                     <a:lnL w="12700" cap="flat" cmpd="sng" algn="ctr">
                       <a:solidFill>
-                        <a:srgbClr val="D5D5E5"/>
+                        <a:srgbClr val="D9D9D5"/>
                       </a:solidFill>
                       <a:prstDash val="solid"/>
                       <a:round/>
@@ -15587,7 +15668,7 @@
                     </a:lnL>
                     <a:lnR w="12700" cap="flat" cmpd="sng" algn="ctr">
                       <a:solidFill>
-                        <a:srgbClr val="D5D5E5"/>
+                        <a:srgbClr val="D9D9D5"/>
                       </a:solidFill>
                       <a:prstDash val="solid"/>
                       <a:round/>
@@ -15596,7 +15677,7 @@
                     </a:lnR>
                     <a:lnT w="12700" cap="flat" cmpd="sng" algn="ctr">
                       <a:solidFill>
-                        <a:srgbClr val="D5D5E5"/>
+                        <a:srgbClr val="D9D9D5"/>
                       </a:solidFill>
                       <a:prstDash val="solid"/>
                       <a:round/>
@@ -15605,7 +15686,7 @@
                     </a:lnT>
                     <a:lnB w="12700" cap="flat" cmpd="sng" algn="ctr">
                       <a:solidFill>
-                        <a:srgbClr val="D5D5E5"/>
+                        <a:srgbClr val="D9D9D5"/>
                       </a:solidFill>
                       <a:prstDash val="solid"/>
                       <a:round/>
@@ -15636,7 +15717,7 @@
           </a:prstGeom>
           <a:ln w="50800">
             <a:solidFill>
-              <a:srgbClr val="E8604C"/>
+              <a:srgbClr val="F2A900"/>
             </a:solidFill>
           </a:ln>
         </p:spPr>
@@ -15681,7 +15762,7 @@
             <a:r>
               <a:rPr sz="1600" b="0">
                 <a:solidFill>
-                  <a:srgbClr val="56566E"/>
+                  <a:srgbClr val="57575A"/>
                 </a:solidFill>
                 <a:latin typeface="Calibri"/>
               </a:rPr>
@@ -15715,7 +15796,7 @@
             <a:r>
               <a:rPr sz="1000" b="0">
                 <a:solidFill>
-                  <a:srgbClr val="56566E"/>
+                  <a:srgbClr val="57575A"/>
                 </a:solidFill>
                 <a:latin typeface="Calibri"/>
               </a:rPr>
@@ -15750,7 +15831,7 @@
             <a:r>
               <a:rPr sz="1000" b="0">
                 <a:solidFill>
-                  <a:srgbClr val="56566E"/>
+                  <a:srgbClr val="57575A"/>
                 </a:solidFill>
                 <a:latin typeface="Calibri"/>
               </a:rPr>
@@ -15764,9 +15845,18 @@
   <p:clrMapOvr>
     <a:masterClrMapping/>
   </p:clrMapOvr>
-  <p:transition spd="med" advTm="25000">
-    <p:push dir="u"/>
-  </p:transition>
+  <mc:AlternateContent xmlns:mc="http://schemas.openxmlformats.org/markup-compatibility/2006">
+    <mc:Choice xmlns:p14="http://schemas.microsoft.com/office/powerpoint/2010/main" Requires="p14">
+      <p:transition spd="slow" p14:dur="1500" advTm="10000">
+        <p:push dir="u"/>
+      </p:transition>
+    </mc:Choice>
+    <mc:Fallback>
+      <p:transition spd="slow" advTm="10000">
+        <p:push dir="u"/>
+      </p:transition>
+    </mc:Fallback>
+  </mc:AlternateContent>
   <p:timing>
     <p:tnLst>
       <p:par>
@@ -15989,7 +16079,7 @@
     <p:bg>
       <p:bgPr>
         <a:solidFill>
-          <a:srgbClr val="F4F4FA"/>
+          <a:srgbClr val="F5F5F3"/>
         </a:solidFill>
         <a:effectLst/>
       </p:bgPr>
@@ -16016,7 +16106,7 @@
             <a:avLst/>
           </a:prstGeom>
           <a:solidFill>
-            <a:srgbClr val="312E81"/>
+            <a:srgbClr val="202124"/>
           </a:solidFill>
           <a:ln>
             <a:noFill/>
@@ -16113,7 +16203,7 @@
           </a:prstGeom>
           <a:ln w="50800">
             <a:solidFill>
-              <a:srgbClr val="E8604C"/>
+              <a:srgbClr val="F2A900"/>
             </a:solidFill>
           </a:ln>
         </p:spPr>
@@ -16158,7 +16248,7 @@
             <a:r>
               <a:rPr sz="1600" b="0">
                 <a:solidFill>
-                  <a:srgbClr val="56566E"/>
+                  <a:srgbClr val="57575A"/>
                 </a:solidFill>
                 <a:latin typeface="Calibri"/>
               </a:rPr>
@@ -16192,7 +16282,7 @@
             <a:r>
               <a:rPr sz="1000" b="0">
                 <a:solidFill>
-                  <a:srgbClr val="56566E"/>
+                  <a:srgbClr val="57575A"/>
                 </a:solidFill>
                 <a:latin typeface="Calibri"/>
               </a:rPr>
@@ -16227,7 +16317,7 @@
             <a:r>
               <a:rPr sz="1000" b="0">
                 <a:solidFill>
-                  <a:srgbClr val="56566E"/>
+                  <a:srgbClr val="57575A"/>
                 </a:solidFill>
                 <a:latin typeface="Calibri"/>
               </a:rPr>
@@ -16294,7 +16384,7 @@
             <a:avLst/>
           </a:prstGeom>
           <a:solidFill>
-            <a:srgbClr val="E8604C"/>
+            <a:srgbClr val="F2A900"/>
           </a:solidFill>
           <a:ln>
             <a:noFill/>
@@ -16352,7 +16442,7 @@
             <a:r>
               <a:rPr sz="1600" b="1">
                 <a:solidFill>
-                  <a:srgbClr val="1E1B3A"/>
+                  <a:srgbClr val="202124"/>
                 </a:solidFill>
                 <a:latin typeface="Calibri"/>
               </a:rPr>
@@ -16361,7 +16451,7 @@
             <a:r>
               <a:rPr sz="1600" b="0">
                 <a:solidFill>
-                  <a:srgbClr val="1E1B3A"/>
+                  <a:srgbClr val="202124"/>
                 </a:solidFill>
                 <a:latin typeface="Calibri"/>
               </a:rPr>
@@ -16377,7 +16467,7 @@
             <a:r>
               <a:rPr sz="1600" b="1">
                 <a:solidFill>
-                  <a:srgbClr val="1E1B3A"/>
+                  <a:srgbClr val="202124"/>
                 </a:solidFill>
                 <a:latin typeface="Calibri"/>
               </a:rPr>
@@ -16386,7 +16476,7 @@
             <a:r>
               <a:rPr sz="1600" b="0">
                 <a:solidFill>
-                  <a:srgbClr val="1E1B3A"/>
+                  <a:srgbClr val="202124"/>
                 </a:solidFill>
                 <a:latin typeface="Calibri"/>
               </a:rPr>
@@ -16402,7 +16492,7 @@
             <a:r>
               <a:rPr sz="1600" b="1">
                 <a:solidFill>
-                  <a:srgbClr val="1E1B3A"/>
+                  <a:srgbClr val="202124"/>
                 </a:solidFill>
                 <a:latin typeface="Calibri"/>
               </a:rPr>
@@ -16411,7 +16501,7 @@
             <a:r>
               <a:rPr sz="1600" b="0">
                 <a:solidFill>
-                  <a:srgbClr val="1E1B3A"/>
+                  <a:srgbClr val="202124"/>
                 </a:solidFill>
                 <a:latin typeface="Calibri"/>
               </a:rPr>
@@ -16427,7 +16517,7 @@
             <a:r>
               <a:rPr sz="1600" b="1">
                 <a:solidFill>
-                  <a:srgbClr val="1E1B3A"/>
+                  <a:srgbClr val="202124"/>
                 </a:solidFill>
                 <a:latin typeface="Calibri"/>
               </a:rPr>
@@ -16436,7 +16526,7 @@
             <a:r>
               <a:rPr sz="1600" b="0">
                 <a:solidFill>
-                  <a:srgbClr val="1E1B3A"/>
+                  <a:srgbClr val="202124"/>
                 </a:solidFill>
                 <a:latin typeface="Calibri"/>
               </a:rPr>
@@ -16450,9 +16540,18 @@
   <p:clrMapOvr>
     <a:masterClrMapping/>
   </p:clrMapOvr>
-  <p:transition spd="med" advTm="30000">
-    <p:push dir="u"/>
-  </p:transition>
+  <mc:AlternateContent xmlns:mc="http://schemas.openxmlformats.org/markup-compatibility/2006">
+    <mc:Choice xmlns:p14="http://schemas.microsoft.com/office/powerpoint/2010/main" Requires="p14">
+      <p:transition spd="slow" p14:dur="1500" advTm="10000">
+        <p:push dir="u"/>
+      </p:transition>
+    </mc:Choice>
+    <mc:Fallback>
+      <p:transition spd="slow" advTm="10000">
+        <p:push dir="u"/>
+      </p:transition>
+    </mc:Fallback>
+  </mc:AlternateContent>
   <p:timing>
     <p:tnLst>
       <p:par>
@@ -16795,7 +16894,7 @@
     <p:bg>
       <p:bgPr>
         <a:solidFill>
-          <a:srgbClr val="F4F4FA"/>
+          <a:srgbClr val="F5F5F3"/>
         </a:solidFill>
         <a:effectLst/>
       </p:bgPr>
@@ -16822,7 +16921,7 @@
             <a:avLst/>
           </a:prstGeom>
           <a:solidFill>
-            <a:srgbClr val="312E81"/>
+            <a:srgbClr val="202124"/>
           </a:solidFill>
           <a:ln>
             <a:noFill/>
@@ -16929,7 +17028,7 @@
                   <a:tcPr anchor="ctr">
                     <a:lnL w="12700" cap="flat" cmpd="sng" algn="ctr">
                       <a:solidFill>
-                        <a:srgbClr val="D5D5E5"/>
+                        <a:srgbClr val="D9D9D5"/>
                       </a:solidFill>
                       <a:prstDash val="solid"/>
                       <a:round/>
@@ -16938,7 +17037,7 @@
                     </a:lnL>
                     <a:lnR w="12700" cap="flat" cmpd="sng" algn="ctr">
                       <a:solidFill>
-                        <a:srgbClr val="D5D5E5"/>
+                        <a:srgbClr val="D9D9D5"/>
                       </a:solidFill>
                       <a:prstDash val="solid"/>
                       <a:round/>
@@ -16947,7 +17046,7 @@
                     </a:lnR>
                     <a:lnT w="12700" cap="flat" cmpd="sng" algn="ctr">
                       <a:solidFill>
-                        <a:srgbClr val="D5D5E5"/>
+                        <a:srgbClr val="D9D9D5"/>
                       </a:solidFill>
                       <a:prstDash val="solid"/>
                       <a:round/>
@@ -16956,7 +17055,7 @@
                     </a:lnT>
                     <a:lnB w="12700" cap="flat" cmpd="sng" algn="ctr">
                       <a:solidFill>
-                        <a:srgbClr val="D5D5E5"/>
+                        <a:srgbClr val="D9D9D5"/>
                       </a:solidFill>
                       <a:prstDash val="solid"/>
                       <a:round/>
@@ -16964,7 +17063,7 @@
                       <a:tailEnd type="none" w="med" len="med"/>
                     </a:lnB>
                     <a:solidFill>
-                      <a:srgbClr val="312E81"/>
+                      <a:srgbClr val="202124"/>
                     </a:solidFill>
                   </a:tcPr>
                 </a:tc>
@@ -16988,7 +17087,7 @@
                   <a:tcPr anchor="ctr">
                     <a:lnL w="12700" cap="flat" cmpd="sng" algn="ctr">
                       <a:solidFill>
-                        <a:srgbClr val="D5D5E5"/>
+                        <a:srgbClr val="D9D9D5"/>
                       </a:solidFill>
                       <a:prstDash val="solid"/>
                       <a:round/>
@@ -16997,7 +17096,7 @@
                     </a:lnL>
                     <a:lnR w="12700" cap="flat" cmpd="sng" algn="ctr">
                       <a:solidFill>
-                        <a:srgbClr val="D5D5E5"/>
+                        <a:srgbClr val="D9D9D5"/>
                       </a:solidFill>
                       <a:prstDash val="solid"/>
                       <a:round/>
@@ -17006,7 +17105,7 @@
                     </a:lnR>
                     <a:lnT w="12700" cap="flat" cmpd="sng" algn="ctr">
                       <a:solidFill>
-                        <a:srgbClr val="D5D5E5"/>
+                        <a:srgbClr val="D9D9D5"/>
                       </a:solidFill>
                       <a:prstDash val="solid"/>
                       <a:round/>
@@ -17015,7 +17114,7 @@
                     </a:lnT>
                     <a:lnB w="12700" cap="flat" cmpd="sng" algn="ctr">
                       <a:solidFill>
-                        <a:srgbClr val="D5D5E5"/>
+                        <a:srgbClr val="D9D9D5"/>
                       </a:solidFill>
                       <a:prstDash val="solid"/>
                       <a:round/>
@@ -17023,7 +17122,7 @@
                       <a:tailEnd type="none" w="med" len="med"/>
                     </a:lnB>
                     <a:solidFill>
-                      <a:srgbClr val="312E81"/>
+                      <a:srgbClr val="202124"/>
                     </a:solidFill>
                   </a:tcPr>
                 </a:tc>
@@ -17047,7 +17146,7 @@
                   <a:tcPr anchor="ctr">
                     <a:lnL w="12700" cap="flat" cmpd="sng" algn="ctr">
                       <a:solidFill>
-                        <a:srgbClr val="D5D5E5"/>
+                        <a:srgbClr val="D9D9D5"/>
                       </a:solidFill>
                       <a:prstDash val="solid"/>
                       <a:round/>
@@ -17056,7 +17155,7 @@
                     </a:lnL>
                     <a:lnR w="12700" cap="flat" cmpd="sng" algn="ctr">
                       <a:solidFill>
-                        <a:srgbClr val="D5D5E5"/>
+                        <a:srgbClr val="D9D9D5"/>
                       </a:solidFill>
                       <a:prstDash val="solid"/>
                       <a:round/>
@@ -17065,7 +17164,7 @@
                     </a:lnR>
                     <a:lnT w="12700" cap="flat" cmpd="sng" algn="ctr">
                       <a:solidFill>
-                        <a:srgbClr val="D5D5E5"/>
+                        <a:srgbClr val="D9D9D5"/>
                       </a:solidFill>
                       <a:prstDash val="solid"/>
                       <a:round/>
@@ -17074,7 +17173,7 @@
                     </a:lnT>
                     <a:lnB w="12700" cap="flat" cmpd="sng" algn="ctr">
                       <a:solidFill>
-                        <a:srgbClr val="D5D5E5"/>
+                        <a:srgbClr val="D9D9D5"/>
                       </a:solidFill>
                       <a:prstDash val="solid"/>
                       <a:round/>
@@ -17082,7 +17181,7 @@
                       <a:tailEnd type="none" w="med" len="med"/>
                     </a:lnB>
                     <a:solidFill>
-                      <a:srgbClr val="312E81"/>
+                      <a:srgbClr val="202124"/>
                     </a:solidFill>
                   </a:tcPr>
                 </a:tc>
@@ -17097,7 +17196,7 @@
                       <a:r>
                         <a:rPr sz="1500" b="1">
                           <a:solidFill>
-                            <a:srgbClr val="1E1B3A"/>
+                            <a:srgbClr val="202124"/>
                           </a:solidFill>
                           <a:latin typeface="Calibri"/>
                         </a:rPr>
@@ -17108,7 +17207,7 @@
                   <a:tcPr anchor="ctr">
                     <a:lnL w="12700" cap="flat" cmpd="sng" algn="ctr">
                       <a:solidFill>
-                        <a:srgbClr val="D5D5E5"/>
+                        <a:srgbClr val="D9D9D5"/>
                       </a:solidFill>
                       <a:prstDash val="solid"/>
                       <a:round/>
@@ -17117,7 +17216,7 @@
                     </a:lnL>
                     <a:lnR w="12700" cap="flat" cmpd="sng" algn="ctr">
                       <a:solidFill>
-                        <a:srgbClr val="D5D5E5"/>
+                        <a:srgbClr val="D9D9D5"/>
                       </a:solidFill>
                       <a:prstDash val="solid"/>
                       <a:round/>
@@ -17126,7 +17225,7 @@
                     </a:lnR>
                     <a:lnT w="12700" cap="flat" cmpd="sng" algn="ctr">
                       <a:solidFill>
-                        <a:srgbClr val="D5D5E5"/>
+                        <a:srgbClr val="D9D9D5"/>
                       </a:solidFill>
                       <a:prstDash val="solid"/>
                       <a:round/>
@@ -17135,7 +17234,7 @@
                     </a:lnT>
                     <a:lnB w="12700" cap="flat" cmpd="sng" algn="ctr">
                       <a:solidFill>
-                        <a:srgbClr val="D5D5E5"/>
+                        <a:srgbClr val="D9D9D5"/>
                       </a:solidFill>
                       <a:prstDash val="solid"/>
                       <a:round/>
@@ -17154,7 +17253,7 @@
                       <a:r>
                         <a:rPr sz="1500" b="0">
                           <a:solidFill>
-                            <a:srgbClr val="1E1B3A"/>
+                            <a:srgbClr val="202124"/>
                           </a:solidFill>
                           <a:latin typeface="Calibri"/>
                         </a:rPr>
@@ -17165,7 +17264,7 @@
                   <a:tcPr anchor="ctr">
                     <a:lnL w="12700" cap="flat" cmpd="sng" algn="ctr">
                       <a:solidFill>
-                        <a:srgbClr val="D5D5E5"/>
+                        <a:srgbClr val="D9D9D5"/>
                       </a:solidFill>
                       <a:prstDash val="solid"/>
                       <a:round/>
@@ -17174,7 +17273,7 @@
                     </a:lnL>
                     <a:lnR w="12700" cap="flat" cmpd="sng" algn="ctr">
                       <a:solidFill>
-                        <a:srgbClr val="D5D5E5"/>
+                        <a:srgbClr val="D9D9D5"/>
                       </a:solidFill>
                       <a:prstDash val="solid"/>
                       <a:round/>
@@ -17183,7 +17282,7 @@
                     </a:lnR>
                     <a:lnT w="12700" cap="flat" cmpd="sng" algn="ctr">
                       <a:solidFill>
-                        <a:srgbClr val="D5D5E5"/>
+                        <a:srgbClr val="D9D9D5"/>
                       </a:solidFill>
                       <a:prstDash val="solid"/>
                       <a:round/>
@@ -17192,7 +17291,7 @@
                     </a:lnT>
                     <a:lnB w="12700" cap="flat" cmpd="sng" algn="ctr">
                       <a:solidFill>
-                        <a:srgbClr val="D5D5E5"/>
+                        <a:srgbClr val="D9D9D5"/>
                       </a:solidFill>
                       <a:prstDash val="solid"/>
                       <a:round/>
@@ -17211,7 +17310,7 @@
                       <a:r>
                         <a:rPr sz="1500" b="0">
                           <a:solidFill>
-                            <a:srgbClr val="1E1B3A"/>
+                            <a:srgbClr val="202124"/>
                           </a:solidFill>
                           <a:latin typeface="Calibri"/>
                         </a:rPr>
@@ -17222,7 +17321,7 @@
                   <a:tcPr anchor="ctr">
                     <a:lnL w="12700" cap="flat" cmpd="sng" algn="ctr">
                       <a:solidFill>
-                        <a:srgbClr val="D5D5E5"/>
+                        <a:srgbClr val="D9D9D5"/>
                       </a:solidFill>
                       <a:prstDash val="solid"/>
                       <a:round/>
@@ -17231,7 +17330,7 @@
                     </a:lnL>
                     <a:lnR w="12700" cap="flat" cmpd="sng" algn="ctr">
                       <a:solidFill>
-                        <a:srgbClr val="D5D5E5"/>
+                        <a:srgbClr val="D9D9D5"/>
                       </a:solidFill>
                       <a:prstDash val="solid"/>
                       <a:round/>
@@ -17240,7 +17339,7 @@
                     </a:lnR>
                     <a:lnT w="12700" cap="flat" cmpd="sng" algn="ctr">
                       <a:solidFill>
-                        <a:srgbClr val="D5D5E5"/>
+                        <a:srgbClr val="D9D9D5"/>
                       </a:solidFill>
                       <a:prstDash val="solid"/>
                       <a:round/>
@@ -17249,7 +17348,7 @@
                     </a:lnT>
                     <a:lnB w="12700" cap="flat" cmpd="sng" algn="ctr">
                       <a:solidFill>
-                        <a:srgbClr val="D5D5E5"/>
+                        <a:srgbClr val="D9D9D5"/>
                       </a:solidFill>
                       <a:prstDash val="solid"/>
                       <a:round/>
@@ -17270,7 +17369,7 @@
                       <a:r>
                         <a:rPr sz="1500" b="1">
                           <a:solidFill>
-                            <a:srgbClr val="1E1B3A"/>
+                            <a:srgbClr val="202124"/>
                           </a:solidFill>
                           <a:latin typeface="Calibri"/>
                         </a:rPr>
@@ -17281,7 +17380,7 @@
                   <a:tcPr anchor="ctr">
                     <a:lnL w="12700" cap="flat" cmpd="sng" algn="ctr">
                       <a:solidFill>
-                        <a:srgbClr val="D5D5E5"/>
+                        <a:srgbClr val="D9D9D5"/>
                       </a:solidFill>
                       <a:prstDash val="solid"/>
                       <a:round/>
@@ -17290,7 +17389,7 @@
                     </a:lnL>
                     <a:lnR w="12700" cap="flat" cmpd="sng" algn="ctr">
                       <a:solidFill>
-                        <a:srgbClr val="D5D5E5"/>
+                        <a:srgbClr val="D9D9D5"/>
                       </a:solidFill>
                       <a:prstDash val="solid"/>
                       <a:round/>
@@ -17299,7 +17398,7 @@
                     </a:lnR>
                     <a:lnT w="12700" cap="flat" cmpd="sng" algn="ctr">
                       <a:solidFill>
-                        <a:srgbClr val="D5D5E5"/>
+                        <a:srgbClr val="D9D9D5"/>
                       </a:solidFill>
                       <a:prstDash val="solid"/>
                       <a:round/>
@@ -17308,7 +17407,7 @@
                     </a:lnT>
                     <a:lnB w="12700" cap="flat" cmpd="sng" algn="ctr">
                       <a:solidFill>
-                        <a:srgbClr val="D5D5E5"/>
+                        <a:srgbClr val="D9D9D5"/>
                       </a:solidFill>
                       <a:prstDash val="solid"/>
                       <a:round/>
@@ -17316,7 +17415,7 @@
                       <a:tailEnd type="none" w="med" len="med"/>
                     </a:lnB>
                     <a:solidFill>
-                      <a:srgbClr val="ECECF7"/>
+                      <a:srgbClr val="F2F2EF"/>
                     </a:solidFill>
                   </a:tcPr>
                 </a:tc>
@@ -17329,7 +17428,7 @@
                       <a:r>
                         <a:rPr sz="1500" b="0">
                           <a:solidFill>
-                            <a:srgbClr val="1E1B3A"/>
+                            <a:srgbClr val="202124"/>
                           </a:solidFill>
                           <a:latin typeface="Calibri"/>
                         </a:rPr>
@@ -17340,7 +17439,7 @@
                   <a:tcPr anchor="ctr">
                     <a:lnL w="12700" cap="flat" cmpd="sng" algn="ctr">
                       <a:solidFill>
-                        <a:srgbClr val="D5D5E5"/>
+                        <a:srgbClr val="D9D9D5"/>
                       </a:solidFill>
                       <a:prstDash val="solid"/>
                       <a:round/>
@@ -17349,7 +17448,7 @@
                     </a:lnL>
                     <a:lnR w="12700" cap="flat" cmpd="sng" algn="ctr">
                       <a:solidFill>
-                        <a:srgbClr val="D5D5E5"/>
+                        <a:srgbClr val="D9D9D5"/>
                       </a:solidFill>
                       <a:prstDash val="solid"/>
                       <a:round/>
@@ -17358,7 +17457,7 @@
                     </a:lnR>
                     <a:lnT w="12700" cap="flat" cmpd="sng" algn="ctr">
                       <a:solidFill>
-                        <a:srgbClr val="D5D5E5"/>
+                        <a:srgbClr val="D9D9D5"/>
                       </a:solidFill>
                       <a:prstDash val="solid"/>
                       <a:round/>
@@ -17367,7 +17466,7 @@
                     </a:lnT>
                     <a:lnB w="12700" cap="flat" cmpd="sng" algn="ctr">
                       <a:solidFill>
-                        <a:srgbClr val="D5D5E5"/>
+                        <a:srgbClr val="D9D9D5"/>
                       </a:solidFill>
                       <a:prstDash val="solid"/>
                       <a:round/>
@@ -17375,7 +17474,7 @@
                       <a:tailEnd type="none" w="med" len="med"/>
                     </a:lnB>
                     <a:solidFill>
-                      <a:srgbClr val="ECECF7"/>
+                      <a:srgbClr val="F2F2EF"/>
                     </a:solidFill>
                   </a:tcPr>
                 </a:tc>
@@ -17388,7 +17487,7 @@
                       <a:r>
                         <a:rPr sz="1500" b="0">
                           <a:solidFill>
-                            <a:srgbClr val="1E1B3A"/>
+                            <a:srgbClr val="202124"/>
                           </a:solidFill>
                           <a:latin typeface="Calibri"/>
                         </a:rPr>
@@ -17399,7 +17498,7 @@
                   <a:tcPr anchor="ctr">
                     <a:lnL w="12700" cap="flat" cmpd="sng" algn="ctr">
                       <a:solidFill>
-                        <a:srgbClr val="D5D5E5"/>
+                        <a:srgbClr val="D9D9D5"/>
                       </a:solidFill>
                       <a:prstDash val="solid"/>
                       <a:round/>
@@ -17408,7 +17507,7 @@
                     </a:lnL>
                     <a:lnR w="12700" cap="flat" cmpd="sng" algn="ctr">
                       <a:solidFill>
-                        <a:srgbClr val="D5D5E5"/>
+                        <a:srgbClr val="D9D9D5"/>
                       </a:solidFill>
                       <a:prstDash val="solid"/>
                       <a:round/>
@@ -17417,7 +17516,7 @@
                     </a:lnR>
                     <a:lnT w="12700" cap="flat" cmpd="sng" algn="ctr">
                       <a:solidFill>
-                        <a:srgbClr val="D5D5E5"/>
+                        <a:srgbClr val="D9D9D5"/>
                       </a:solidFill>
                       <a:prstDash val="solid"/>
                       <a:round/>
@@ -17426,7 +17525,7 @@
                     </a:lnT>
                     <a:lnB w="12700" cap="flat" cmpd="sng" algn="ctr">
                       <a:solidFill>
-                        <a:srgbClr val="D5D5E5"/>
+                        <a:srgbClr val="D9D9D5"/>
                       </a:solidFill>
                       <a:prstDash val="solid"/>
                       <a:round/>
@@ -17434,7 +17533,7 @@
                       <a:tailEnd type="none" w="med" len="med"/>
                     </a:lnB>
                     <a:solidFill>
-                      <a:srgbClr val="ECECF7"/>
+                      <a:srgbClr val="F2F2EF"/>
                     </a:solidFill>
                   </a:tcPr>
                 </a:tc>
@@ -17449,7 +17548,7 @@
                       <a:r>
                         <a:rPr sz="1500" b="1">
                           <a:solidFill>
-                            <a:srgbClr val="1E1B3A"/>
+                            <a:srgbClr val="202124"/>
                           </a:solidFill>
                           <a:latin typeface="Calibri"/>
                         </a:rPr>
@@ -17460,7 +17559,7 @@
                   <a:tcPr anchor="ctr">
                     <a:lnL w="12700" cap="flat" cmpd="sng" algn="ctr">
                       <a:solidFill>
-                        <a:srgbClr val="D5D5E5"/>
+                        <a:srgbClr val="D9D9D5"/>
                       </a:solidFill>
                       <a:prstDash val="solid"/>
                       <a:round/>
@@ -17469,7 +17568,7 @@
                     </a:lnL>
                     <a:lnR w="12700" cap="flat" cmpd="sng" algn="ctr">
                       <a:solidFill>
-                        <a:srgbClr val="D5D5E5"/>
+                        <a:srgbClr val="D9D9D5"/>
                       </a:solidFill>
                       <a:prstDash val="solid"/>
                       <a:round/>
@@ -17478,7 +17577,7 @@
                     </a:lnR>
                     <a:lnT w="12700" cap="flat" cmpd="sng" algn="ctr">
                       <a:solidFill>
-                        <a:srgbClr val="D5D5E5"/>
+                        <a:srgbClr val="D9D9D5"/>
                       </a:solidFill>
                       <a:prstDash val="solid"/>
                       <a:round/>
@@ -17487,7 +17586,7 @@
                     </a:lnT>
                     <a:lnB w="12700" cap="flat" cmpd="sng" algn="ctr">
                       <a:solidFill>
-                        <a:srgbClr val="D5D5E5"/>
+                        <a:srgbClr val="D9D9D5"/>
                       </a:solidFill>
                       <a:prstDash val="solid"/>
                       <a:round/>
@@ -17506,7 +17605,7 @@
                       <a:r>
                         <a:rPr sz="1500" b="0">
                           <a:solidFill>
-                            <a:srgbClr val="1E1B3A"/>
+                            <a:srgbClr val="202124"/>
                           </a:solidFill>
                           <a:latin typeface="Calibri"/>
                         </a:rPr>
@@ -17517,7 +17616,7 @@
                   <a:tcPr anchor="ctr">
                     <a:lnL w="12700" cap="flat" cmpd="sng" algn="ctr">
                       <a:solidFill>
-                        <a:srgbClr val="D5D5E5"/>
+                        <a:srgbClr val="D9D9D5"/>
                       </a:solidFill>
                       <a:prstDash val="solid"/>
                       <a:round/>
@@ -17526,7 +17625,7 @@
                     </a:lnL>
                     <a:lnR w="12700" cap="flat" cmpd="sng" algn="ctr">
                       <a:solidFill>
-                        <a:srgbClr val="D5D5E5"/>
+                        <a:srgbClr val="D9D9D5"/>
                       </a:solidFill>
                       <a:prstDash val="solid"/>
                       <a:round/>
@@ -17535,7 +17634,7 @@
                     </a:lnR>
                     <a:lnT w="12700" cap="flat" cmpd="sng" algn="ctr">
                       <a:solidFill>
-                        <a:srgbClr val="D5D5E5"/>
+                        <a:srgbClr val="D9D9D5"/>
                       </a:solidFill>
                       <a:prstDash val="solid"/>
                       <a:round/>
@@ -17544,7 +17643,7 @@
                     </a:lnT>
                     <a:lnB w="12700" cap="flat" cmpd="sng" algn="ctr">
                       <a:solidFill>
-                        <a:srgbClr val="D5D5E5"/>
+                        <a:srgbClr val="D9D9D5"/>
                       </a:solidFill>
                       <a:prstDash val="solid"/>
                       <a:round/>
@@ -17563,7 +17662,7 @@
                       <a:r>
                         <a:rPr sz="1500" b="0">
                           <a:solidFill>
-                            <a:srgbClr val="1E1B3A"/>
+                            <a:srgbClr val="202124"/>
                           </a:solidFill>
                           <a:latin typeface="Calibri"/>
                         </a:rPr>
@@ -17574,7 +17673,7 @@
                   <a:tcPr anchor="ctr">
                     <a:lnL w="12700" cap="flat" cmpd="sng" algn="ctr">
                       <a:solidFill>
-                        <a:srgbClr val="D5D5E5"/>
+                        <a:srgbClr val="D9D9D5"/>
                       </a:solidFill>
                       <a:prstDash val="solid"/>
                       <a:round/>
@@ -17583,7 +17682,7 @@
                     </a:lnL>
                     <a:lnR w="12700" cap="flat" cmpd="sng" algn="ctr">
                       <a:solidFill>
-                        <a:srgbClr val="D5D5E5"/>
+                        <a:srgbClr val="D9D9D5"/>
                       </a:solidFill>
                       <a:prstDash val="solid"/>
                       <a:round/>
@@ -17592,7 +17691,7 @@
                     </a:lnR>
                     <a:lnT w="12700" cap="flat" cmpd="sng" algn="ctr">
                       <a:solidFill>
-                        <a:srgbClr val="D5D5E5"/>
+                        <a:srgbClr val="D9D9D5"/>
                       </a:solidFill>
                       <a:prstDash val="solid"/>
                       <a:round/>
@@ -17601,7 +17700,7 @@
                     </a:lnT>
                     <a:lnB w="12700" cap="flat" cmpd="sng" algn="ctr">
                       <a:solidFill>
-                        <a:srgbClr val="D5D5E5"/>
+                        <a:srgbClr val="D9D9D5"/>
                       </a:solidFill>
                       <a:prstDash val="solid"/>
                       <a:round/>
@@ -17622,7 +17721,7 @@
                       <a:r>
                         <a:rPr sz="1500" b="1">
                           <a:solidFill>
-                            <a:srgbClr val="1E1B3A"/>
+                            <a:srgbClr val="202124"/>
                           </a:solidFill>
                           <a:latin typeface="Calibri"/>
                         </a:rPr>
@@ -17633,7 +17732,7 @@
                   <a:tcPr anchor="ctr">
                     <a:lnL w="12700" cap="flat" cmpd="sng" algn="ctr">
                       <a:solidFill>
-                        <a:srgbClr val="D5D5E5"/>
+                        <a:srgbClr val="D9D9D5"/>
                       </a:solidFill>
                       <a:prstDash val="solid"/>
                       <a:round/>
@@ -17642,7 +17741,7 @@
                     </a:lnL>
                     <a:lnR w="12700" cap="flat" cmpd="sng" algn="ctr">
                       <a:solidFill>
-                        <a:srgbClr val="D5D5E5"/>
+                        <a:srgbClr val="D9D9D5"/>
                       </a:solidFill>
                       <a:prstDash val="solid"/>
                       <a:round/>
@@ -17651,7 +17750,7 @@
                     </a:lnR>
                     <a:lnT w="12700" cap="flat" cmpd="sng" algn="ctr">
                       <a:solidFill>
-                        <a:srgbClr val="D5D5E5"/>
+                        <a:srgbClr val="D9D9D5"/>
                       </a:solidFill>
                       <a:prstDash val="solid"/>
                       <a:round/>
@@ -17660,7 +17759,7 @@
                     </a:lnT>
                     <a:lnB w="12700" cap="flat" cmpd="sng" algn="ctr">
                       <a:solidFill>
-                        <a:srgbClr val="D5D5E5"/>
+                        <a:srgbClr val="D9D9D5"/>
                       </a:solidFill>
                       <a:prstDash val="solid"/>
                       <a:round/>
@@ -17668,7 +17767,7 @@
                       <a:tailEnd type="none" w="med" len="med"/>
                     </a:lnB>
                     <a:solidFill>
-                      <a:srgbClr val="ECECF7"/>
+                      <a:srgbClr val="F2F2EF"/>
                     </a:solidFill>
                   </a:tcPr>
                 </a:tc>
@@ -17681,7 +17780,7 @@
                       <a:r>
                         <a:rPr sz="1500" b="0">
                           <a:solidFill>
-                            <a:srgbClr val="1E1B3A"/>
+                            <a:srgbClr val="202124"/>
                           </a:solidFill>
                           <a:latin typeface="Calibri"/>
                         </a:rPr>
@@ -17692,7 +17791,7 @@
                   <a:tcPr anchor="ctr">
                     <a:lnL w="12700" cap="flat" cmpd="sng" algn="ctr">
                       <a:solidFill>
-                        <a:srgbClr val="D5D5E5"/>
+                        <a:srgbClr val="D9D9D5"/>
                       </a:solidFill>
                       <a:prstDash val="solid"/>
                       <a:round/>
@@ -17701,7 +17800,7 @@
                     </a:lnL>
                     <a:lnR w="12700" cap="flat" cmpd="sng" algn="ctr">
                       <a:solidFill>
-                        <a:srgbClr val="D5D5E5"/>
+                        <a:srgbClr val="D9D9D5"/>
                       </a:solidFill>
                       <a:prstDash val="solid"/>
                       <a:round/>
@@ -17710,7 +17809,7 @@
                     </a:lnR>
                     <a:lnT w="12700" cap="flat" cmpd="sng" algn="ctr">
                       <a:solidFill>
-                        <a:srgbClr val="D5D5E5"/>
+                        <a:srgbClr val="D9D9D5"/>
                       </a:solidFill>
                       <a:prstDash val="solid"/>
                       <a:round/>
@@ -17719,7 +17818,7 @@
                     </a:lnT>
                     <a:lnB w="12700" cap="flat" cmpd="sng" algn="ctr">
                       <a:solidFill>
-                        <a:srgbClr val="D5D5E5"/>
+                        <a:srgbClr val="D9D9D5"/>
                       </a:solidFill>
                       <a:prstDash val="solid"/>
                       <a:round/>
@@ -17727,7 +17826,7 @@
                       <a:tailEnd type="none" w="med" len="med"/>
                     </a:lnB>
                     <a:solidFill>
-                      <a:srgbClr val="ECECF7"/>
+                      <a:srgbClr val="F2F2EF"/>
                     </a:solidFill>
                   </a:tcPr>
                 </a:tc>
@@ -17740,7 +17839,7 @@
                       <a:r>
                         <a:rPr sz="1500" b="0">
                           <a:solidFill>
-                            <a:srgbClr val="1E1B3A"/>
+                            <a:srgbClr val="202124"/>
                           </a:solidFill>
                           <a:latin typeface="Calibri"/>
                         </a:rPr>
@@ -17751,7 +17850,7 @@
                   <a:tcPr anchor="ctr">
                     <a:lnL w="12700" cap="flat" cmpd="sng" algn="ctr">
                       <a:solidFill>
-                        <a:srgbClr val="D5D5E5"/>
+                        <a:srgbClr val="D9D9D5"/>
                       </a:solidFill>
                       <a:prstDash val="solid"/>
                       <a:round/>
@@ -17760,7 +17859,7 @@
                     </a:lnL>
                     <a:lnR w="12700" cap="flat" cmpd="sng" algn="ctr">
                       <a:solidFill>
-                        <a:srgbClr val="D5D5E5"/>
+                        <a:srgbClr val="D9D9D5"/>
                       </a:solidFill>
                       <a:prstDash val="solid"/>
                       <a:round/>
@@ -17769,7 +17868,7 @@
                     </a:lnR>
                     <a:lnT w="12700" cap="flat" cmpd="sng" algn="ctr">
                       <a:solidFill>
-                        <a:srgbClr val="D5D5E5"/>
+                        <a:srgbClr val="D9D9D5"/>
                       </a:solidFill>
                       <a:prstDash val="solid"/>
                       <a:round/>
@@ -17778,7 +17877,7 @@
                     </a:lnT>
                     <a:lnB w="12700" cap="flat" cmpd="sng" algn="ctr">
                       <a:solidFill>
-                        <a:srgbClr val="D5D5E5"/>
+                        <a:srgbClr val="D9D9D5"/>
                       </a:solidFill>
                       <a:prstDash val="solid"/>
                       <a:round/>
@@ -17786,7 +17885,7 @@
                       <a:tailEnd type="none" w="med" len="med"/>
                     </a:lnB>
                     <a:solidFill>
-                      <a:srgbClr val="ECECF7"/>
+                      <a:srgbClr val="F2F2EF"/>
                     </a:solidFill>
                   </a:tcPr>
                 </a:tc>
@@ -17801,7 +17900,7 @@
                       <a:r>
                         <a:rPr sz="1500" b="1">
                           <a:solidFill>
-                            <a:srgbClr val="1E1B3A"/>
+                            <a:srgbClr val="202124"/>
                           </a:solidFill>
                           <a:latin typeface="Calibri"/>
                         </a:rPr>
@@ -17812,7 +17911,7 @@
                   <a:tcPr anchor="ctr">
                     <a:lnL w="12700" cap="flat" cmpd="sng" algn="ctr">
                       <a:solidFill>
-                        <a:srgbClr val="D5D5E5"/>
+                        <a:srgbClr val="D9D9D5"/>
                       </a:solidFill>
                       <a:prstDash val="solid"/>
                       <a:round/>
@@ -17821,7 +17920,7 @@
                     </a:lnL>
                     <a:lnR w="12700" cap="flat" cmpd="sng" algn="ctr">
                       <a:solidFill>
-                        <a:srgbClr val="D5D5E5"/>
+                        <a:srgbClr val="D9D9D5"/>
                       </a:solidFill>
                       <a:prstDash val="solid"/>
                       <a:round/>
@@ -17830,7 +17929,7 @@
                     </a:lnR>
                     <a:lnT w="12700" cap="flat" cmpd="sng" algn="ctr">
                       <a:solidFill>
-                        <a:srgbClr val="D5D5E5"/>
+                        <a:srgbClr val="D9D9D5"/>
                       </a:solidFill>
                       <a:prstDash val="solid"/>
                       <a:round/>
@@ -17839,7 +17938,7 @@
                     </a:lnT>
                     <a:lnB w="12700" cap="flat" cmpd="sng" algn="ctr">
                       <a:solidFill>
-                        <a:srgbClr val="D5D5E5"/>
+                        <a:srgbClr val="D9D9D5"/>
                       </a:solidFill>
                       <a:prstDash val="solid"/>
                       <a:round/>
@@ -17858,7 +17957,7 @@
                       <a:r>
                         <a:rPr sz="1500" b="0">
                           <a:solidFill>
-                            <a:srgbClr val="1E1B3A"/>
+                            <a:srgbClr val="202124"/>
                           </a:solidFill>
                           <a:latin typeface="Calibri"/>
                         </a:rPr>
@@ -17869,7 +17968,7 @@
                   <a:tcPr anchor="ctr">
                     <a:lnL w="12700" cap="flat" cmpd="sng" algn="ctr">
                       <a:solidFill>
-                        <a:srgbClr val="D5D5E5"/>
+                        <a:srgbClr val="D9D9D5"/>
                       </a:solidFill>
                       <a:prstDash val="solid"/>
                       <a:round/>
@@ -17878,7 +17977,7 @@
                     </a:lnL>
                     <a:lnR w="12700" cap="flat" cmpd="sng" algn="ctr">
                       <a:solidFill>
-                        <a:srgbClr val="D5D5E5"/>
+                        <a:srgbClr val="D9D9D5"/>
                       </a:solidFill>
                       <a:prstDash val="solid"/>
                       <a:round/>
@@ -17887,7 +17986,7 @@
                     </a:lnR>
                     <a:lnT w="12700" cap="flat" cmpd="sng" algn="ctr">
                       <a:solidFill>
-                        <a:srgbClr val="D5D5E5"/>
+                        <a:srgbClr val="D9D9D5"/>
                       </a:solidFill>
                       <a:prstDash val="solid"/>
                       <a:round/>
@@ -17896,7 +17995,7 @@
                     </a:lnT>
                     <a:lnB w="12700" cap="flat" cmpd="sng" algn="ctr">
                       <a:solidFill>
-                        <a:srgbClr val="D5D5E5"/>
+                        <a:srgbClr val="D9D9D5"/>
                       </a:solidFill>
                       <a:prstDash val="solid"/>
                       <a:round/>
@@ -17915,7 +18014,7 @@
                       <a:r>
                         <a:rPr sz="1500" b="0">
                           <a:solidFill>
-                            <a:srgbClr val="1E1B3A"/>
+                            <a:srgbClr val="202124"/>
                           </a:solidFill>
                           <a:latin typeface="Calibri"/>
                         </a:rPr>
@@ -17926,7 +18025,7 @@
                   <a:tcPr anchor="ctr">
                     <a:lnL w="12700" cap="flat" cmpd="sng" algn="ctr">
                       <a:solidFill>
-                        <a:srgbClr val="D5D5E5"/>
+                        <a:srgbClr val="D9D9D5"/>
                       </a:solidFill>
                       <a:prstDash val="solid"/>
                       <a:round/>
@@ -17935,7 +18034,7 @@
                     </a:lnL>
                     <a:lnR w="12700" cap="flat" cmpd="sng" algn="ctr">
                       <a:solidFill>
-                        <a:srgbClr val="D5D5E5"/>
+                        <a:srgbClr val="D9D9D5"/>
                       </a:solidFill>
                       <a:prstDash val="solid"/>
                       <a:round/>
@@ -17944,7 +18043,7 @@
                     </a:lnR>
                     <a:lnT w="12700" cap="flat" cmpd="sng" algn="ctr">
                       <a:solidFill>
-                        <a:srgbClr val="D5D5E5"/>
+                        <a:srgbClr val="D9D9D5"/>
                       </a:solidFill>
                       <a:prstDash val="solid"/>
                       <a:round/>
@@ -17953,7 +18052,7 @@
                     </a:lnT>
                     <a:lnB w="12700" cap="flat" cmpd="sng" algn="ctr">
                       <a:solidFill>
-                        <a:srgbClr val="D5D5E5"/>
+                        <a:srgbClr val="D9D9D5"/>
                       </a:solidFill>
                       <a:prstDash val="solid"/>
                       <a:round/>
@@ -17984,7 +18083,7 @@
           </a:prstGeom>
           <a:ln w="50800">
             <a:solidFill>
-              <a:srgbClr val="E8604C"/>
+              <a:srgbClr val="F2A900"/>
             </a:solidFill>
           </a:ln>
         </p:spPr>
@@ -18029,7 +18128,7 @@
             <a:r>
               <a:rPr sz="1600" b="0">
                 <a:solidFill>
-                  <a:srgbClr val="56566E"/>
+                  <a:srgbClr val="57575A"/>
                 </a:solidFill>
                 <a:latin typeface="Calibri"/>
               </a:rPr>
@@ -18063,7 +18162,7 @@
             <a:r>
               <a:rPr sz="1000" b="0">
                 <a:solidFill>
-                  <a:srgbClr val="56566E"/>
+                  <a:srgbClr val="57575A"/>
                 </a:solidFill>
                 <a:latin typeface="Calibri"/>
               </a:rPr>
@@ -18098,7 +18197,7 @@
             <a:r>
               <a:rPr sz="1000" b="0">
                 <a:solidFill>
-                  <a:srgbClr val="56566E"/>
+                  <a:srgbClr val="57575A"/>
                 </a:solidFill>
                 <a:latin typeface="Calibri"/>
               </a:rPr>
@@ -18132,7 +18231,7 @@
             <a:r>
               <a:rPr sz="1400" b="0">
                 <a:solidFill>
-                  <a:srgbClr val="56566E"/>
+                  <a:srgbClr val="57575A"/>
                 </a:solidFill>
                 <a:latin typeface="Calibri"/>
               </a:rPr>
@@ -18146,9 +18245,18 @@
   <p:clrMapOvr>
     <a:masterClrMapping/>
   </p:clrMapOvr>
-  <p:transition spd="med" advTm="25000">
-    <p:push dir="u"/>
-  </p:transition>
+  <mc:AlternateContent xmlns:mc="http://schemas.openxmlformats.org/markup-compatibility/2006">
+    <mc:Choice xmlns:p14="http://schemas.microsoft.com/office/powerpoint/2010/main" Requires="p14">
+      <p:transition spd="slow" p14:dur="1500" advTm="10000">
+        <p:push dir="u"/>
+      </p:transition>
+    </mc:Choice>
+    <mc:Fallback>
+      <p:transition spd="slow" advTm="10000">
+        <p:push dir="u"/>
+      </p:transition>
+    </mc:Fallback>
+  </mc:AlternateContent>
   <p:timing>
     <p:tnLst>
       <p:par>
@@ -18416,7 +18524,7 @@
     <p:bg>
       <p:bgPr>
         <a:solidFill>
-          <a:srgbClr val="F4F4FA"/>
+          <a:srgbClr val="F5F5F3"/>
         </a:solidFill>
         <a:effectLst/>
       </p:bgPr>
@@ -18443,7 +18551,7 @@
             <a:avLst/>
           </a:prstGeom>
           <a:solidFill>
-            <a:srgbClr val="312E81"/>
+            <a:srgbClr val="202124"/>
           </a:solidFill>
           <a:ln>
             <a:noFill/>
@@ -18562,7 +18670,7 @@
             <a:avLst/>
           </a:prstGeom>
           <a:solidFill>
-            <a:srgbClr val="E8604C"/>
+            <a:srgbClr val="F2A900"/>
           </a:solidFill>
           <a:ln>
             <a:noFill/>
@@ -18615,13 +18723,13 @@
                 <a:spcPts val="1000"/>
               </a:spcAft>
               <a:buClr>
-                <a:srgbClr val="E8604C"/>
+                <a:srgbClr val="F2A900"/>
               </a:buClr>
             </a:pPr>
             <a:r>
               <a:rPr sz="2000" b="1">
                 <a:solidFill>
-                  <a:srgbClr val="312E81"/>
+                  <a:srgbClr val="8A6100"/>
                 </a:solidFill>
                 <a:latin typeface="Calibri"/>
               </a:rPr>
@@ -18630,7 +18738,7 @@
             <a:r>
               <a:rPr sz="2000" b="0">
                 <a:solidFill>
-                  <a:srgbClr val="1E1B3A"/>
+                  <a:srgbClr val="202124"/>
                 </a:solidFill>
                 <a:latin typeface="Calibri"/>
               </a:rPr>
@@ -18643,13 +18751,13 @@
                 <a:spcPts val="1000"/>
               </a:spcAft>
               <a:buClr>
-                <a:srgbClr val="E8604C"/>
+                <a:srgbClr val="F2A900"/>
               </a:buClr>
             </a:pPr>
             <a:r>
               <a:rPr sz="2000" b="1">
                 <a:solidFill>
-                  <a:srgbClr val="312E81"/>
+                  <a:srgbClr val="8A6100"/>
                 </a:solidFill>
                 <a:latin typeface="Calibri"/>
               </a:rPr>
@@ -18658,7 +18766,7 @@
             <a:r>
               <a:rPr sz="2000" b="0">
                 <a:solidFill>
-                  <a:srgbClr val="1E1B3A"/>
+                  <a:srgbClr val="202124"/>
                 </a:solidFill>
                 <a:latin typeface="Calibri"/>
               </a:rPr>
@@ -18671,13 +18779,13 @@
                 <a:spcPts val="1000"/>
               </a:spcAft>
               <a:buClr>
-                <a:srgbClr val="E8604C"/>
+                <a:srgbClr val="F2A900"/>
               </a:buClr>
             </a:pPr>
             <a:r>
               <a:rPr sz="2000" b="1">
                 <a:solidFill>
-                  <a:srgbClr val="312E81"/>
+                  <a:srgbClr val="8A6100"/>
                 </a:solidFill>
                 <a:latin typeface="Calibri"/>
               </a:rPr>
@@ -18686,7 +18794,7 @@
             <a:r>
               <a:rPr sz="2000" b="0">
                 <a:solidFill>
-                  <a:srgbClr val="1E1B3A"/>
+                  <a:srgbClr val="202124"/>
                 </a:solidFill>
                 <a:latin typeface="Calibri"/>
               </a:rPr>
@@ -18699,13 +18807,13 @@
                 <a:spcPts val="1000"/>
               </a:spcAft>
               <a:buClr>
-                <a:srgbClr val="E8604C"/>
+                <a:srgbClr val="F2A900"/>
               </a:buClr>
             </a:pPr>
             <a:r>
               <a:rPr sz="2000" b="1">
                 <a:solidFill>
-                  <a:srgbClr val="312E81"/>
+                  <a:srgbClr val="8A6100"/>
                 </a:solidFill>
                 <a:latin typeface="Calibri"/>
               </a:rPr>
@@ -18714,7 +18822,7 @@
             <a:r>
               <a:rPr sz="2000" b="0">
                 <a:solidFill>
-                  <a:srgbClr val="1E1B3A"/>
+                  <a:srgbClr val="202124"/>
                 </a:solidFill>
                 <a:latin typeface="Calibri"/>
               </a:rPr>
@@ -18727,13 +18835,13 @@
                 <a:spcPts val="1000"/>
               </a:spcAft>
               <a:buClr>
-                <a:srgbClr val="E8604C"/>
+                <a:srgbClr val="F2A900"/>
               </a:buClr>
             </a:pPr>
             <a:r>
               <a:rPr sz="2000" b="1">
                 <a:solidFill>
-                  <a:srgbClr val="312E81"/>
+                  <a:srgbClr val="8A6100"/>
                 </a:solidFill>
                 <a:latin typeface="Calibri"/>
               </a:rPr>
@@ -18742,7 +18850,7 @@
             <a:r>
               <a:rPr sz="2000" b="0">
                 <a:solidFill>
-                  <a:srgbClr val="1E1B3A"/>
+                  <a:srgbClr val="202124"/>
                 </a:solidFill>
                 <a:latin typeface="Calibri"/>
               </a:rPr>
@@ -18767,7 +18875,7 @@
           </a:prstGeom>
           <a:ln w="50800">
             <a:solidFill>
-              <a:srgbClr val="E8604C"/>
+              <a:srgbClr val="F2A900"/>
             </a:solidFill>
           </a:ln>
         </p:spPr>
@@ -18812,7 +18920,7 @@
             <a:r>
               <a:rPr sz="1600" b="0">
                 <a:solidFill>
-                  <a:srgbClr val="56566E"/>
+                  <a:srgbClr val="57575A"/>
                 </a:solidFill>
                 <a:latin typeface="Calibri"/>
               </a:rPr>
@@ -18846,7 +18954,7 @@
             <a:r>
               <a:rPr sz="1000" b="0">
                 <a:solidFill>
-                  <a:srgbClr val="56566E"/>
+                  <a:srgbClr val="57575A"/>
                 </a:solidFill>
                 <a:latin typeface="Calibri"/>
               </a:rPr>
@@ -18881,7 +18989,7 @@
             <a:r>
               <a:rPr sz="1000" b="0">
                 <a:solidFill>
-                  <a:srgbClr val="56566E"/>
+                  <a:srgbClr val="57575A"/>
                 </a:solidFill>
                 <a:latin typeface="Calibri"/>
               </a:rPr>
@@ -18895,9 +19003,18 @@
   <p:clrMapOvr>
     <a:masterClrMapping/>
   </p:clrMapOvr>
-  <p:transition spd="med" advTm="30000">
-    <p:push dir="u"/>
-  </p:transition>
+  <mc:AlternateContent xmlns:mc="http://schemas.openxmlformats.org/markup-compatibility/2006">
+    <mc:Choice xmlns:p14="http://schemas.microsoft.com/office/powerpoint/2010/main" Requires="p14">
+      <p:transition spd="slow" p14:dur="1500" advTm="10000">
+        <p:push dir="u"/>
+      </p:transition>
+    </mc:Choice>
+    <mc:Fallback>
+      <p:transition spd="slow" advTm="10000">
+        <p:push dir="u"/>
+      </p:transition>
+    </mc:Fallback>
+  </mc:AlternateContent>
   <p:timing>
     <p:tnLst>
       <p:par>
@@ -19193,7 +19310,7 @@
     <p:bg>
       <p:bgPr>
         <a:solidFill>
-          <a:srgbClr val="F4F4FA"/>
+          <a:srgbClr val="F5F5F3"/>
         </a:solidFill>
         <a:effectLst/>
       </p:bgPr>
@@ -19220,7 +19337,7 @@
             <a:avLst/>
           </a:prstGeom>
           <a:solidFill>
-            <a:srgbClr val="312E81"/>
+            <a:srgbClr val="202124"/>
           </a:solidFill>
           <a:ln>
             <a:noFill/>
@@ -19317,7 +19434,7 @@
           </a:prstGeom>
           <a:ln w="50800">
             <a:solidFill>
-              <a:srgbClr val="E8604C"/>
+              <a:srgbClr val="F2A900"/>
             </a:solidFill>
           </a:ln>
         </p:spPr>
@@ -19362,7 +19479,7 @@
             <a:r>
               <a:rPr sz="1600" b="0">
                 <a:solidFill>
-                  <a:srgbClr val="56566E"/>
+                  <a:srgbClr val="57575A"/>
                 </a:solidFill>
                 <a:latin typeface="Calibri"/>
               </a:rPr>
@@ -19396,7 +19513,7 @@
             <a:r>
               <a:rPr sz="1000" b="0">
                 <a:solidFill>
-                  <a:srgbClr val="56566E"/>
+                  <a:srgbClr val="57575A"/>
                 </a:solidFill>
                 <a:latin typeface="Calibri"/>
               </a:rPr>
@@ -19431,7 +19548,7 @@
             <a:r>
               <a:rPr sz="1000" b="0">
                 <a:solidFill>
-                  <a:srgbClr val="56566E"/>
+                  <a:srgbClr val="57575A"/>
                 </a:solidFill>
                 <a:latin typeface="Calibri"/>
               </a:rPr>
@@ -19498,7 +19615,7 @@
             <a:avLst/>
           </a:prstGeom>
           <a:solidFill>
-            <a:srgbClr val="E8604C"/>
+            <a:srgbClr val="F2A900"/>
           </a:solidFill>
           <a:ln>
             <a:noFill/>
@@ -19556,7 +19673,7 @@
             <a:r>
               <a:rPr sz="1600" b="1">
                 <a:solidFill>
-                  <a:srgbClr val="1E1B3A"/>
+                  <a:srgbClr val="202124"/>
                 </a:solidFill>
                 <a:latin typeface="Calibri"/>
               </a:rPr>
@@ -19565,7 +19682,7 @@
             <a:r>
               <a:rPr sz="1600" b="0">
                 <a:solidFill>
-                  <a:srgbClr val="1E1B3A"/>
+                  <a:srgbClr val="202124"/>
                 </a:solidFill>
                 <a:latin typeface="Calibri"/>
               </a:rPr>
@@ -19581,7 +19698,7 @@
             <a:r>
               <a:rPr sz="1600" b="1">
                 <a:solidFill>
-                  <a:srgbClr val="1E1B3A"/>
+                  <a:srgbClr val="202124"/>
                 </a:solidFill>
                 <a:latin typeface="Calibri"/>
               </a:rPr>
@@ -19590,7 +19707,7 @@
             <a:r>
               <a:rPr sz="1600" b="0">
                 <a:solidFill>
-                  <a:srgbClr val="1E1B3A"/>
+                  <a:srgbClr val="202124"/>
                 </a:solidFill>
                 <a:latin typeface="Calibri"/>
               </a:rPr>
@@ -19606,7 +19723,7 @@
             <a:r>
               <a:rPr sz="1600" b="1">
                 <a:solidFill>
-                  <a:srgbClr val="1E1B3A"/>
+                  <a:srgbClr val="202124"/>
                 </a:solidFill>
                 <a:latin typeface="Calibri"/>
               </a:rPr>
@@ -19615,7 +19732,7 @@
             <a:r>
               <a:rPr sz="1600" b="0">
                 <a:solidFill>
-                  <a:srgbClr val="1E1B3A"/>
+                  <a:srgbClr val="202124"/>
                 </a:solidFill>
                 <a:latin typeface="Calibri"/>
               </a:rPr>
@@ -19631,7 +19748,7 @@
             <a:r>
               <a:rPr sz="1600" b="1">
                 <a:solidFill>
-                  <a:srgbClr val="1E1B3A"/>
+                  <a:srgbClr val="202124"/>
                 </a:solidFill>
                 <a:latin typeface="Calibri"/>
               </a:rPr>
@@ -19640,7 +19757,7 @@
             <a:r>
               <a:rPr sz="1600" b="0">
                 <a:solidFill>
-                  <a:srgbClr val="1E1B3A"/>
+                  <a:srgbClr val="202124"/>
                 </a:solidFill>
                 <a:latin typeface="Calibri"/>
               </a:rPr>
@@ -19654,9 +19771,18 @@
   <p:clrMapOvr>
     <a:masterClrMapping/>
   </p:clrMapOvr>
-  <p:transition spd="med" advTm="30000">
-    <p:push dir="u"/>
-  </p:transition>
+  <mc:AlternateContent xmlns:mc="http://schemas.openxmlformats.org/markup-compatibility/2006">
+    <mc:Choice xmlns:p14="http://schemas.microsoft.com/office/powerpoint/2010/main" Requires="p14">
+      <p:transition spd="slow" p14:dur="1500" advTm="10000">
+        <p:push dir="u"/>
+      </p:transition>
+    </mc:Choice>
+    <mc:Fallback>
+      <p:transition spd="slow" advTm="10000">
+        <p:push dir="u"/>
+      </p:transition>
+    </mc:Fallback>
+  </mc:AlternateContent>
   <p:timing>
     <p:tnLst>
       <p:par>
@@ -19999,7 +20125,7 @@
     <p:bg>
       <p:bgPr>
         <a:solidFill>
-          <a:srgbClr val="F4F4FA"/>
+          <a:srgbClr val="F5F5F3"/>
         </a:solidFill>
         <a:effectLst/>
       </p:bgPr>
@@ -20026,7 +20152,7 @@
             <a:avLst/>
           </a:prstGeom>
           <a:solidFill>
-            <a:srgbClr val="312E81"/>
+            <a:srgbClr val="202124"/>
           </a:solidFill>
           <a:ln>
             <a:noFill/>
@@ -20123,7 +20249,7 @@
           </a:prstGeom>
           <a:ln w="50800">
             <a:solidFill>
-              <a:srgbClr val="E8604C"/>
+              <a:srgbClr val="F2A900"/>
             </a:solidFill>
           </a:ln>
         </p:spPr>
@@ -20168,7 +20294,7 @@
             <a:r>
               <a:rPr sz="1600" b="0">
                 <a:solidFill>
-                  <a:srgbClr val="56566E"/>
+                  <a:srgbClr val="57575A"/>
                 </a:solidFill>
                 <a:latin typeface="Calibri"/>
               </a:rPr>
@@ -20202,7 +20328,7 @@
             <a:r>
               <a:rPr sz="1000" b="0">
                 <a:solidFill>
-                  <a:srgbClr val="56566E"/>
+                  <a:srgbClr val="57575A"/>
                 </a:solidFill>
                 <a:latin typeface="Calibri"/>
               </a:rPr>
@@ -20237,7 +20363,7 @@
             <a:r>
               <a:rPr sz="1000" b="0">
                 <a:solidFill>
-                  <a:srgbClr val="56566E"/>
+                  <a:srgbClr val="57575A"/>
                 </a:solidFill>
                 <a:latin typeface="Calibri"/>
               </a:rPr>
@@ -20304,7 +20430,7 @@
             <a:avLst/>
           </a:prstGeom>
           <a:solidFill>
-            <a:srgbClr val="E8604C"/>
+            <a:srgbClr val="F2A900"/>
           </a:solidFill>
           <a:ln>
             <a:noFill/>
@@ -20362,7 +20488,7 @@
             <a:r>
               <a:rPr sz="1600" b="1">
                 <a:solidFill>
-                  <a:srgbClr val="1E1B3A"/>
+                  <a:srgbClr val="202124"/>
                 </a:solidFill>
                 <a:latin typeface="Calibri"/>
               </a:rPr>
@@ -20371,7 +20497,7 @@
             <a:r>
               <a:rPr sz="1600" b="0">
                 <a:solidFill>
-                  <a:srgbClr val="1E1B3A"/>
+                  <a:srgbClr val="202124"/>
                 </a:solidFill>
                 <a:latin typeface="Calibri"/>
               </a:rPr>
@@ -20387,7 +20513,7 @@
             <a:r>
               <a:rPr sz="1600" b="1">
                 <a:solidFill>
-                  <a:srgbClr val="1E1B3A"/>
+                  <a:srgbClr val="202124"/>
                 </a:solidFill>
                 <a:latin typeface="Calibri"/>
               </a:rPr>
@@ -20396,7 +20522,7 @@
             <a:r>
               <a:rPr sz="1600" b="0">
                 <a:solidFill>
-                  <a:srgbClr val="1E1B3A"/>
+                  <a:srgbClr val="202124"/>
                 </a:solidFill>
                 <a:latin typeface="Calibri"/>
               </a:rPr>
@@ -20412,7 +20538,7 @@
             <a:r>
               <a:rPr sz="1600" b="1">
                 <a:solidFill>
-                  <a:srgbClr val="1E1B3A"/>
+                  <a:srgbClr val="202124"/>
                 </a:solidFill>
                 <a:latin typeface="Calibri"/>
               </a:rPr>
@@ -20421,7 +20547,7 @@
             <a:r>
               <a:rPr sz="1600" b="0">
                 <a:solidFill>
-                  <a:srgbClr val="1E1B3A"/>
+                  <a:srgbClr val="202124"/>
                 </a:solidFill>
                 <a:latin typeface="Calibri"/>
               </a:rPr>
@@ -20437,7 +20563,7 @@
             <a:r>
               <a:rPr sz="1600" b="1">
                 <a:solidFill>
-                  <a:srgbClr val="1E1B3A"/>
+                  <a:srgbClr val="202124"/>
                 </a:solidFill>
                 <a:latin typeface="Calibri"/>
               </a:rPr>
@@ -20446,7 +20572,7 @@
             <a:r>
               <a:rPr sz="1600" b="0">
                 <a:solidFill>
-                  <a:srgbClr val="1E1B3A"/>
+                  <a:srgbClr val="202124"/>
                 </a:solidFill>
                 <a:latin typeface="Calibri"/>
               </a:rPr>
@@ -20460,9 +20586,18 @@
   <p:clrMapOvr>
     <a:masterClrMapping/>
   </p:clrMapOvr>
-  <p:transition spd="med" advTm="30000">
-    <p:push dir="u"/>
-  </p:transition>
+  <mc:AlternateContent xmlns:mc="http://schemas.openxmlformats.org/markup-compatibility/2006">
+    <mc:Choice xmlns:p14="http://schemas.microsoft.com/office/powerpoint/2010/main" Requires="p14">
+      <p:transition spd="slow" p14:dur="1500" advTm="10000">
+        <p:push dir="u"/>
+      </p:transition>
+    </mc:Choice>
+    <mc:Fallback>
+      <p:transition spd="slow" advTm="10000">
+        <p:push dir="u"/>
+      </p:transition>
+    </mc:Fallback>
+  </mc:AlternateContent>
   <p:timing>
     <p:tnLst>
       <p:par>
@@ -20805,7 +20940,7 @@
     <p:bg>
       <p:bgPr>
         <a:solidFill>
-          <a:srgbClr val="F4F4FA"/>
+          <a:srgbClr val="F5F5F3"/>
         </a:solidFill>
         <a:effectLst/>
       </p:bgPr>
@@ -20832,7 +20967,7 @@
             <a:avLst/>
           </a:prstGeom>
           <a:solidFill>
-            <a:srgbClr val="312E81"/>
+            <a:srgbClr val="202124"/>
           </a:solidFill>
           <a:ln>
             <a:noFill/>
@@ -20940,7 +21075,7 @@
                   <a:tcPr anchor="ctr">
                     <a:lnL w="12700" cap="flat" cmpd="sng" algn="ctr">
                       <a:solidFill>
-                        <a:srgbClr val="D5D5E5"/>
+                        <a:srgbClr val="D9D9D5"/>
                       </a:solidFill>
                       <a:prstDash val="solid"/>
                       <a:round/>
@@ -20949,7 +21084,7 @@
                     </a:lnL>
                     <a:lnR w="12700" cap="flat" cmpd="sng" algn="ctr">
                       <a:solidFill>
-                        <a:srgbClr val="D5D5E5"/>
+                        <a:srgbClr val="D9D9D5"/>
                       </a:solidFill>
                       <a:prstDash val="solid"/>
                       <a:round/>
@@ -20958,7 +21093,7 @@
                     </a:lnR>
                     <a:lnT w="12700" cap="flat" cmpd="sng" algn="ctr">
                       <a:solidFill>
-                        <a:srgbClr val="D5D5E5"/>
+                        <a:srgbClr val="D9D9D5"/>
                       </a:solidFill>
                       <a:prstDash val="solid"/>
                       <a:round/>
@@ -20967,7 +21102,7 @@
                     </a:lnT>
                     <a:lnB w="12700" cap="flat" cmpd="sng" algn="ctr">
                       <a:solidFill>
-                        <a:srgbClr val="D5D5E5"/>
+                        <a:srgbClr val="D9D9D5"/>
                       </a:solidFill>
                       <a:prstDash val="solid"/>
                       <a:round/>
@@ -20975,7 +21110,7 @@
                       <a:tailEnd type="none" w="med" len="med"/>
                     </a:lnB>
                     <a:solidFill>
-                      <a:srgbClr val="312E81"/>
+                      <a:srgbClr val="202124"/>
                     </a:solidFill>
                   </a:tcPr>
                 </a:tc>
@@ -20999,7 +21134,7 @@
                   <a:tcPr anchor="ctr">
                     <a:lnL w="12700" cap="flat" cmpd="sng" algn="ctr">
                       <a:solidFill>
-                        <a:srgbClr val="D5D5E5"/>
+                        <a:srgbClr val="D9D9D5"/>
                       </a:solidFill>
                       <a:prstDash val="solid"/>
                       <a:round/>
@@ -21008,7 +21143,7 @@
                     </a:lnL>
                     <a:lnR w="12700" cap="flat" cmpd="sng" algn="ctr">
                       <a:solidFill>
-                        <a:srgbClr val="D5D5E5"/>
+                        <a:srgbClr val="D9D9D5"/>
                       </a:solidFill>
                       <a:prstDash val="solid"/>
                       <a:round/>
@@ -21017,7 +21152,7 @@
                     </a:lnR>
                     <a:lnT w="12700" cap="flat" cmpd="sng" algn="ctr">
                       <a:solidFill>
-                        <a:srgbClr val="D5D5E5"/>
+                        <a:srgbClr val="D9D9D5"/>
                       </a:solidFill>
                       <a:prstDash val="solid"/>
                       <a:round/>
@@ -21026,7 +21161,7 @@
                     </a:lnT>
                     <a:lnB w="12700" cap="flat" cmpd="sng" algn="ctr">
                       <a:solidFill>
-                        <a:srgbClr val="D5D5E5"/>
+                        <a:srgbClr val="D9D9D5"/>
                       </a:solidFill>
                       <a:prstDash val="solid"/>
                       <a:round/>
@@ -21034,7 +21169,7 @@
                       <a:tailEnd type="none" w="med" len="med"/>
                     </a:lnB>
                     <a:solidFill>
-                      <a:srgbClr val="312E81"/>
+                      <a:srgbClr val="202124"/>
                     </a:solidFill>
                   </a:tcPr>
                 </a:tc>
@@ -21058,7 +21193,7 @@
                   <a:tcPr anchor="ctr">
                     <a:lnL w="12700" cap="flat" cmpd="sng" algn="ctr">
                       <a:solidFill>
-                        <a:srgbClr val="D5D5E5"/>
+                        <a:srgbClr val="D9D9D5"/>
                       </a:solidFill>
                       <a:prstDash val="solid"/>
                       <a:round/>
@@ -21067,7 +21202,7 @@
                     </a:lnL>
                     <a:lnR w="12700" cap="flat" cmpd="sng" algn="ctr">
                       <a:solidFill>
-                        <a:srgbClr val="D5D5E5"/>
+                        <a:srgbClr val="D9D9D5"/>
                       </a:solidFill>
                       <a:prstDash val="solid"/>
                       <a:round/>
@@ -21076,7 +21211,7 @@
                     </a:lnR>
                     <a:lnT w="12700" cap="flat" cmpd="sng" algn="ctr">
                       <a:solidFill>
-                        <a:srgbClr val="D5D5E5"/>
+                        <a:srgbClr val="D9D9D5"/>
                       </a:solidFill>
                       <a:prstDash val="solid"/>
                       <a:round/>
@@ -21085,7 +21220,7 @@
                     </a:lnT>
                     <a:lnB w="12700" cap="flat" cmpd="sng" algn="ctr">
                       <a:solidFill>
-                        <a:srgbClr val="D5D5E5"/>
+                        <a:srgbClr val="D9D9D5"/>
                       </a:solidFill>
                       <a:prstDash val="solid"/>
                       <a:round/>
@@ -21093,7 +21228,7 @@
                       <a:tailEnd type="none" w="med" len="med"/>
                     </a:lnB>
                     <a:solidFill>
-                      <a:srgbClr val="312E81"/>
+                      <a:srgbClr val="202124"/>
                     </a:solidFill>
                   </a:tcPr>
                 </a:tc>
@@ -21117,7 +21252,7 @@
                   <a:tcPr anchor="ctr">
                     <a:lnL w="12700" cap="flat" cmpd="sng" algn="ctr">
                       <a:solidFill>
-                        <a:srgbClr val="D5D5E5"/>
+                        <a:srgbClr val="D9D9D5"/>
                       </a:solidFill>
                       <a:prstDash val="solid"/>
                       <a:round/>
@@ -21126,7 +21261,7 @@
                     </a:lnL>
                     <a:lnR w="12700" cap="flat" cmpd="sng" algn="ctr">
                       <a:solidFill>
-                        <a:srgbClr val="D5D5E5"/>
+                        <a:srgbClr val="D9D9D5"/>
                       </a:solidFill>
                       <a:prstDash val="solid"/>
                       <a:round/>
@@ -21135,7 +21270,7 @@
                     </a:lnR>
                     <a:lnT w="12700" cap="flat" cmpd="sng" algn="ctr">
                       <a:solidFill>
-                        <a:srgbClr val="D5D5E5"/>
+                        <a:srgbClr val="D9D9D5"/>
                       </a:solidFill>
                       <a:prstDash val="solid"/>
                       <a:round/>
@@ -21144,7 +21279,7 @@
                     </a:lnT>
                     <a:lnB w="12700" cap="flat" cmpd="sng" algn="ctr">
                       <a:solidFill>
-                        <a:srgbClr val="D5D5E5"/>
+                        <a:srgbClr val="D9D9D5"/>
                       </a:solidFill>
                       <a:prstDash val="solid"/>
                       <a:round/>
@@ -21152,7 +21287,7 @@
                       <a:tailEnd type="none" w="med" len="med"/>
                     </a:lnB>
                     <a:solidFill>
-                      <a:srgbClr val="312E81"/>
+                      <a:srgbClr val="202124"/>
                     </a:solidFill>
                   </a:tcPr>
                 </a:tc>
@@ -21167,7 +21302,7 @@
                       <a:r>
                         <a:rPr sz="1300" b="1">
                           <a:solidFill>
-                            <a:srgbClr val="1E1B3A"/>
+                            <a:srgbClr val="202124"/>
                           </a:solidFill>
                           <a:latin typeface="Calibri"/>
                         </a:rPr>
@@ -21178,7 +21313,7 @@
                   <a:tcPr anchor="ctr">
                     <a:lnL w="12700" cap="flat" cmpd="sng" algn="ctr">
                       <a:solidFill>
-                        <a:srgbClr val="D5D5E5"/>
+                        <a:srgbClr val="D9D9D5"/>
                       </a:solidFill>
                       <a:prstDash val="solid"/>
                       <a:round/>
@@ -21187,7 +21322,7 @@
                     </a:lnL>
                     <a:lnR w="12700" cap="flat" cmpd="sng" algn="ctr">
                       <a:solidFill>
-                        <a:srgbClr val="D5D5E5"/>
+                        <a:srgbClr val="D9D9D5"/>
                       </a:solidFill>
                       <a:prstDash val="solid"/>
                       <a:round/>
@@ -21196,7 +21331,7 @@
                     </a:lnR>
                     <a:lnT w="12700" cap="flat" cmpd="sng" algn="ctr">
                       <a:solidFill>
-                        <a:srgbClr val="D5D5E5"/>
+                        <a:srgbClr val="D9D9D5"/>
                       </a:solidFill>
                       <a:prstDash val="solid"/>
                       <a:round/>
@@ -21205,7 +21340,7 @@
                     </a:lnT>
                     <a:lnB w="12700" cap="flat" cmpd="sng" algn="ctr">
                       <a:solidFill>
-                        <a:srgbClr val="D5D5E5"/>
+                        <a:srgbClr val="D9D9D5"/>
                       </a:solidFill>
                       <a:prstDash val="solid"/>
                       <a:round/>
@@ -21224,7 +21359,7 @@
                       <a:r>
                         <a:rPr sz="1300" b="0">
                           <a:solidFill>
-                            <a:srgbClr val="1E1B3A"/>
+                            <a:srgbClr val="202124"/>
                           </a:solidFill>
                           <a:latin typeface="Calibri"/>
                         </a:rPr>
@@ -21235,7 +21370,7 @@
                   <a:tcPr anchor="ctr">
                     <a:lnL w="12700" cap="flat" cmpd="sng" algn="ctr">
                       <a:solidFill>
-                        <a:srgbClr val="D5D5E5"/>
+                        <a:srgbClr val="D9D9D5"/>
                       </a:solidFill>
                       <a:prstDash val="solid"/>
                       <a:round/>
@@ -21244,7 +21379,7 @@
                     </a:lnL>
                     <a:lnR w="12700" cap="flat" cmpd="sng" algn="ctr">
                       <a:solidFill>
-                        <a:srgbClr val="D5D5E5"/>
+                        <a:srgbClr val="D9D9D5"/>
                       </a:solidFill>
                       <a:prstDash val="solid"/>
                       <a:round/>
@@ -21253,7 +21388,7 @@
                     </a:lnR>
                     <a:lnT w="12700" cap="flat" cmpd="sng" algn="ctr">
                       <a:solidFill>
-                        <a:srgbClr val="D5D5E5"/>
+                        <a:srgbClr val="D9D9D5"/>
                       </a:solidFill>
                       <a:prstDash val="solid"/>
                       <a:round/>
@@ -21262,7 +21397,7 @@
                     </a:lnT>
                     <a:lnB w="12700" cap="flat" cmpd="sng" algn="ctr">
                       <a:solidFill>
-                        <a:srgbClr val="D5D5E5"/>
+                        <a:srgbClr val="D9D9D5"/>
                       </a:solidFill>
                       <a:prstDash val="solid"/>
                       <a:round/>
@@ -21281,7 +21416,7 @@
                       <a:r>
                         <a:rPr sz="1300" b="0">
                           <a:solidFill>
-                            <a:srgbClr val="1E1B3A"/>
+                            <a:srgbClr val="202124"/>
                           </a:solidFill>
                           <a:latin typeface="Calibri"/>
                         </a:rPr>
@@ -21292,7 +21427,7 @@
                   <a:tcPr anchor="ctr">
                     <a:lnL w="12700" cap="flat" cmpd="sng" algn="ctr">
                       <a:solidFill>
-                        <a:srgbClr val="D5D5E5"/>
+                        <a:srgbClr val="D9D9D5"/>
                       </a:solidFill>
                       <a:prstDash val="solid"/>
                       <a:round/>
@@ -21301,7 +21436,7 @@
                     </a:lnL>
                     <a:lnR w="12700" cap="flat" cmpd="sng" algn="ctr">
                       <a:solidFill>
-                        <a:srgbClr val="D5D5E5"/>
+                        <a:srgbClr val="D9D9D5"/>
                       </a:solidFill>
                       <a:prstDash val="solid"/>
                       <a:round/>
@@ -21310,7 +21445,7 @@
                     </a:lnR>
                     <a:lnT w="12700" cap="flat" cmpd="sng" algn="ctr">
                       <a:solidFill>
-                        <a:srgbClr val="D5D5E5"/>
+                        <a:srgbClr val="D9D9D5"/>
                       </a:solidFill>
                       <a:prstDash val="solid"/>
                       <a:round/>
@@ -21319,7 +21454,7 @@
                     </a:lnT>
                     <a:lnB w="12700" cap="flat" cmpd="sng" algn="ctr">
                       <a:solidFill>
-                        <a:srgbClr val="D5D5E5"/>
+                        <a:srgbClr val="D9D9D5"/>
                       </a:solidFill>
                       <a:prstDash val="solid"/>
                       <a:round/>
@@ -21338,7 +21473,7 @@
                       <a:r>
                         <a:rPr sz="1300" b="0">
                           <a:solidFill>
-                            <a:srgbClr val="1E1B3A"/>
+                            <a:srgbClr val="202124"/>
                           </a:solidFill>
                           <a:latin typeface="Calibri"/>
                         </a:rPr>
@@ -21349,7 +21484,7 @@
                   <a:tcPr anchor="ctr">
                     <a:lnL w="12700" cap="flat" cmpd="sng" algn="ctr">
                       <a:solidFill>
-                        <a:srgbClr val="D5D5E5"/>
+                        <a:srgbClr val="D9D9D5"/>
                       </a:solidFill>
                       <a:prstDash val="solid"/>
                       <a:round/>
@@ -21358,7 +21493,7 @@
                     </a:lnL>
                     <a:lnR w="12700" cap="flat" cmpd="sng" algn="ctr">
                       <a:solidFill>
-                        <a:srgbClr val="D5D5E5"/>
+                        <a:srgbClr val="D9D9D5"/>
                       </a:solidFill>
                       <a:prstDash val="solid"/>
                       <a:round/>
@@ -21367,7 +21502,7 @@
                     </a:lnR>
                     <a:lnT w="12700" cap="flat" cmpd="sng" algn="ctr">
                       <a:solidFill>
-                        <a:srgbClr val="D5D5E5"/>
+                        <a:srgbClr val="D9D9D5"/>
                       </a:solidFill>
                       <a:prstDash val="solid"/>
                       <a:round/>
@@ -21376,7 +21511,7 @@
                     </a:lnT>
                     <a:lnB w="12700" cap="flat" cmpd="sng" algn="ctr">
                       <a:solidFill>
-                        <a:srgbClr val="D5D5E5"/>
+                        <a:srgbClr val="D9D9D5"/>
                       </a:solidFill>
                       <a:prstDash val="solid"/>
                       <a:round/>
@@ -21397,7 +21532,7 @@
                       <a:r>
                         <a:rPr sz="1300" b="1">
                           <a:solidFill>
-                            <a:srgbClr val="1E1B3A"/>
+                            <a:srgbClr val="202124"/>
                           </a:solidFill>
                           <a:latin typeface="Calibri"/>
                         </a:rPr>
@@ -21408,7 +21543,7 @@
                   <a:tcPr anchor="ctr">
                     <a:lnL w="12700" cap="flat" cmpd="sng" algn="ctr">
                       <a:solidFill>
-                        <a:srgbClr val="D5D5E5"/>
+                        <a:srgbClr val="D9D9D5"/>
                       </a:solidFill>
                       <a:prstDash val="solid"/>
                       <a:round/>
@@ -21417,7 +21552,7 @@
                     </a:lnL>
                     <a:lnR w="12700" cap="flat" cmpd="sng" algn="ctr">
                       <a:solidFill>
-                        <a:srgbClr val="D5D5E5"/>
+                        <a:srgbClr val="D9D9D5"/>
                       </a:solidFill>
                       <a:prstDash val="solid"/>
                       <a:round/>
@@ -21426,7 +21561,7 @@
                     </a:lnR>
                     <a:lnT w="12700" cap="flat" cmpd="sng" algn="ctr">
                       <a:solidFill>
-                        <a:srgbClr val="D5D5E5"/>
+                        <a:srgbClr val="D9D9D5"/>
                       </a:solidFill>
                       <a:prstDash val="solid"/>
                       <a:round/>
@@ -21435,7 +21570,7 @@
                     </a:lnT>
                     <a:lnB w="12700" cap="flat" cmpd="sng" algn="ctr">
                       <a:solidFill>
-                        <a:srgbClr val="D5D5E5"/>
+                        <a:srgbClr val="D9D9D5"/>
                       </a:solidFill>
                       <a:prstDash val="solid"/>
                       <a:round/>
@@ -21443,7 +21578,7 @@
                       <a:tailEnd type="none" w="med" len="med"/>
                     </a:lnB>
                     <a:solidFill>
-                      <a:srgbClr val="ECECF7"/>
+                      <a:srgbClr val="F2F2EF"/>
                     </a:solidFill>
                   </a:tcPr>
                 </a:tc>
@@ -21456,7 +21591,7 @@
                       <a:r>
                         <a:rPr sz="1300" b="0">
                           <a:solidFill>
-                            <a:srgbClr val="1E1B3A"/>
+                            <a:srgbClr val="202124"/>
                           </a:solidFill>
                           <a:latin typeface="Calibri"/>
                         </a:rPr>
@@ -21467,7 +21602,7 @@
                   <a:tcPr anchor="ctr">
                     <a:lnL w="12700" cap="flat" cmpd="sng" algn="ctr">
                       <a:solidFill>
-                        <a:srgbClr val="D5D5E5"/>
+                        <a:srgbClr val="D9D9D5"/>
                       </a:solidFill>
                       <a:prstDash val="solid"/>
                       <a:round/>
@@ -21476,7 +21611,7 @@
                     </a:lnL>
                     <a:lnR w="12700" cap="flat" cmpd="sng" algn="ctr">
                       <a:solidFill>
-                        <a:srgbClr val="D5D5E5"/>
+                        <a:srgbClr val="D9D9D5"/>
                       </a:solidFill>
                       <a:prstDash val="solid"/>
                       <a:round/>
@@ -21485,7 +21620,7 @@
                     </a:lnR>
                     <a:lnT w="12700" cap="flat" cmpd="sng" algn="ctr">
                       <a:solidFill>
-                        <a:srgbClr val="D5D5E5"/>
+                        <a:srgbClr val="D9D9D5"/>
                       </a:solidFill>
                       <a:prstDash val="solid"/>
                       <a:round/>
@@ -21494,7 +21629,7 @@
                     </a:lnT>
                     <a:lnB w="12700" cap="flat" cmpd="sng" algn="ctr">
                       <a:solidFill>
-                        <a:srgbClr val="D5D5E5"/>
+                        <a:srgbClr val="D9D9D5"/>
                       </a:solidFill>
                       <a:prstDash val="solid"/>
                       <a:round/>
@@ -21502,7 +21637,7 @@
                       <a:tailEnd type="none" w="med" len="med"/>
                     </a:lnB>
                     <a:solidFill>
-                      <a:srgbClr val="ECECF7"/>
+                      <a:srgbClr val="F2F2EF"/>
                     </a:solidFill>
                   </a:tcPr>
                 </a:tc>
@@ -21515,7 +21650,7 @@
                       <a:r>
                         <a:rPr sz="1300" b="0">
                           <a:solidFill>
-                            <a:srgbClr val="1E1B3A"/>
+                            <a:srgbClr val="202124"/>
                           </a:solidFill>
                           <a:latin typeface="Calibri"/>
                         </a:rPr>
@@ -21526,7 +21661,7 @@
                   <a:tcPr anchor="ctr">
                     <a:lnL w="12700" cap="flat" cmpd="sng" algn="ctr">
                       <a:solidFill>
-                        <a:srgbClr val="D5D5E5"/>
+                        <a:srgbClr val="D9D9D5"/>
                       </a:solidFill>
                       <a:prstDash val="solid"/>
                       <a:round/>
@@ -21535,7 +21670,7 @@
                     </a:lnL>
                     <a:lnR w="12700" cap="flat" cmpd="sng" algn="ctr">
                       <a:solidFill>
-                        <a:srgbClr val="D5D5E5"/>
+                        <a:srgbClr val="D9D9D5"/>
                       </a:solidFill>
                       <a:prstDash val="solid"/>
                       <a:round/>
@@ -21544,7 +21679,7 @@
                     </a:lnR>
                     <a:lnT w="12700" cap="flat" cmpd="sng" algn="ctr">
                       <a:solidFill>
-                        <a:srgbClr val="D5D5E5"/>
+                        <a:srgbClr val="D9D9D5"/>
                       </a:solidFill>
                       <a:prstDash val="solid"/>
                       <a:round/>
@@ -21553,7 +21688,7 @@
                     </a:lnT>
                     <a:lnB w="12700" cap="flat" cmpd="sng" algn="ctr">
                       <a:solidFill>
-                        <a:srgbClr val="D5D5E5"/>
+                        <a:srgbClr val="D9D9D5"/>
                       </a:solidFill>
                       <a:prstDash val="solid"/>
                       <a:round/>
@@ -21561,7 +21696,7 @@
                       <a:tailEnd type="none" w="med" len="med"/>
                     </a:lnB>
                     <a:solidFill>
-                      <a:srgbClr val="ECECF7"/>
+                      <a:srgbClr val="F2F2EF"/>
                     </a:solidFill>
                   </a:tcPr>
                 </a:tc>
@@ -21574,7 +21709,7 @@
                       <a:r>
                         <a:rPr sz="1300" b="0">
                           <a:solidFill>
-                            <a:srgbClr val="1E1B3A"/>
+                            <a:srgbClr val="202124"/>
                           </a:solidFill>
                           <a:latin typeface="Calibri"/>
                         </a:rPr>
@@ -21585,7 +21720,7 @@
                   <a:tcPr anchor="ctr">
                     <a:lnL w="12700" cap="flat" cmpd="sng" algn="ctr">
                       <a:solidFill>
-                        <a:srgbClr val="D5D5E5"/>
+                        <a:srgbClr val="D9D9D5"/>
                       </a:solidFill>
                       <a:prstDash val="solid"/>
                       <a:round/>
@@ -21594,7 +21729,7 @@
                     </a:lnL>
                     <a:lnR w="12700" cap="flat" cmpd="sng" algn="ctr">
                       <a:solidFill>
-                        <a:srgbClr val="D5D5E5"/>
+                        <a:srgbClr val="D9D9D5"/>
                       </a:solidFill>
                       <a:prstDash val="solid"/>
                       <a:round/>
@@ -21603,7 +21738,7 @@
                     </a:lnR>
                     <a:lnT w="12700" cap="flat" cmpd="sng" algn="ctr">
                       <a:solidFill>
-                        <a:srgbClr val="D5D5E5"/>
+                        <a:srgbClr val="D9D9D5"/>
                       </a:solidFill>
                       <a:prstDash val="solid"/>
                       <a:round/>
@@ -21612,7 +21747,7 @@
                     </a:lnT>
                     <a:lnB w="12700" cap="flat" cmpd="sng" algn="ctr">
                       <a:solidFill>
-                        <a:srgbClr val="D5D5E5"/>
+                        <a:srgbClr val="D9D9D5"/>
                       </a:solidFill>
                       <a:prstDash val="solid"/>
                       <a:round/>
@@ -21620,7 +21755,7 @@
                       <a:tailEnd type="none" w="med" len="med"/>
                     </a:lnB>
                     <a:solidFill>
-                      <a:srgbClr val="ECECF7"/>
+                      <a:srgbClr val="F2F2EF"/>
                     </a:solidFill>
                   </a:tcPr>
                 </a:tc>
@@ -21635,7 +21770,7 @@
                       <a:r>
                         <a:rPr sz="1300" b="1">
                           <a:solidFill>
-                            <a:srgbClr val="1E1B3A"/>
+                            <a:srgbClr val="202124"/>
                           </a:solidFill>
                           <a:latin typeface="Calibri"/>
                         </a:rPr>
@@ -21646,7 +21781,7 @@
                   <a:tcPr anchor="ctr">
                     <a:lnL w="12700" cap="flat" cmpd="sng" algn="ctr">
                       <a:solidFill>
-                        <a:srgbClr val="D5D5E5"/>
+                        <a:srgbClr val="D9D9D5"/>
                       </a:solidFill>
                       <a:prstDash val="solid"/>
                       <a:round/>
@@ -21655,7 +21790,7 @@
                     </a:lnL>
                     <a:lnR w="12700" cap="flat" cmpd="sng" algn="ctr">
                       <a:solidFill>
-                        <a:srgbClr val="D5D5E5"/>
+                        <a:srgbClr val="D9D9D5"/>
                       </a:solidFill>
                       <a:prstDash val="solid"/>
                       <a:round/>
@@ -21664,7 +21799,7 @@
                     </a:lnR>
                     <a:lnT w="12700" cap="flat" cmpd="sng" algn="ctr">
                       <a:solidFill>
-                        <a:srgbClr val="D5D5E5"/>
+                        <a:srgbClr val="D9D9D5"/>
                       </a:solidFill>
                       <a:prstDash val="solid"/>
                       <a:round/>
@@ -21673,7 +21808,7 @@
                     </a:lnT>
                     <a:lnB w="12700" cap="flat" cmpd="sng" algn="ctr">
                       <a:solidFill>
-                        <a:srgbClr val="D5D5E5"/>
+                        <a:srgbClr val="D9D9D5"/>
                       </a:solidFill>
                       <a:prstDash val="solid"/>
                       <a:round/>
@@ -21692,7 +21827,7 @@
                       <a:r>
                         <a:rPr sz="1300" b="0">
                           <a:solidFill>
-                            <a:srgbClr val="1E1B3A"/>
+                            <a:srgbClr val="202124"/>
                           </a:solidFill>
                           <a:latin typeface="Calibri"/>
                         </a:rPr>
@@ -21703,7 +21838,7 @@
                   <a:tcPr anchor="ctr">
                     <a:lnL w="12700" cap="flat" cmpd="sng" algn="ctr">
                       <a:solidFill>
-                        <a:srgbClr val="D5D5E5"/>
+                        <a:srgbClr val="D9D9D5"/>
                       </a:solidFill>
                       <a:prstDash val="solid"/>
                       <a:round/>
@@ -21712,7 +21847,7 @@
                     </a:lnL>
                     <a:lnR w="12700" cap="flat" cmpd="sng" algn="ctr">
                       <a:solidFill>
-                        <a:srgbClr val="D5D5E5"/>
+                        <a:srgbClr val="D9D9D5"/>
                       </a:solidFill>
                       <a:prstDash val="solid"/>
                       <a:round/>
@@ -21721,7 +21856,7 @@
                     </a:lnR>
                     <a:lnT w="12700" cap="flat" cmpd="sng" algn="ctr">
                       <a:solidFill>
-                        <a:srgbClr val="D5D5E5"/>
+                        <a:srgbClr val="D9D9D5"/>
                       </a:solidFill>
                       <a:prstDash val="solid"/>
                       <a:round/>
@@ -21730,7 +21865,7 @@
                     </a:lnT>
                     <a:lnB w="12700" cap="flat" cmpd="sng" algn="ctr">
                       <a:solidFill>
-                        <a:srgbClr val="D5D5E5"/>
+                        <a:srgbClr val="D9D9D5"/>
                       </a:solidFill>
                       <a:prstDash val="solid"/>
                       <a:round/>
@@ -21749,7 +21884,7 @@
                       <a:r>
                         <a:rPr sz="1300" b="0">
                           <a:solidFill>
-                            <a:srgbClr val="1E1B3A"/>
+                            <a:srgbClr val="202124"/>
                           </a:solidFill>
                           <a:latin typeface="Calibri"/>
                         </a:rPr>
@@ -21760,7 +21895,7 @@
                   <a:tcPr anchor="ctr">
                     <a:lnL w="12700" cap="flat" cmpd="sng" algn="ctr">
                       <a:solidFill>
-                        <a:srgbClr val="D5D5E5"/>
+                        <a:srgbClr val="D9D9D5"/>
                       </a:solidFill>
                       <a:prstDash val="solid"/>
                       <a:round/>
@@ -21769,7 +21904,7 @@
                     </a:lnL>
                     <a:lnR w="12700" cap="flat" cmpd="sng" algn="ctr">
                       <a:solidFill>
-                        <a:srgbClr val="D5D5E5"/>
+                        <a:srgbClr val="D9D9D5"/>
                       </a:solidFill>
                       <a:prstDash val="solid"/>
                       <a:round/>
@@ -21778,7 +21913,7 @@
                     </a:lnR>
                     <a:lnT w="12700" cap="flat" cmpd="sng" algn="ctr">
                       <a:solidFill>
-                        <a:srgbClr val="D5D5E5"/>
+                        <a:srgbClr val="D9D9D5"/>
                       </a:solidFill>
                       <a:prstDash val="solid"/>
                       <a:round/>
@@ -21787,7 +21922,7 @@
                     </a:lnT>
                     <a:lnB w="12700" cap="flat" cmpd="sng" algn="ctr">
                       <a:solidFill>
-                        <a:srgbClr val="D5D5E5"/>
+                        <a:srgbClr val="D9D9D5"/>
                       </a:solidFill>
                       <a:prstDash val="solid"/>
                       <a:round/>
@@ -21806,7 +21941,7 @@
                       <a:r>
                         <a:rPr sz="1300" b="0">
                           <a:solidFill>
-                            <a:srgbClr val="1E1B3A"/>
+                            <a:srgbClr val="202124"/>
                           </a:solidFill>
                           <a:latin typeface="Calibri"/>
                         </a:rPr>
@@ -21817,7 +21952,7 @@
                   <a:tcPr anchor="ctr">
                     <a:lnL w="12700" cap="flat" cmpd="sng" algn="ctr">
                       <a:solidFill>
-                        <a:srgbClr val="D5D5E5"/>
+                        <a:srgbClr val="D9D9D5"/>
                       </a:solidFill>
                       <a:prstDash val="solid"/>
                       <a:round/>
@@ -21826,7 +21961,7 @@
                     </a:lnL>
                     <a:lnR w="12700" cap="flat" cmpd="sng" algn="ctr">
                       <a:solidFill>
-                        <a:srgbClr val="D5D5E5"/>
+                        <a:srgbClr val="D9D9D5"/>
                       </a:solidFill>
                       <a:prstDash val="solid"/>
                       <a:round/>
@@ -21835,7 +21970,7 @@
                     </a:lnR>
                     <a:lnT w="12700" cap="flat" cmpd="sng" algn="ctr">
                       <a:solidFill>
-                        <a:srgbClr val="D5D5E5"/>
+                        <a:srgbClr val="D9D9D5"/>
                       </a:solidFill>
                       <a:prstDash val="solid"/>
                       <a:round/>
@@ -21844,7 +21979,7 @@
                     </a:lnT>
                     <a:lnB w="12700" cap="flat" cmpd="sng" algn="ctr">
                       <a:solidFill>
-                        <a:srgbClr val="D5D5E5"/>
+                        <a:srgbClr val="D9D9D5"/>
                       </a:solidFill>
                       <a:prstDash val="solid"/>
                       <a:round/>
@@ -21865,7 +22000,7 @@
                       <a:r>
                         <a:rPr sz="1300" b="1">
                           <a:solidFill>
-                            <a:srgbClr val="1E1B3A"/>
+                            <a:srgbClr val="202124"/>
                           </a:solidFill>
                           <a:latin typeface="Calibri"/>
                         </a:rPr>
@@ -21876,7 +22011,7 @@
                   <a:tcPr anchor="ctr">
                     <a:lnL w="12700" cap="flat" cmpd="sng" algn="ctr">
                       <a:solidFill>
-                        <a:srgbClr val="D5D5E5"/>
+                        <a:srgbClr val="D9D9D5"/>
                       </a:solidFill>
                       <a:prstDash val="solid"/>
                       <a:round/>
@@ -21885,7 +22020,7 @@
                     </a:lnL>
                     <a:lnR w="12700" cap="flat" cmpd="sng" algn="ctr">
                       <a:solidFill>
-                        <a:srgbClr val="D5D5E5"/>
+                        <a:srgbClr val="D9D9D5"/>
                       </a:solidFill>
                       <a:prstDash val="solid"/>
                       <a:round/>
@@ -21894,7 +22029,7 @@
                     </a:lnR>
                     <a:lnT w="12700" cap="flat" cmpd="sng" algn="ctr">
                       <a:solidFill>
-                        <a:srgbClr val="D5D5E5"/>
+                        <a:srgbClr val="D9D9D5"/>
                       </a:solidFill>
                       <a:prstDash val="solid"/>
                       <a:round/>
@@ -21903,7 +22038,7 @@
                     </a:lnT>
                     <a:lnB w="12700" cap="flat" cmpd="sng" algn="ctr">
                       <a:solidFill>
-                        <a:srgbClr val="D5D5E5"/>
+                        <a:srgbClr val="D9D9D5"/>
                       </a:solidFill>
                       <a:prstDash val="solid"/>
                       <a:round/>
@@ -21911,7 +22046,7 @@
                       <a:tailEnd type="none" w="med" len="med"/>
                     </a:lnB>
                     <a:solidFill>
-                      <a:srgbClr val="ECECF7"/>
+                      <a:srgbClr val="F2F2EF"/>
                     </a:solidFill>
                   </a:tcPr>
                 </a:tc>
@@ -21924,7 +22059,7 @@
                       <a:r>
                         <a:rPr sz="1300" b="0">
                           <a:solidFill>
-                            <a:srgbClr val="1E1B3A"/>
+                            <a:srgbClr val="202124"/>
                           </a:solidFill>
                           <a:latin typeface="Calibri"/>
                         </a:rPr>
@@ -21935,7 +22070,7 @@
                   <a:tcPr anchor="ctr">
                     <a:lnL w="12700" cap="flat" cmpd="sng" algn="ctr">
                       <a:solidFill>
-                        <a:srgbClr val="D5D5E5"/>
+                        <a:srgbClr val="D9D9D5"/>
                       </a:solidFill>
                       <a:prstDash val="solid"/>
                       <a:round/>
@@ -21944,7 +22079,7 @@
                     </a:lnL>
                     <a:lnR w="12700" cap="flat" cmpd="sng" algn="ctr">
                       <a:solidFill>
-                        <a:srgbClr val="D5D5E5"/>
+                        <a:srgbClr val="D9D9D5"/>
                       </a:solidFill>
                       <a:prstDash val="solid"/>
                       <a:round/>
@@ -21953,7 +22088,7 @@
                     </a:lnR>
                     <a:lnT w="12700" cap="flat" cmpd="sng" algn="ctr">
                       <a:solidFill>
-                        <a:srgbClr val="D5D5E5"/>
+                        <a:srgbClr val="D9D9D5"/>
                       </a:solidFill>
                       <a:prstDash val="solid"/>
                       <a:round/>
@@ -21962,7 +22097,7 @@
                     </a:lnT>
                     <a:lnB w="12700" cap="flat" cmpd="sng" algn="ctr">
                       <a:solidFill>
-                        <a:srgbClr val="D5D5E5"/>
+                        <a:srgbClr val="D9D9D5"/>
                       </a:solidFill>
                       <a:prstDash val="solid"/>
                       <a:round/>
@@ -21970,7 +22105,7 @@
                       <a:tailEnd type="none" w="med" len="med"/>
                     </a:lnB>
                     <a:solidFill>
-                      <a:srgbClr val="ECECF7"/>
+                      <a:srgbClr val="F2F2EF"/>
                     </a:solidFill>
                   </a:tcPr>
                 </a:tc>
@@ -21983,7 +22118,7 @@
                       <a:r>
                         <a:rPr sz="1300" b="0">
                           <a:solidFill>
-                            <a:srgbClr val="1E1B3A"/>
+                            <a:srgbClr val="202124"/>
                           </a:solidFill>
                           <a:latin typeface="Calibri"/>
                         </a:rPr>
@@ -21994,7 +22129,7 @@
                   <a:tcPr anchor="ctr">
                     <a:lnL w="12700" cap="flat" cmpd="sng" algn="ctr">
                       <a:solidFill>
-                        <a:srgbClr val="D5D5E5"/>
+                        <a:srgbClr val="D9D9D5"/>
                       </a:solidFill>
                       <a:prstDash val="solid"/>
                       <a:round/>
@@ -22003,7 +22138,7 @@
                     </a:lnL>
                     <a:lnR w="12700" cap="flat" cmpd="sng" algn="ctr">
                       <a:solidFill>
-                        <a:srgbClr val="D5D5E5"/>
+                        <a:srgbClr val="D9D9D5"/>
                       </a:solidFill>
                       <a:prstDash val="solid"/>
                       <a:round/>
@@ -22012,7 +22147,7 @@
                     </a:lnR>
                     <a:lnT w="12700" cap="flat" cmpd="sng" algn="ctr">
                       <a:solidFill>
-                        <a:srgbClr val="D5D5E5"/>
+                        <a:srgbClr val="D9D9D5"/>
                       </a:solidFill>
                       <a:prstDash val="solid"/>
                       <a:round/>
@@ -22021,7 +22156,7 @@
                     </a:lnT>
                     <a:lnB w="12700" cap="flat" cmpd="sng" algn="ctr">
                       <a:solidFill>
-                        <a:srgbClr val="D5D5E5"/>
+                        <a:srgbClr val="D9D9D5"/>
                       </a:solidFill>
                       <a:prstDash val="solid"/>
                       <a:round/>
@@ -22029,7 +22164,7 @@
                       <a:tailEnd type="none" w="med" len="med"/>
                     </a:lnB>
                     <a:solidFill>
-                      <a:srgbClr val="ECECF7"/>
+                      <a:srgbClr val="F2F2EF"/>
                     </a:solidFill>
                   </a:tcPr>
                 </a:tc>
@@ -22042,7 +22177,7 @@
                       <a:r>
                         <a:rPr sz="1300" b="0">
                           <a:solidFill>
-                            <a:srgbClr val="1E1B3A"/>
+                            <a:srgbClr val="202124"/>
                           </a:solidFill>
                           <a:latin typeface="Calibri"/>
                         </a:rPr>
@@ -22053,7 +22188,7 @@
                   <a:tcPr anchor="ctr">
                     <a:lnL w="12700" cap="flat" cmpd="sng" algn="ctr">
                       <a:solidFill>
-                        <a:srgbClr val="D5D5E5"/>
+                        <a:srgbClr val="D9D9D5"/>
                       </a:solidFill>
                       <a:prstDash val="solid"/>
                       <a:round/>
@@ -22062,7 +22197,7 @@
                     </a:lnL>
                     <a:lnR w="12700" cap="flat" cmpd="sng" algn="ctr">
                       <a:solidFill>
-                        <a:srgbClr val="D5D5E5"/>
+                        <a:srgbClr val="D9D9D5"/>
                       </a:solidFill>
                       <a:prstDash val="solid"/>
                       <a:round/>
@@ -22071,7 +22206,7 @@
                     </a:lnR>
                     <a:lnT w="12700" cap="flat" cmpd="sng" algn="ctr">
                       <a:solidFill>
-                        <a:srgbClr val="D5D5E5"/>
+                        <a:srgbClr val="D9D9D5"/>
                       </a:solidFill>
                       <a:prstDash val="solid"/>
                       <a:round/>
@@ -22080,7 +22215,7 @@
                     </a:lnT>
                     <a:lnB w="12700" cap="flat" cmpd="sng" algn="ctr">
                       <a:solidFill>
-                        <a:srgbClr val="D5D5E5"/>
+                        <a:srgbClr val="D9D9D5"/>
                       </a:solidFill>
                       <a:prstDash val="solid"/>
                       <a:round/>
@@ -22088,7 +22223,7 @@
                       <a:tailEnd type="none" w="med" len="med"/>
                     </a:lnB>
                     <a:solidFill>
-                      <a:srgbClr val="ECECF7"/>
+                      <a:srgbClr val="F2F2EF"/>
                     </a:solidFill>
                   </a:tcPr>
                 </a:tc>
@@ -22103,7 +22238,7 @@
                       <a:r>
                         <a:rPr sz="1300" b="1">
                           <a:solidFill>
-                            <a:srgbClr val="1E1B3A"/>
+                            <a:srgbClr val="202124"/>
                           </a:solidFill>
                           <a:latin typeface="Calibri"/>
                         </a:rPr>
@@ -22114,7 +22249,7 @@
                   <a:tcPr anchor="ctr">
                     <a:lnL w="12700" cap="flat" cmpd="sng" algn="ctr">
                       <a:solidFill>
-                        <a:srgbClr val="D5D5E5"/>
+                        <a:srgbClr val="D9D9D5"/>
                       </a:solidFill>
                       <a:prstDash val="solid"/>
                       <a:round/>
@@ -22123,7 +22258,7 @@
                     </a:lnL>
                     <a:lnR w="12700" cap="flat" cmpd="sng" algn="ctr">
                       <a:solidFill>
-                        <a:srgbClr val="D5D5E5"/>
+                        <a:srgbClr val="D9D9D5"/>
                       </a:solidFill>
                       <a:prstDash val="solid"/>
                       <a:round/>
@@ -22132,7 +22267,7 @@
                     </a:lnR>
                     <a:lnT w="12700" cap="flat" cmpd="sng" algn="ctr">
                       <a:solidFill>
-                        <a:srgbClr val="D5D5E5"/>
+                        <a:srgbClr val="D9D9D5"/>
                       </a:solidFill>
                       <a:prstDash val="solid"/>
                       <a:round/>
@@ -22141,7 +22276,7 @@
                     </a:lnT>
                     <a:lnB w="12700" cap="flat" cmpd="sng" algn="ctr">
                       <a:solidFill>
-                        <a:srgbClr val="D5D5E5"/>
+                        <a:srgbClr val="D9D9D5"/>
                       </a:solidFill>
                       <a:prstDash val="solid"/>
                       <a:round/>
@@ -22160,7 +22295,7 @@
                       <a:r>
                         <a:rPr sz="1300" b="0">
                           <a:solidFill>
-                            <a:srgbClr val="1E1B3A"/>
+                            <a:srgbClr val="202124"/>
                           </a:solidFill>
                           <a:latin typeface="Calibri"/>
                         </a:rPr>
@@ -22171,7 +22306,7 @@
                   <a:tcPr anchor="ctr">
                     <a:lnL w="12700" cap="flat" cmpd="sng" algn="ctr">
                       <a:solidFill>
-                        <a:srgbClr val="D5D5E5"/>
+                        <a:srgbClr val="D9D9D5"/>
                       </a:solidFill>
                       <a:prstDash val="solid"/>
                       <a:round/>
@@ -22180,7 +22315,7 @@
                     </a:lnL>
                     <a:lnR w="12700" cap="flat" cmpd="sng" algn="ctr">
                       <a:solidFill>
-                        <a:srgbClr val="D5D5E5"/>
+                        <a:srgbClr val="D9D9D5"/>
                       </a:solidFill>
                       <a:prstDash val="solid"/>
                       <a:round/>
@@ -22189,7 +22324,7 @@
                     </a:lnR>
                     <a:lnT w="12700" cap="flat" cmpd="sng" algn="ctr">
                       <a:solidFill>
-                        <a:srgbClr val="D5D5E5"/>
+                        <a:srgbClr val="D9D9D5"/>
                       </a:solidFill>
                       <a:prstDash val="solid"/>
                       <a:round/>
@@ -22198,7 +22333,7 @@
                     </a:lnT>
                     <a:lnB w="12700" cap="flat" cmpd="sng" algn="ctr">
                       <a:solidFill>
-                        <a:srgbClr val="D5D5E5"/>
+                        <a:srgbClr val="D9D9D5"/>
                       </a:solidFill>
                       <a:prstDash val="solid"/>
                       <a:round/>
@@ -22217,7 +22352,7 @@
                       <a:r>
                         <a:rPr sz="1300" b="0">
                           <a:solidFill>
-                            <a:srgbClr val="1E1B3A"/>
+                            <a:srgbClr val="202124"/>
                           </a:solidFill>
                           <a:latin typeface="Calibri"/>
                         </a:rPr>
@@ -22228,7 +22363,7 @@
                   <a:tcPr anchor="ctr">
                     <a:lnL w="12700" cap="flat" cmpd="sng" algn="ctr">
                       <a:solidFill>
-                        <a:srgbClr val="D5D5E5"/>
+                        <a:srgbClr val="D9D9D5"/>
                       </a:solidFill>
                       <a:prstDash val="solid"/>
                       <a:round/>
@@ -22237,7 +22372,7 @@
                     </a:lnL>
                     <a:lnR w="12700" cap="flat" cmpd="sng" algn="ctr">
                       <a:solidFill>
-                        <a:srgbClr val="D5D5E5"/>
+                        <a:srgbClr val="D9D9D5"/>
                       </a:solidFill>
                       <a:prstDash val="solid"/>
                       <a:round/>
@@ -22246,7 +22381,7 @@
                     </a:lnR>
                     <a:lnT w="12700" cap="flat" cmpd="sng" algn="ctr">
                       <a:solidFill>
-                        <a:srgbClr val="D5D5E5"/>
+                        <a:srgbClr val="D9D9D5"/>
                       </a:solidFill>
                       <a:prstDash val="solid"/>
                       <a:round/>
@@ -22255,7 +22390,7 @@
                     </a:lnT>
                     <a:lnB w="12700" cap="flat" cmpd="sng" algn="ctr">
                       <a:solidFill>
-                        <a:srgbClr val="D5D5E5"/>
+                        <a:srgbClr val="D9D9D5"/>
                       </a:solidFill>
                       <a:prstDash val="solid"/>
                       <a:round/>
@@ -22274,7 +22409,7 @@
                       <a:r>
                         <a:rPr sz="1300" b="0">
                           <a:solidFill>
-                            <a:srgbClr val="1E1B3A"/>
+                            <a:srgbClr val="202124"/>
                           </a:solidFill>
                           <a:latin typeface="Calibri"/>
                         </a:rPr>
@@ -22285,7 +22420,7 @@
                   <a:tcPr anchor="ctr">
                     <a:lnL w="12700" cap="flat" cmpd="sng" algn="ctr">
                       <a:solidFill>
-                        <a:srgbClr val="D5D5E5"/>
+                        <a:srgbClr val="D9D9D5"/>
                       </a:solidFill>
                       <a:prstDash val="solid"/>
                       <a:round/>
@@ -22294,7 +22429,7 @@
                     </a:lnL>
                     <a:lnR w="12700" cap="flat" cmpd="sng" algn="ctr">
                       <a:solidFill>
-                        <a:srgbClr val="D5D5E5"/>
+                        <a:srgbClr val="D9D9D5"/>
                       </a:solidFill>
                       <a:prstDash val="solid"/>
                       <a:round/>
@@ -22303,7 +22438,7 @@
                     </a:lnR>
                     <a:lnT w="12700" cap="flat" cmpd="sng" algn="ctr">
                       <a:solidFill>
-                        <a:srgbClr val="D5D5E5"/>
+                        <a:srgbClr val="D9D9D5"/>
                       </a:solidFill>
                       <a:prstDash val="solid"/>
                       <a:round/>
@@ -22312,7 +22447,7 @@
                     </a:lnT>
                     <a:lnB w="12700" cap="flat" cmpd="sng" algn="ctr">
                       <a:solidFill>
-                        <a:srgbClr val="D5D5E5"/>
+                        <a:srgbClr val="D9D9D5"/>
                       </a:solidFill>
                       <a:prstDash val="solid"/>
                       <a:round/>
@@ -22343,7 +22478,7 @@
           </a:prstGeom>
           <a:ln w="50800">
             <a:solidFill>
-              <a:srgbClr val="E8604C"/>
+              <a:srgbClr val="F2A900"/>
             </a:solidFill>
           </a:ln>
         </p:spPr>
@@ -22388,7 +22523,7 @@
             <a:r>
               <a:rPr sz="1600" b="0">
                 <a:solidFill>
-                  <a:srgbClr val="56566E"/>
+                  <a:srgbClr val="57575A"/>
                 </a:solidFill>
                 <a:latin typeface="Calibri"/>
               </a:rPr>
@@ -22422,7 +22557,7 @@
             <a:r>
               <a:rPr sz="1000" b="0">
                 <a:solidFill>
-                  <a:srgbClr val="56566E"/>
+                  <a:srgbClr val="57575A"/>
                 </a:solidFill>
                 <a:latin typeface="Calibri"/>
               </a:rPr>
@@ -22457,7 +22592,7 @@
             <a:r>
               <a:rPr sz="1000" b="0">
                 <a:solidFill>
-                  <a:srgbClr val="56566E"/>
+                  <a:srgbClr val="57575A"/>
                 </a:solidFill>
                 <a:latin typeface="Calibri"/>
               </a:rPr>
@@ -22491,7 +22626,7 @@
             <a:r>
               <a:rPr sz="1400" b="0">
                 <a:solidFill>
-                  <a:srgbClr val="56566E"/>
+                  <a:srgbClr val="57575A"/>
                 </a:solidFill>
                 <a:latin typeface="Calibri"/>
               </a:rPr>
@@ -22505,9 +22640,18 @@
   <p:clrMapOvr>
     <a:masterClrMapping/>
   </p:clrMapOvr>
-  <p:transition spd="med" advTm="30000">
-    <p:push dir="u"/>
-  </p:transition>
+  <mc:AlternateContent xmlns:mc="http://schemas.openxmlformats.org/markup-compatibility/2006">
+    <mc:Choice xmlns:p14="http://schemas.microsoft.com/office/powerpoint/2010/main" Requires="p14">
+      <p:transition spd="slow" p14:dur="1500" advTm="10000">
+        <p:push dir="u"/>
+      </p:transition>
+    </mc:Choice>
+    <mc:Fallback>
+      <p:transition spd="slow" advTm="10000">
+        <p:push dir="u"/>
+      </p:transition>
+    </mc:Fallback>
+  </mc:AlternateContent>
   <p:timing>
     <p:tnLst>
       <p:par>
@@ -22772,7 +22916,7 @@
 <file path=ppt/theme/theme1.xml><?xml version="1.0" encoding="utf-8"?>
 <a:theme xmlns:a="http://schemas.openxmlformats.org/drawingml/2006/main" name="Office Theme">
   <a:themeElements>
-    <a:clrScheme name="Indigo and Coral">
+    <a:clrScheme name="Charcoal and Gold">
       <a:dk1>
         <a:sysClr val="windowText" lastClr="000000"/>
       </a:dk1>
@@ -22780,34 +22924,34 @@
         <a:sysClr val="window" lastClr="FFFFFF"/>
       </a:lt1>
       <a:dk2>
-        <a:srgbClr val="312E81"/>
+        <a:srgbClr val="202124"/>
       </a:dk2>
       <a:lt2>
-        <a:srgbClr val="F4F4FA"/>
+        <a:srgbClr val="F5F5F3"/>
       </a:lt2>
       <a:accent1>
-        <a:srgbClr val="312E81"/>
+        <a:srgbClr val="202124"/>
       </a:accent1>
       <a:accent2>
-        <a:srgbClr val="E8604C"/>
+        <a:srgbClr val="F2A900"/>
       </a:accent2>
       <a:accent3>
-        <a:srgbClr val="8B87C9"/>
+        <a:srgbClr val="8A6100"/>
       </a:accent3>
       <a:accent4>
-        <a:srgbClr val="C3C2DE"/>
+        <a:srgbClr val="C8C8C4"/>
       </a:accent4>
       <a:accent5>
-        <a:srgbClr val="1E1B3A"/>
+        <a:srgbClr val="5A5A5A"/>
       </a:accent5>
       <a:accent6>
-        <a:srgbClr val="5B5B73"/>
+        <a:srgbClr val="3A3A3D"/>
       </a:accent6>
       <a:hlink>
-        <a:srgbClr val="312E81"/>
+        <a:srgbClr val="8A6100"/>
       </a:hlink>
       <a:folHlink>
-        <a:srgbClr val="5B5B73"/>
+        <a:srgbClr val="5A5A5A"/>
       </a:folHlink>
     </a:clrScheme>
     <a:fontScheme name="Office">
@@ -22973,7 +23117,7 @@
 <file path=ppt/theme/theme2.xml><?xml version="1.0" encoding="utf-8"?>
 <a:theme xmlns:a="http://schemas.openxmlformats.org/drawingml/2006/main" name="Office Theme">
   <a:themeElements>
-    <a:clrScheme name="Indigo and Coral">
+    <a:clrScheme name="Charcoal and Gold">
       <a:dk1>
         <a:sysClr val="windowText" lastClr="000000"/>
       </a:dk1>
@@ -22981,34 +23125,34 @@
         <a:sysClr val="window" lastClr="FFFFFF"/>
       </a:lt1>
       <a:dk2>
-        <a:srgbClr val="312E81"/>
+        <a:srgbClr val="202124"/>
       </a:dk2>
       <a:lt2>
-        <a:srgbClr val="F4F4FA"/>
+        <a:srgbClr val="F5F5F3"/>
       </a:lt2>
       <a:accent1>
-        <a:srgbClr val="312E81"/>
+        <a:srgbClr val="202124"/>
       </a:accent1>
       <a:accent2>
-        <a:srgbClr val="E8604C"/>
+        <a:srgbClr val="F2A900"/>
       </a:accent2>
       <a:accent3>
-        <a:srgbClr val="8B87C9"/>
+        <a:srgbClr val="8A6100"/>
       </a:accent3>
       <a:accent4>
-        <a:srgbClr val="C3C2DE"/>
+        <a:srgbClr val="C8C8C4"/>
       </a:accent4>
       <a:accent5>
-        <a:srgbClr val="1E1B3A"/>
+        <a:srgbClr val="5A5A5A"/>
       </a:accent5>
       <a:accent6>
-        <a:srgbClr val="5B5B73"/>
+        <a:srgbClr val="3A3A3D"/>
       </a:accent6>
       <a:hlink>
-        <a:srgbClr val="312E81"/>
+        <a:srgbClr val="8A6100"/>
       </a:hlink>
       <a:folHlink>
-        <a:srgbClr val="5B5B73"/>
+        <a:srgbClr val="5A5A5A"/>
       </a:folHlink>
     </a:clrScheme>
     <a:fontScheme name="Office">
